--- a/발표자료양식모음/포스터 양식.pptx
+++ b/발표자료양식모음/포스터 양식.pptx
@@ -1,19 +1,19 @@
 
 <file path=ppt/presentation.xml><?xml version="1.0" encoding="utf-8"?>
-<p:presentation xmlns:a="http://schemas.openxmlformats.org/drawingml/2006/main" xmlns:r="http://schemas.openxmlformats.org/officeDocument/2006/relationships" xmlns:mc="http://schemas.openxmlformats.org/markup-compatibility/2006" xmlns:mv="urn:schemas-microsoft-com:mac:vml" xmlns:p="http://schemas.openxmlformats.org/presentationml/2006/main" xmlns:c="http://schemas.openxmlformats.org/drawingml/2006/chart" xmlns:dgm="http://schemas.openxmlformats.org/drawingml/2006/diagram" xmlns:o="urn:schemas-microsoft-com:office:office" xmlns:v="urn:schemas-microsoft-com:vml" xmlns:pvml="urn:schemas-microsoft-com:office:powerpoint" xmlns:com="http://schemas.openxmlformats.org/drawingml/2006/compatibility" xmlns:p14="http://schemas.microsoft.com/office/powerpoint/2010/main" xmlns:p15="http://schemas.microsoft.com/office/powerpoint/2012/main" xmlns:ahyp="http://schemas.microsoft.com/office/drawing/2018/hyperlinkcolor" autoCompressPictures="0" strictFirstAndLastChars="0" saveSubsetFonts="1">
+<p:presentation xmlns:a="http://schemas.openxmlformats.org/drawingml/2006/main" xmlns:r="http://schemas.openxmlformats.org/officeDocument/2006/relationships" xmlns:p="http://schemas.openxmlformats.org/presentationml/2006/main" strictFirstAndLastChars="0" saveSubsetFonts="1" autoCompressPictures="0">
   <p:sldMasterIdLst>
-    <p:sldMasterId id="2147483648" r:id="rId3"/>
+    <p:sldMasterId id="2147483648" r:id="rId1"/>
   </p:sldMasterIdLst>
   <p:notesMasterIdLst>
-    <p:notesMasterId r:id="rId4"/>
+    <p:notesMasterId r:id="rId3"/>
   </p:notesMasterIdLst>
   <p:sldIdLst>
-    <p:sldId id="256" r:id="rId5"/>
+    <p:sldId id="256" r:id="rId2"/>
   </p:sldIdLst>
-  <p:sldSz cy="30240275" cx="42479900"/>
+  <p:sldSz cx="42479913" cy="30240288"/>
   <p:notesSz cx="6858000" cy="9144000"/>
   <p:defaultTextStyle>
-    <a:defPPr lvl="0" marR="0" rtl="0" algn="l">
+    <a:defPPr marR="0" lvl="0" algn="l" rtl="0">
       <a:lnSpc>
         <a:spcPct val="100000"/>
       </a:lnSpc>
@@ -24,7 +24,7 @@
         <a:spcPts val="0"/>
       </a:spcAft>
     </a:defPPr>
-    <a:lvl1pPr lvl="0" marR="0" rtl="0" algn="l">
+    <a:lvl1pPr marR="0" lvl="0" algn="l" rtl="0">
       <a:lnSpc>
         <a:spcPct val="100000"/>
       </a:lnSpc>
@@ -38,7 +38,7 @@
         <a:srgbClr val="000000"/>
       </a:buClr>
       <a:buFont typeface="Arial"/>
-      <a:defRPr b="0" i="0" sz="1400" u="none" cap="none" strike="noStrike">
+      <a:defRPr sz="1400" b="0" i="0" u="none" strike="noStrike" cap="none">
         <a:solidFill>
           <a:srgbClr val="000000"/>
         </a:solidFill>
@@ -48,7 +48,7 @@
         <a:sym typeface="Arial"/>
       </a:defRPr>
     </a:lvl1pPr>
-    <a:lvl2pPr lvl="1" marR="0" rtl="0" algn="l">
+    <a:lvl2pPr marR="0" lvl="1" algn="l" rtl="0">
       <a:lnSpc>
         <a:spcPct val="100000"/>
       </a:lnSpc>
@@ -62,7 +62,7 @@
         <a:srgbClr val="000000"/>
       </a:buClr>
       <a:buFont typeface="Arial"/>
-      <a:defRPr b="0" i="0" sz="1400" u="none" cap="none" strike="noStrike">
+      <a:defRPr sz="1400" b="0" i="0" u="none" strike="noStrike" cap="none">
         <a:solidFill>
           <a:srgbClr val="000000"/>
         </a:solidFill>
@@ -72,7 +72,7 @@
         <a:sym typeface="Arial"/>
       </a:defRPr>
     </a:lvl2pPr>
-    <a:lvl3pPr lvl="2" marR="0" rtl="0" algn="l">
+    <a:lvl3pPr marR="0" lvl="2" algn="l" rtl="0">
       <a:lnSpc>
         <a:spcPct val="100000"/>
       </a:lnSpc>
@@ -86,7 +86,7 @@
         <a:srgbClr val="000000"/>
       </a:buClr>
       <a:buFont typeface="Arial"/>
-      <a:defRPr b="0" i="0" sz="1400" u="none" cap="none" strike="noStrike">
+      <a:defRPr sz="1400" b="0" i="0" u="none" strike="noStrike" cap="none">
         <a:solidFill>
           <a:srgbClr val="000000"/>
         </a:solidFill>
@@ -96,7 +96,7 @@
         <a:sym typeface="Arial"/>
       </a:defRPr>
     </a:lvl3pPr>
-    <a:lvl4pPr lvl="3" marR="0" rtl="0" algn="l">
+    <a:lvl4pPr marR="0" lvl="3" algn="l" rtl="0">
       <a:lnSpc>
         <a:spcPct val="100000"/>
       </a:lnSpc>
@@ -110,7 +110,7 @@
         <a:srgbClr val="000000"/>
       </a:buClr>
       <a:buFont typeface="Arial"/>
-      <a:defRPr b="0" i="0" sz="1400" u="none" cap="none" strike="noStrike">
+      <a:defRPr sz="1400" b="0" i="0" u="none" strike="noStrike" cap="none">
         <a:solidFill>
           <a:srgbClr val="000000"/>
         </a:solidFill>
@@ -120,7 +120,7 @@
         <a:sym typeface="Arial"/>
       </a:defRPr>
     </a:lvl4pPr>
-    <a:lvl5pPr lvl="4" marR="0" rtl="0" algn="l">
+    <a:lvl5pPr marR="0" lvl="4" algn="l" rtl="0">
       <a:lnSpc>
         <a:spcPct val="100000"/>
       </a:lnSpc>
@@ -134,7 +134,7 @@
         <a:srgbClr val="000000"/>
       </a:buClr>
       <a:buFont typeface="Arial"/>
-      <a:defRPr b="0" i="0" sz="1400" u="none" cap="none" strike="noStrike">
+      <a:defRPr sz="1400" b="0" i="0" u="none" strike="noStrike" cap="none">
         <a:solidFill>
           <a:srgbClr val="000000"/>
         </a:solidFill>
@@ -144,7 +144,7 @@
         <a:sym typeface="Arial"/>
       </a:defRPr>
     </a:lvl5pPr>
-    <a:lvl6pPr lvl="5" marR="0" rtl="0" algn="l">
+    <a:lvl6pPr marR="0" lvl="5" algn="l" rtl="0">
       <a:lnSpc>
         <a:spcPct val="100000"/>
       </a:lnSpc>
@@ -158,7 +158,7 @@
         <a:srgbClr val="000000"/>
       </a:buClr>
       <a:buFont typeface="Arial"/>
-      <a:defRPr b="0" i="0" sz="1400" u="none" cap="none" strike="noStrike">
+      <a:defRPr sz="1400" b="0" i="0" u="none" strike="noStrike" cap="none">
         <a:solidFill>
           <a:srgbClr val="000000"/>
         </a:solidFill>
@@ -168,7 +168,7 @@
         <a:sym typeface="Arial"/>
       </a:defRPr>
     </a:lvl6pPr>
-    <a:lvl7pPr lvl="6" marR="0" rtl="0" algn="l">
+    <a:lvl7pPr marR="0" lvl="6" algn="l" rtl="0">
       <a:lnSpc>
         <a:spcPct val="100000"/>
       </a:lnSpc>
@@ -182,7 +182,7 @@
         <a:srgbClr val="000000"/>
       </a:buClr>
       <a:buFont typeface="Arial"/>
-      <a:defRPr b="0" i="0" sz="1400" u="none" cap="none" strike="noStrike">
+      <a:defRPr sz="1400" b="0" i="0" u="none" strike="noStrike" cap="none">
         <a:solidFill>
           <a:srgbClr val="000000"/>
         </a:solidFill>
@@ -192,7 +192,7 @@
         <a:sym typeface="Arial"/>
       </a:defRPr>
     </a:lvl7pPr>
-    <a:lvl8pPr lvl="7" marR="0" rtl="0" algn="l">
+    <a:lvl8pPr marR="0" lvl="7" algn="l" rtl="0">
       <a:lnSpc>
         <a:spcPct val="100000"/>
       </a:lnSpc>
@@ -206,7 +206,7 @@
         <a:srgbClr val="000000"/>
       </a:buClr>
       <a:buFont typeface="Arial"/>
-      <a:defRPr b="0" i="0" sz="1400" u="none" cap="none" strike="noStrike">
+      <a:defRPr sz="1400" b="0" i="0" u="none" strike="noStrike" cap="none">
         <a:solidFill>
           <a:srgbClr val="000000"/>
         </a:solidFill>
@@ -216,7 +216,7 @@
         <a:sym typeface="Arial"/>
       </a:defRPr>
     </a:lvl8pPr>
-    <a:lvl9pPr lvl="8" marR="0" rtl="0" algn="l">
+    <a:lvl9pPr marR="0" lvl="8" algn="l" rtl="0">
       <a:lnSpc>
         <a:spcPct val="100000"/>
       </a:lnSpc>
@@ -230,7 +230,7 @@
         <a:srgbClr val="000000"/>
       </a:buClr>
       <a:buFont typeface="Arial"/>
-      <a:defRPr b="0" i="0" sz="1400" u="none" cap="none" strike="noStrike">
+      <a:defRPr sz="1400" b="0" i="0" u="none" strike="noStrike" cap="none">
         <a:solidFill>
           <a:srgbClr val="000000"/>
         </a:solidFill>
@@ -243,25 +243,26 @@
   </p:defaultTextStyle>
   <p:extLst>
     <p:ext uri="GoogleSlidesCustomDataVersion2">
-      <go:slidesCustomData xmlns:go="http://customooxmlschemas.google.com/" r:id="rId6" roundtripDataSignature="AMtx7mj3DEpEy1lW+IknwrV0K5B00CCi3g=="/>
+      <go:slidesCustomData xmlns:go="http://customooxmlschemas.google.com/" xmlns:ahyp="http://schemas.microsoft.com/office/drawing/2018/hyperlinkcolor" xmlns:p15="http://schemas.microsoft.com/office/powerpoint/2012/main" xmlns:p14="http://schemas.microsoft.com/office/powerpoint/2010/main" xmlns:com="http://schemas.openxmlformats.org/drawingml/2006/compatibility" xmlns:pvml="urn:schemas-microsoft-com:office:powerpoint" xmlns:v="urn:schemas-microsoft-com:vml" xmlns:o="urn:schemas-microsoft-com:office:office" xmlns:dgm="http://schemas.openxmlformats.org/drawingml/2006/diagram" xmlns:c="http://schemas.openxmlformats.org/drawingml/2006/chart" xmlns:mv="urn:schemas-microsoft-com:mac:vml" xmlns:mc="http://schemas.openxmlformats.org/markup-compatibility/2006" xmlns="" r:id="rId6" roundtripDataSignature="AMtx7mj3DEpEy1lW+IknwrV0K5B00CCi3g=="/>
     </p:ext>
   </p:extLst>
 </p:presentation>
 </file>
 
 <file path=ppt/notesMasters/notesMaster1.xml><?xml version="1.0" encoding="utf-8"?>
-<p:notesMaster xmlns:a="http://schemas.openxmlformats.org/drawingml/2006/main" xmlns:r="http://schemas.openxmlformats.org/officeDocument/2006/relationships" xmlns:mc="http://schemas.openxmlformats.org/markup-compatibility/2006" xmlns:mv="urn:schemas-microsoft-com:mac:vml" xmlns:p="http://schemas.openxmlformats.org/presentationml/2006/main" xmlns:c="http://schemas.openxmlformats.org/drawingml/2006/chart" xmlns:dgm="http://schemas.openxmlformats.org/drawingml/2006/diagram" xmlns:o="urn:schemas-microsoft-com:office:office" xmlns:v="urn:schemas-microsoft-com:vml" xmlns:pvml="urn:schemas-microsoft-com:office:powerpoint" xmlns:com="http://schemas.openxmlformats.org/drawingml/2006/compatibility" xmlns:p14="http://schemas.microsoft.com/office/powerpoint/2010/main" xmlns:p15="http://schemas.microsoft.com/office/powerpoint/2012/main" xmlns:ahyp="http://schemas.microsoft.com/office/drawing/2018/hyperlinkcolor">
+<p:notesMaster xmlns:a="http://schemas.openxmlformats.org/drawingml/2006/main" xmlns:r="http://schemas.openxmlformats.org/officeDocument/2006/relationships" xmlns:p="http://schemas.openxmlformats.org/presentationml/2006/main">
   <p:cSld>
     <p:bg>
       <p:bgPr>
         <a:solidFill>
           <a:schemeClr val="lt1"/>
         </a:solidFill>
+        <a:effectLst/>
       </p:bgPr>
     </p:bg>
     <p:spTree>
       <p:nvGrpSpPr>
-        <p:cNvPr id="2" name="Shape 2"/>
+        <p:cNvPr id="1" name="Shape 2"/>
         <p:cNvGrpSpPr/>
         <p:nvPr/>
       </p:nvGrpSpPr>
@@ -276,9 +277,11 @@
       <p:sp>
         <p:nvSpPr>
           <p:cNvPr id="3" name="Google Shape;3;n"/>
-          <p:cNvSpPr/>
+          <p:cNvSpPr>
+            <a:spLocks noGrp="1" noRot="1" noChangeAspect="1"/>
+          </p:cNvSpPr>
           <p:nvPr>
-            <p:ph idx="2" type="sldImg"/>
+            <p:ph type="sldImg" idx="2"/>
           </p:nvPr>
         </p:nvSpPr>
         <p:spPr>
@@ -287,9 +290,13 @@
             <a:ext cx="4572225" cy="3429000"/>
           </a:xfrm>
           <a:custGeom>
-            <a:rect b="b" l="l" r="r" t="t"/>
+            <a:avLst/>
+            <a:gdLst/>
+            <a:ahLst/>
+            <a:cxnLst/>
+            <a:rect l="l" t="t" r="r" b="b"/>
             <a:pathLst>
-              <a:path extrusionOk="0" h="120000" w="120000">
+              <a:path w="120000" h="120000" extrusionOk="0">
                 <a:moveTo>
                   <a:pt x="0" y="0"/>
                 </a:moveTo>
@@ -307,23 +314,25 @@
             </a:pathLst>
           </a:custGeom>
           <a:noFill/>
-          <a:ln cap="flat" cmpd="sng" w="9525">
+          <a:ln w="9525" cap="flat" cmpd="sng">
             <a:solidFill>
               <a:srgbClr val="000000"/>
             </a:solidFill>
             <a:prstDash val="solid"/>
             <a:round/>
-            <a:headEnd len="sm" w="sm" type="none"/>
-            <a:tailEnd len="sm" w="sm" type="none"/>
+            <a:headEnd type="none" w="sm" len="sm"/>
+            <a:tailEnd type="none" w="sm" len="sm"/>
           </a:ln>
         </p:spPr>
       </p:sp>
       <p:sp>
         <p:nvSpPr>
           <p:cNvPr id="4" name="Google Shape;4;n"/>
-          <p:cNvSpPr txBox="1"/>
+          <p:cNvSpPr txBox="1">
+            <a:spLocks noGrp="1"/>
+          </p:cNvSpPr>
           <p:nvPr>
-            <p:ph idx="1" type="body"/>
+            <p:ph type="body" idx="1"/>
           </p:nvPr>
         </p:nvSpPr>
         <p:spPr>
@@ -340,11 +349,11 @@
           </a:ln>
         </p:spPr>
         <p:txBody>
-          <a:bodyPr anchorCtr="0" anchor="t" bIns="91425" lIns="91425" spcFirstLastPara="1" rIns="91425" wrap="square" tIns="91425">
+          <a:bodyPr spcFirstLastPara="1" wrap="square" lIns="91425" tIns="91425" rIns="91425" bIns="91425" anchor="t" anchorCtr="0">
             <a:noAutofit/>
           </a:bodyPr>
           <a:lstStyle>
-            <a:lvl1pPr indent="-298450" lvl="0" marL="457200" marR="0" rtl="0" algn="l">
+            <a:lvl1pPr marL="457200" marR="0" lvl="0" indent="-298450" algn="l" rtl="0">
               <a:lnSpc>
                 <a:spcPct val="100000"/>
               </a:lnSpc>
@@ -360,7 +369,7 @@
               <a:buSzPts val="1100"/>
               <a:buFont typeface="Arial"/>
               <a:buChar char="●"/>
-              <a:defRPr b="0" i="0" sz="1100" u="none" cap="none" strike="noStrike">
+              <a:defRPr sz="1100" b="0" i="0" u="none" strike="noStrike" cap="none">
                 <a:solidFill>
                   <a:srgbClr val="000000"/>
                 </a:solidFill>
@@ -370,7 +379,7 @@
                 <a:sym typeface="Arial"/>
               </a:defRPr>
             </a:lvl1pPr>
-            <a:lvl2pPr indent="-298450" lvl="1" marL="914400" marR="0" rtl="0" algn="l">
+            <a:lvl2pPr marL="914400" marR="0" lvl="1" indent="-298450" algn="l" rtl="0">
               <a:lnSpc>
                 <a:spcPct val="100000"/>
               </a:lnSpc>
@@ -386,7 +395,7 @@
               <a:buSzPts val="1100"/>
               <a:buFont typeface="Arial"/>
               <a:buChar char="○"/>
-              <a:defRPr b="0" i="0" sz="1100" u="none" cap="none" strike="noStrike">
+              <a:defRPr sz="1100" b="0" i="0" u="none" strike="noStrike" cap="none">
                 <a:solidFill>
                   <a:srgbClr val="000000"/>
                 </a:solidFill>
@@ -396,7 +405,7 @@
                 <a:sym typeface="Arial"/>
               </a:defRPr>
             </a:lvl2pPr>
-            <a:lvl3pPr indent="-298450" lvl="2" marL="1371600" marR="0" rtl="0" algn="l">
+            <a:lvl3pPr marL="1371600" marR="0" lvl="2" indent="-298450" algn="l" rtl="0">
               <a:lnSpc>
                 <a:spcPct val="100000"/>
               </a:lnSpc>
@@ -412,7 +421,7 @@
               <a:buSzPts val="1100"/>
               <a:buFont typeface="Arial"/>
               <a:buChar char="■"/>
-              <a:defRPr b="0" i="0" sz="1100" u="none" cap="none" strike="noStrike">
+              <a:defRPr sz="1100" b="0" i="0" u="none" strike="noStrike" cap="none">
                 <a:solidFill>
                   <a:srgbClr val="000000"/>
                 </a:solidFill>
@@ -422,7 +431,7 @@
                 <a:sym typeface="Arial"/>
               </a:defRPr>
             </a:lvl3pPr>
-            <a:lvl4pPr indent="-298450" lvl="3" marL="1828800" marR="0" rtl="0" algn="l">
+            <a:lvl4pPr marL="1828800" marR="0" lvl="3" indent="-298450" algn="l" rtl="0">
               <a:lnSpc>
                 <a:spcPct val="100000"/>
               </a:lnSpc>
@@ -438,7 +447,7 @@
               <a:buSzPts val="1100"/>
               <a:buFont typeface="Arial"/>
               <a:buChar char="●"/>
-              <a:defRPr b="0" i="0" sz="1100" u="none" cap="none" strike="noStrike">
+              <a:defRPr sz="1100" b="0" i="0" u="none" strike="noStrike" cap="none">
                 <a:solidFill>
                   <a:srgbClr val="000000"/>
                 </a:solidFill>
@@ -448,7 +457,7 @@
                 <a:sym typeface="Arial"/>
               </a:defRPr>
             </a:lvl4pPr>
-            <a:lvl5pPr indent="-298450" lvl="4" marL="2286000" marR="0" rtl="0" algn="l">
+            <a:lvl5pPr marL="2286000" marR="0" lvl="4" indent="-298450" algn="l" rtl="0">
               <a:lnSpc>
                 <a:spcPct val="100000"/>
               </a:lnSpc>
@@ -464,7 +473,7 @@
               <a:buSzPts val="1100"/>
               <a:buFont typeface="Arial"/>
               <a:buChar char="○"/>
-              <a:defRPr b="0" i="0" sz="1100" u="none" cap="none" strike="noStrike">
+              <a:defRPr sz="1100" b="0" i="0" u="none" strike="noStrike" cap="none">
                 <a:solidFill>
                   <a:srgbClr val="000000"/>
                 </a:solidFill>
@@ -474,7 +483,7 @@
                 <a:sym typeface="Arial"/>
               </a:defRPr>
             </a:lvl5pPr>
-            <a:lvl6pPr indent="-298450" lvl="5" marL="2743200" marR="0" rtl="0" algn="l">
+            <a:lvl6pPr marL="2743200" marR="0" lvl="5" indent="-298450" algn="l" rtl="0">
               <a:lnSpc>
                 <a:spcPct val="100000"/>
               </a:lnSpc>
@@ -490,7 +499,7 @@
               <a:buSzPts val="1100"/>
               <a:buFont typeface="Arial"/>
               <a:buChar char="■"/>
-              <a:defRPr b="0" i="0" sz="1100" u="none" cap="none" strike="noStrike">
+              <a:defRPr sz="1100" b="0" i="0" u="none" strike="noStrike" cap="none">
                 <a:solidFill>
                   <a:srgbClr val="000000"/>
                 </a:solidFill>
@@ -500,7 +509,7 @@
                 <a:sym typeface="Arial"/>
               </a:defRPr>
             </a:lvl6pPr>
-            <a:lvl7pPr indent="-298450" lvl="6" marL="3200400" marR="0" rtl="0" algn="l">
+            <a:lvl7pPr marL="3200400" marR="0" lvl="6" indent="-298450" algn="l" rtl="0">
               <a:lnSpc>
                 <a:spcPct val="100000"/>
               </a:lnSpc>
@@ -516,7 +525,7 @@
               <a:buSzPts val="1100"/>
               <a:buFont typeface="Arial"/>
               <a:buChar char="●"/>
-              <a:defRPr b="0" i="0" sz="1100" u="none" cap="none" strike="noStrike">
+              <a:defRPr sz="1100" b="0" i="0" u="none" strike="noStrike" cap="none">
                 <a:solidFill>
                   <a:srgbClr val="000000"/>
                 </a:solidFill>
@@ -526,7 +535,7 @@
                 <a:sym typeface="Arial"/>
               </a:defRPr>
             </a:lvl7pPr>
-            <a:lvl8pPr indent="-298450" lvl="7" marL="3657600" marR="0" rtl="0" algn="l">
+            <a:lvl8pPr marL="3657600" marR="0" lvl="7" indent="-298450" algn="l" rtl="0">
               <a:lnSpc>
                 <a:spcPct val="100000"/>
               </a:lnSpc>
@@ -542,7 +551,7 @@
               <a:buSzPts val="1100"/>
               <a:buFont typeface="Arial"/>
               <a:buChar char="○"/>
-              <a:defRPr b="0" i="0" sz="1100" u="none" cap="none" strike="noStrike">
+              <a:defRPr sz="1100" b="0" i="0" u="none" strike="noStrike" cap="none">
                 <a:solidFill>
                   <a:srgbClr val="000000"/>
                 </a:solidFill>
@@ -552,7 +561,7 @@
                 <a:sym typeface="Arial"/>
               </a:defRPr>
             </a:lvl8pPr>
-            <a:lvl9pPr indent="-298450" lvl="8" marL="4114800" marR="0" rtl="0" algn="l">
+            <a:lvl9pPr marL="4114800" marR="0" lvl="8" indent="-298450" algn="l" rtl="0">
               <a:lnSpc>
                 <a:spcPct val="100000"/>
               </a:lnSpc>
@@ -568,7 +577,7 @@
               <a:buSzPts val="1100"/>
               <a:buFont typeface="Arial"/>
               <a:buChar char="■"/>
-              <a:defRPr b="0" i="0" sz="1100" u="none" cap="none" strike="noStrike">
+              <a:defRPr sz="1100" b="0" i="0" u="none" strike="noStrike" cap="none">
                 <a:solidFill>
                   <a:srgbClr val="000000"/>
                 </a:solidFill>
@@ -579,14 +588,16 @@
               </a:defRPr>
             </a:lvl9pPr>
           </a:lstStyle>
-          <a:p/>
+          <a:p>
+            <a:endParaRPr/>
+          </a:p>
         </p:txBody>
       </p:sp>
     </p:spTree>
   </p:cSld>
-  <p:clrMap accent1="accent1" accent2="accent2" accent3="accent3" accent4="accent4" accent5="accent5" accent6="accent6" bg1="lt1" bg2="dk2" tx1="dk1" tx2="lt2" folHlink="folHlink" hlink="hlink"/>
+  <p:clrMap bg1="lt1" tx1="dk1" bg2="dk2" tx2="lt2" accent1="accent1" accent2="accent2" accent3="accent3" accent4="accent4" accent5="accent5" accent6="accent6" hlink="hlink" folHlink="folHlink"/>
   <p:notesStyle>
-    <a:defPPr lvl="0" marR="0" rtl="0" algn="l">
+    <a:defPPr marR="0" lvl="0" algn="l" rtl="0">
       <a:lnSpc>
         <a:spcPct val="100000"/>
       </a:lnSpc>
@@ -597,7 +608,7 @@
         <a:spcPts val="0"/>
       </a:spcAft>
     </a:defPPr>
-    <a:lvl1pPr lvl="0" marR="0" rtl="0" algn="l">
+    <a:lvl1pPr marR="0" lvl="0" algn="l" rtl="0">
       <a:lnSpc>
         <a:spcPct val="100000"/>
       </a:lnSpc>
@@ -611,7 +622,7 @@
         <a:srgbClr val="000000"/>
       </a:buClr>
       <a:buFont typeface="Arial"/>
-      <a:defRPr b="0" i="0" sz="1400" u="none" cap="none" strike="noStrike">
+      <a:defRPr sz="1400" b="0" i="0" u="none" strike="noStrike" cap="none">
         <a:solidFill>
           <a:srgbClr val="000000"/>
         </a:solidFill>
@@ -621,7 +632,7 @@
         <a:sym typeface="Arial"/>
       </a:defRPr>
     </a:lvl1pPr>
-    <a:lvl2pPr lvl="1" marR="0" rtl="0" algn="l">
+    <a:lvl2pPr marR="0" lvl="1" algn="l" rtl="0">
       <a:lnSpc>
         <a:spcPct val="100000"/>
       </a:lnSpc>
@@ -635,7 +646,7 @@
         <a:srgbClr val="000000"/>
       </a:buClr>
       <a:buFont typeface="Arial"/>
-      <a:defRPr b="0" i="0" sz="1400" u="none" cap="none" strike="noStrike">
+      <a:defRPr sz="1400" b="0" i="0" u="none" strike="noStrike" cap="none">
         <a:solidFill>
           <a:srgbClr val="000000"/>
         </a:solidFill>
@@ -645,7 +656,7 @@
         <a:sym typeface="Arial"/>
       </a:defRPr>
     </a:lvl2pPr>
-    <a:lvl3pPr lvl="2" marR="0" rtl="0" algn="l">
+    <a:lvl3pPr marR="0" lvl="2" algn="l" rtl="0">
       <a:lnSpc>
         <a:spcPct val="100000"/>
       </a:lnSpc>
@@ -659,7 +670,7 @@
         <a:srgbClr val="000000"/>
       </a:buClr>
       <a:buFont typeface="Arial"/>
-      <a:defRPr b="0" i="0" sz="1400" u="none" cap="none" strike="noStrike">
+      <a:defRPr sz="1400" b="0" i="0" u="none" strike="noStrike" cap="none">
         <a:solidFill>
           <a:srgbClr val="000000"/>
         </a:solidFill>
@@ -669,7 +680,7 @@
         <a:sym typeface="Arial"/>
       </a:defRPr>
     </a:lvl3pPr>
-    <a:lvl4pPr lvl="3" marR="0" rtl="0" algn="l">
+    <a:lvl4pPr marR="0" lvl="3" algn="l" rtl="0">
       <a:lnSpc>
         <a:spcPct val="100000"/>
       </a:lnSpc>
@@ -683,7 +694,7 @@
         <a:srgbClr val="000000"/>
       </a:buClr>
       <a:buFont typeface="Arial"/>
-      <a:defRPr b="0" i="0" sz="1400" u="none" cap="none" strike="noStrike">
+      <a:defRPr sz="1400" b="0" i="0" u="none" strike="noStrike" cap="none">
         <a:solidFill>
           <a:srgbClr val="000000"/>
         </a:solidFill>
@@ -693,7 +704,7 @@
         <a:sym typeface="Arial"/>
       </a:defRPr>
     </a:lvl4pPr>
-    <a:lvl5pPr lvl="4" marR="0" rtl="0" algn="l">
+    <a:lvl5pPr marR="0" lvl="4" algn="l" rtl="0">
       <a:lnSpc>
         <a:spcPct val="100000"/>
       </a:lnSpc>
@@ -707,7 +718,7 @@
         <a:srgbClr val="000000"/>
       </a:buClr>
       <a:buFont typeface="Arial"/>
-      <a:defRPr b="0" i="0" sz="1400" u="none" cap="none" strike="noStrike">
+      <a:defRPr sz="1400" b="0" i="0" u="none" strike="noStrike" cap="none">
         <a:solidFill>
           <a:srgbClr val="000000"/>
         </a:solidFill>
@@ -717,7 +728,7 @@
         <a:sym typeface="Arial"/>
       </a:defRPr>
     </a:lvl5pPr>
-    <a:lvl6pPr lvl="5" marR="0" rtl="0" algn="l">
+    <a:lvl6pPr marR="0" lvl="5" algn="l" rtl="0">
       <a:lnSpc>
         <a:spcPct val="100000"/>
       </a:lnSpc>
@@ -731,7 +742,7 @@
         <a:srgbClr val="000000"/>
       </a:buClr>
       <a:buFont typeface="Arial"/>
-      <a:defRPr b="0" i="0" sz="1400" u="none" cap="none" strike="noStrike">
+      <a:defRPr sz="1400" b="0" i="0" u="none" strike="noStrike" cap="none">
         <a:solidFill>
           <a:srgbClr val="000000"/>
         </a:solidFill>
@@ -741,7 +752,7 @@
         <a:sym typeface="Arial"/>
       </a:defRPr>
     </a:lvl6pPr>
-    <a:lvl7pPr lvl="6" marR="0" rtl="0" algn="l">
+    <a:lvl7pPr marR="0" lvl="6" algn="l" rtl="0">
       <a:lnSpc>
         <a:spcPct val="100000"/>
       </a:lnSpc>
@@ -755,7 +766,7 @@
         <a:srgbClr val="000000"/>
       </a:buClr>
       <a:buFont typeface="Arial"/>
-      <a:defRPr b="0" i="0" sz="1400" u="none" cap="none" strike="noStrike">
+      <a:defRPr sz="1400" b="0" i="0" u="none" strike="noStrike" cap="none">
         <a:solidFill>
           <a:srgbClr val="000000"/>
         </a:solidFill>
@@ -765,7 +776,7 @@
         <a:sym typeface="Arial"/>
       </a:defRPr>
     </a:lvl7pPr>
-    <a:lvl8pPr lvl="7" marR="0" rtl="0" algn="l">
+    <a:lvl8pPr marR="0" lvl="7" algn="l" rtl="0">
       <a:lnSpc>
         <a:spcPct val="100000"/>
       </a:lnSpc>
@@ -779,7 +790,7 @@
         <a:srgbClr val="000000"/>
       </a:buClr>
       <a:buFont typeface="Arial"/>
-      <a:defRPr b="0" i="0" sz="1400" u="none" cap="none" strike="noStrike">
+      <a:defRPr sz="1400" b="0" i="0" u="none" strike="noStrike" cap="none">
         <a:solidFill>
           <a:srgbClr val="000000"/>
         </a:solidFill>
@@ -789,7 +800,7 @@
         <a:sym typeface="Arial"/>
       </a:defRPr>
     </a:lvl8pPr>
-    <a:lvl9pPr lvl="8" marR="0" rtl="0" algn="l">
+    <a:lvl9pPr marR="0" lvl="8" algn="l" rtl="0">
       <a:lnSpc>
         <a:spcPct val="100000"/>
       </a:lnSpc>
@@ -803,7 +814,7 @@
         <a:srgbClr val="000000"/>
       </a:buClr>
       <a:buFont typeface="Arial"/>
-      <a:defRPr b="0" i="0" sz="1400" u="none" cap="none" strike="noStrike">
+      <a:defRPr sz="1400" b="0" i="0" u="none" strike="noStrike" cap="none">
         <a:solidFill>
           <a:srgbClr val="000000"/>
         </a:solidFill>
@@ -818,11 +829,11 @@
 </file>
 
 <file path=ppt/notesSlides/notesSlide1.xml><?xml version="1.0" encoding="utf-8"?>
-<p:notes xmlns:a="http://schemas.openxmlformats.org/drawingml/2006/main" xmlns:r="http://schemas.openxmlformats.org/officeDocument/2006/relationships" xmlns:mc="http://schemas.openxmlformats.org/markup-compatibility/2006" xmlns:mv="urn:schemas-microsoft-com:mac:vml" xmlns:p="http://schemas.openxmlformats.org/presentationml/2006/main" xmlns:c="http://schemas.openxmlformats.org/drawingml/2006/chart" xmlns:dgm="http://schemas.openxmlformats.org/drawingml/2006/diagram" xmlns:o="urn:schemas-microsoft-com:office:office" xmlns:v="urn:schemas-microsoft-com:vml" xmlns:pvml="urn:schemas-microsoft-com:office:powerpoint" xmlns:com="http://schemas.openxmlformats.org/drawingml/2006/compatibility" xmlns:p14="http://schemas.microsoft.com/office/powerpoint/2010/main" xmlns:p15="http://schemas.microsoft.com/office/powerpoint/2012/main" xmlns:ahyp="http://schemas.microsoft.com/office/drawing/2018/hyperlinkcolor" showMasterPhAnim="0" showMasterSp="0">
+<p:notes xmlns:a="http://schemas.openxmlformats.org/drawingml/2006/main" xmlns:r="http://schemas.openxmlformats.org/officeDocument/2006/relationships" xmlns:p="http://schemas.openxmlformats.org/presentationml/2006/main" showMasterSp="0" showMasterPhAnim="0">
   <p:cSld>
     <p:spTree>
       <p:nvGrpSpPr>
-        <p:cNvPr id="48" name="Shape 48"/>
+        <p:cNvPr id="1" name="Shape 48"/>
         <p:cNvGrpSpPr/>
         <p:nvPr/>
       </p:nvGrpSpPr>
@@ -837,9 +848,11 @@
       <p:sp>
         <p:nvSpPr>
           <p:cNvPr id="49" name="Google Shape;49;p2:notes"/>
-          <p:cNvSpPr txBox="1"/>
+          <p:cNvSpPr txBox="1">
+            <a:spLocks noGrp="1"/>
+          </p:cNvSpPr>
           <p:nvPr>
-            <p:ph idx="1" type="body"/>
+            <p:ph type="body" idx="1"/>
           </p:nvPr>
         </p:nvSpPr>
         <p:spPr>
@@ -856,12 +869,12 @@
           </a:ln>
         </p:spPr>
         <p:txBody>
-          <a:bodyPr anchorCtr="0" anchor="t" bIns="91425" lIns="91425" spcFirstLastPara="1" rIns="91425" wrap="square" tIns="91425">
+          <a:bodyPr spcFirstLastPara="1" wrap="square" lIns="91425" tIns="91425" rIns="91425" bIns="91425" anchor="t" anchorCtr="0">
             <a:noAutofit/>
           </a:bodyPr>
           <a:lstStyle/>
           <a:p>
-            <a:pPr indent="0" lvl="0" marL="0" rtl="0" algn="l">
+            <a:pPr marL="0" lvl="0" indent="0" algn="l" rtl="0">
               <a:lnSpc>
                 <a:spcPct val="100000"/>
               </a:lnSpc>
@@ -874,9 +887,6 @@
               <a:buSzPts val="1100"/>
               <a:buNone/>
             </a:pPr>
-            <a:r>
-              <a:t/>
-            </a:r>
             <a:endParaRPr/>
           </a:p>
         </p:txBody>
@@ -884,20 +894,26 @@
       <p:sp>
         <p:nvSpPr>
           <p:cNvPr id="50" name="Google Shape;50;p2:notes"/>
-          <p:cNvSpPr/>
+          <p:cNvSpPr>
+            <a:spLocks noGrp="1" noRot="1" noChangeAspect="1"/>
+          </p:cNvSpPr>
           <p:nvPr>
-            <p:ph idx="2" type="sldImg"/>
+            <p:ph type="sldImg" idx="2"/>
           </p:nvPr>
         </p:nvSpPr>
         <p:spPr>
           <a:xfrm>
-            <a:off x="1143225" y="685800"/>
-            <a:ext cx="4572225" cy="3429000"/>
+            <a:off x="1020763" y="685800"/>
+            <a:ext cx="4816475" cy="3429000"/>
           </a:xfrm>
           <a:custGeom>
-            <a:rect b="b" l="l" r="r" t="t"/>
+            <a:avLst/>
+            <a:gdLst/>
+            <a:ahLst/>
+            <a:cxnLst/>
+            <a:rect l="l" t="t" r="r" b="b"/>
             <a:pathLst>
-              <a:path extrusionOk="0" h="120000" w="120000">
+              <a:path w="120000" h="120000" extrusionOk="0">
                 <a:moveTo>
                   <a:pt x="0" y="0"/>
                 </a:moveTo>
@@ -915,14 +931,14 @@
             </a:pathLst>
           </a:custGeom>
           <a:noFill/>
-          <a:ln cap="flat" cmpd="sng" w="9525">
+          <a:ln w="9525" cap="flat" cmpd="sng">
             <a:solidFill>
               <a:srgbClr val="000000"/>
             </a:solidFill>
             <a:prstDash val="solid"/>
             <a:round/>
-            <a:headEnd len="sm" w="sm" type="none"/>
-            <a:tailEnd len="sm" w="sm" type="none"/>
+            <a:headEnd type="none" w="sm" len="sm"/>
+            <a:tailEnd type="none" w="sm" len="sm"/>
           </a:ln>
         </p:spPr>
       </p:sp>
@@ -935,11 +951,11 @@
 </file>
 
 <file path=ppt/slideLayouts/slideLayout1.xml><?xml version="1.0" encoding="utf-8"?>
-<p:sldLayout xmlns:a="http://schemas.openxmlformats.org/drawingml/2006/main" xmlns:r="http://schemas.openxmlformats.org/officeDocument/2006/relationships" xmlns:mc="http://schemas.openxmlformats.org/markup-compatibility/2006" xmlns:mv="urn:schemas-microsoft-com:mac:vml" xmlns:p="http://schemas.openxmlformats.org/presentationml/2006/main" xmlns:c="http://schemas.openxmlformats.org/drawingml/2006/chart" xmlns:dgm="http://schemas.openxmlformats.org/drawingml/2006/diagram" xmlns:o="urn:schemas-microsoft-com:office:office" xmlns:v="urn:schemas-microsoft-com:vml" xmlns:pvml="urn:schemas-microsoft-com:office:powerpoint" xmlns:com="http://schemas.openxmlformats.org/drawingml/2006/compatibility" xmlns:p14="http://schemas.microsoft.com/office/powerpoint/2010/main" xmlns:p15="http://schemas.microsoft.com/office/powerpoint/2012/main" xmlns:ahyp="http://schemas.microsoft.com/office/drawing/2018/hyperlinkcolor" matchingName="Blank" type="blank">
+<p:sldLayout xmlns:a="http://schemas.openxmlformats.org/drawingml/2006/main" xmlns:r="http://schemas.openxmlformats.org/officeDocument/2006/relationships" xmlns:p="http://schemas.openxmlformats.org/presentationml/2006/main" matchingName="Blank" type="blank">
   <p:cSld name="BLANK">
     <p:spTree>
       <p:nvGrpSpPr>
-        <p:cNvPr id="9" name="Shape 9"/>
+        <p:cNvPr id="1" name="Shape 9"/>
         <p:cNvGrpSpPr/>
         <p:nvPr/>
       </p:nvGrpSpPr>
@@ -954,9 +970,11 @@
       <p:sp>
         <p:nvSpPr>
           <p:cNvPr id="10" name="Google Shape;10;g2b16e703bd7_0_43"/>
-          <p:cNvSpPr txBox="1"/>
+          <p:cNvSpPr txBox="1">
+            <a:spLocks noGrp="1"/>
+          </p:cNvSpPr>
           <p:nvPr>
-            <p:ph idx="12" type="sldNum"/>
+            <p:ph type="sldNum" idx="12"/>
           </p:nvPr>
         </p:nvSpPr>
         <p:spPr>
@@ -973,11 +991,11 @@
           </a:ln>
         </p:spPr>
         <p:txBody>
-          <a:bodyPr anchorCtr="0" anchor="ctr" bIns="462325" lIns="462325" spcFirstLastPara="1" rIns="462325" wrap="square" tIns="462325">
+          <a:bodyPr spcFirstLastPara="1" wrap="square" lIns="462325" tIns="462325" rIns="462325" bIns="462325" anchor="ctr" anchorCtr="0">
             <a:normAutofit/>
           </a:bodyPr>
           <a:lstStyle>
-            <a:lvl1pPr indent="0" lvl="0" marL="0" marR="0" algn="r">
+            <a:lvl1pPr marL="0" marR="0" lvl="0" indent="0" algn="r">
               <a:lnSpc>
                 <a:spcPct val="100000"/>
               </a:lnSpc>
@@ -993,7 +1011,7 @@
               <a:buSzPts val="5100"/>
               <a:buFont typeface="Arial"/>
               <a:buNone/>
-              <a:defRPr b="0" i="0" sz="5100" u="none" cap="none" strike="noStrike">
+              <a:defRPr sz="5100" b="0" i="0" u="none" strike="noStrike" cap="none">
                 <a:solidFill>
                   <a:schemeClr val="dk2"/>
                 </a:solidFill>
@@ -1003,7 +1021,7 @@
                 <a:sym typeface="Arial"/>
               </a:defRPr>
             </a:lvl1pPr>
-            <a:lvl2pPr indent="0" lvl="1" marL="0" marR="0" algn="r">
+            <a:lvl2pPr marL="0" marR="0" lvl="1" indent="0" algn="r">
               <a:lnSpc>
                 <a:spcPct val="100000"/>
               </a:lnSpc>
@@ -1019,7 +1037,7 @@
               <a:buSzPts val="5100"/>
               <a:buFont typeface="Arial"/>
               <a:buNone/>
-              <a:defRPr b="0" i="0" sz="5100" u="none" cap="none" strike="noStrike">
+              <a:defRPr sz="5100" b="0" i="0" u="none" strike="noStrike" cap="none">
                 <a:solidFill>
                   <a:schemeClr val="dk2"/>
                 </a:solidFill>
@@ -1029,7 +1047,7 @@
                 <a:sym typeface="Arial"/>
               </a:defRPr>
             </a:lvl2pPr>
-            <a:lvl3pPr indent="0" lvl="2" marL="0" marR="0" algn="r">
+            <a:lvl3pPr marL="0" marR="0" lvl="2" indent="0" algn="r">
               <a:lnSpc>
                 <a:spcPct val="100000"/>
               </a:lnSpc>
@@ -1045,7 +1063,7 @@
               <a:buSzPts val="5100"/>
               <a:buFont typeface="Arial"/>
               <a:buNone/>
-              <a:defRPr b="0" i="0" sz="5100" u="none" cap="none" strike="noStrike">
+              <a:defRPr sz="5100" b="0" i="0" u="none" strike="noStrike" cap="none">
                 <a:solidFill>
                   <a:schemeClr val="dk2"/>
                 </a:solidFill>
@@ -1055,7 +1073,7 @@
                 <a:sym typeface="Arial"/>
               </a:defRPr>
             </a:lvl3pPr>
-            <a:lvl4pPr indent="0" lvl="3" marL="0" marR="0" algn="r">
+            <a:lvl4pPr marL="0" marR="0" lvl="3" indent="0" algn="r">
               <a:lnSpc>
                 <a:spcPct val="100000"/>
               </a:lnSpc>
@@ -1071,7 +1089,7 @@
               <a:buSzPts val="5100"/>
               <a:buFont typeface="Arial"/>
               <a:buNone/>
-              <a:defRPr b="0" i="0" sz="5100" u="none" cap="none" strike="noStrike">
+              <a:defRPr sz="5100" b="0" i="0" u="none" strike="noStrike" cap="none">
                 <a:solidFill>
                   <a:schemeClr val="dk2"/>
                 </a:solidFill>
@@ -1081,7 +1099,7 @@
                 <a:sym typeface="Arial"/>
               </a:defRPr>
             </a:lvl4pPr>
-            <a:lvl5pPr indent="0" lvl="4" marL="0" marR="0" algn="r">
+            <a:lvl5pPr marL="0" marR="0" lvl="4" indent="0" algn="r">
               <a:lnSpc>
                 <a:spcPct val="100000"/>
               </a:lnSpc>
@@ -1097,7 +1115,7 @@
               <a:buSzPts val="5100"/>
               <a:buFont typeface="Arial"/>
               <a:buNone/>
-              <a:defRPr b="0" i="0" sz="5100" u="none" cap="none" strike="noStrike">
+              <a:defRPr sz="5100" b="0" i="0" u="none" strike="noStrike" cap="none">
                 <a:solidFill>
                   <a:schemeClr val="dk2"/>
                 </a:solidFill>
@@ -1107,7 +1125,7 @@
                 <a:sym typeface="Arial"/>
               </a:defRPr>
             </a:lvl5pPr>
-            <a:lvl6pPr indent="0" lvl="5" marL="0" marR="0" algn="r">
+            <a:lvl6pPr marL="0" marR="0" lvl="5" indent="0" algn="r">
               <a:lnSpc>
                 <a:spcPct val="100000"/>
               </a:lnSpc>
@@ -1123,7 +1141,7 @@
               <a:buSzPts val="5100"/>
               <a:buFont typeface="Arial"/>
               <a:buNone/>
-              <a:defRPr b="0" i="0" sz="5100" u="none" cap="none" strike="noStrike">
+              <a:defRPr sz="5100" b="0" i="0" u="none" strike="noStrike" cap="none">
                 <a:solidFill>
                   <a:schemeClr val="dk2"/>
                 </a:solidFill>
@@ -1133,7 +1151,7 @@
                 <a:sym typeface="Arial"/>
               </a:defRPr>
             </a:lvl6pPr>
-            <a:lvl7pPr indent="0" lvl="6" marL="0" marR="0" algn="r">
+            <a:lvl7pPr marL="0" marR="0" lvl="6" indent="0" algn="r">
               <a:lnSpc>
                 <a:spcPct val="100000"/>
               </a:lnSpc>
@@ -1149,7 +1167,7 @@
               <a:buSzPts val="5100"/>
               <a:buFont typeface="Arial"/>
               <a:buNone/>
-              <a:defRPr b="0" i="0" sz="5100" u="none" cap="none" strike="noStrike">
+              <a:defRPr sz="5100" b="0" i="0" u="none" strike="noStrike" cap="none">
                 <a:solidFill>
                   <a:schemeClr val="dk2"/>
                 </a:solidFill>
@@ -1159,7 +1177,7 @@
                 <a:sym typeface="Arial"/>
               </a:defRPr>
             </a:lvl7pPr>
-            <a:lvl8pPr indent="0" lvl="7" marL="0" marR="0" algn="r">
+            <a:lvl8pPr marL="0" marR="0" lvl="7" indent="0" algn="r">
               <a:lnSpc>
                 <a:spcPct val="100000"/>
               </a:lnSpc>
@@ -1175,7 +1193,7 @@
               <a:buSzPts val="5100"/>
               <a:buFont typeface="Arial"/>
               <a:buNone/>
-              <a:defRPr b="0" i="0" sz="5100" u="none" cap="none" strike="noStrike">
+              <a:defRPr sz="5100" b="0" i="0" u="none" strike="noStrike" cap="none">
                 <a:solidFill>
                   <a:schemeClr val="dk2"/>
                 </a:solidFill>
@@ -1185,7 +1203,7 @@
                 <a:sym typeface="Arial"/>
               </a:defRPr>
             </a:lvl8pPr>
-            <a:lvl9pPr indent="0" lvl="8" marL="0" marR="0" algn="r">
+            <a:lvl9pPr marL="0" marR="0" lvl="8" indent="0" algn="r">
               <a:lnSpc>
                 <a:spcPct val="100000"/>
               </a:lnSpc>
@@ -1201,7 +1219,7 @@
               <a:buSzPts val="5100"/>
               <a:buFont typeface="Arial"/>
               <a:buNone/>
-              <a:defRPr b="0" i="0" sz="5100" u="none" cap="none" strike="noStrike">
+              <a:defRPr sz="5100" b="0" i="0" u="none" strike="noStrike" cap="none">
                 <a:solidFill>
                   <a:schemeClr val="dk2"/>
                 </a:solidFill>
@@ -1213,7 +1231,7 @@
             </a:lvl9pPr>
           </a:lstStyle>
           <a:p>
-            <a:pPr indent="0" lvl="0" marL="0" rtl="0" algn="r">
+            <a:pPr marL="0" lvl="0" indent="0" algn="r" rtl="0">
               <a:spcBef>
                 <a:spcPts val="0"/>
               </a:spcBef>
@@ -1232,7 +1250,7 @@
       </p:sp>
       <p:pic>
         <p:nvPicPr>
-          <p:cNvPr descr="스크린샷, 직사각형, 사각형, 라인이(가) 표시된 사진&#10;&#10;자동 생성된 설명" id="11" name="Google Shape;11;g2b16e703bd7_0_43"/>
+          <p:cNvPr id="11" name="Google Shape;11;g2b16e703bd7_0_43" descr="스크린샷, 직사각형, 사각형, 라인이(가) 표시된 사진&#10;&#10;자동 생성된 설명"/>
           <p:cNvPicPr preferRelativeResize="0"/>
           <p:nvPr/>
         </p:nvPicPr>
@@ -1240,7 +1258,7 @@
           <a:blip r:embed="rId2">
             <a:alphaModFix/>
           </a:blip>
-          <a:srcRect b="0" l="0" r="0" t="0"/>
+          <a:srcRect/>
           <a:stretch/>
         </p:blipFill>
         <p:spPr>
@@ -1266,11 +1284,11 @@
 </file>
 
 <file path=ppt/slideLayouts/slideLayout10.xml><?xml version="1.0" encoding="utf-8"?>
-<p:sldLayout xmlns:a="http://schemas.openxmlformats.org/drawingml/2006/main" xmlns:r="http://schemas.openxmlformats.org/officeDocument/2006/relationships" xmlns:mc="http://schemas.openxmlformats.org/markup-compatibility/2006" xmlns:mv="urn:schemas-microsoft-com:mac:vml" xmlns:p="http://schemas.openxmlformats.org/presentationml/2006/main" xmlns:c="http://schemas.openxmlformats.org/drawingml/2006/chart" xmlns:dgm="http://schemas.openxmlformats.org/drawingml/2006/diagram" xmlns:o="urn:schemas-microsoft-com:office:office" xmlns:v="urn:schemas-microsoft-com:vml" xmlns:pvml="urn:schemas-microsoft-com:office:powerpoint" xmlns:com="http://schemas.openxmlformats.org/drawingml/2006/compatibility" xmlns:p14="http://schemas.microsoft.com/office/powerpoint/2010/main" xmlns:p15="http://schemas.microsoft.com/office/powerpoint/2012/main" xmlns:ahyp="http://schemas.microsoft.com/office/drawing/2018/hyperlinkcolor" matchingName="Big number">
+<p:sldLayout xmlns:a="http://schemas.openxmlformats.org/drawingml/2006/main" xmlns:r="http://schemas.openxmlformats.org/officeDocument/2006/relationships" xmlns:p="http://schemas.openxmlformats.org/presentationml/2006/main" matchingName="Big number">
   <p:cSld name="BIG_NUMBER">
     <p:spTree>
       <p:nvGrpSpPr>
-        <p:cNvPr id="44" name="Shape 44"/>
+        <p:cNvPr id="1" name="Shape 44"/>
         <p:cNvGrpSpPr/>
         <p:nvPr/>
       </p:nvGrpSpPr>
@@ -1285,9 +1303,11 @@
       <p:sp>
         <p:nvSpPr>
           <p:cNvPr id="45" name="Google Shape;45;g2b16e703bd7_0_39"/>
-          <p:cNvSpPr txBox="1"/>
+          <p:cNvSpPr txBox="1">
+            <a:spLocks noGrp="1"/>
+          </p:cNvSpPr>
           <p:nvPr>
-            <p:ph hasCustomPrompt="1" type="title"/>
+            <p:ph type="title" hasCustomPrompt="1"/>
           </p:nvPr>
         </p:nvSpPr>
         <p:spPr>
@@ -1304,7 +1324,7 @@
           </a:ln>
         </p:spPr>
         <p:txBody>
-          <a:bodyPr anchorCtr="0" anchor="b" bIns="462325" lIns="462325" spcFirstLastPara="1" rIns="462325" wrap="square" tIns="462325">
+          <a:bodyPr spcFirstLastPara="1" wrap="square" lIns="462325" tIns="462325" rIns="462325" bIns="462325" anchor="b" anchorCtr="0">
             <a:normAutofit/>
           </a:bodyPr>
           <a:lstStyle>
@@ -1445,9 +1465,11 @@
       <p:sp>
         <p:nvSpPr>
           <p:cNvPr id="46" name="Google Shape;46;g2b16e703bd7_0_39"/>
-          <p:cNvSpPr txBox="1"/>
+          <p:cNvSpPr txBox="1">
+            <a:spLocks noGrp="1"/>
+          </p:cNvSpPr>
           <p:nvPr>
-            <p:ph idx="1" type="body"/>
+            <p:ph type="body" idx="1"/>
           </p:nvPr>
         </p:nvSpPr>
         <p:spPr>
@@ -1464,11 +1486,11 @@
           </a:ln>
         </p:spPr>
         <p:txBody>
-          <a:bodyPr anchorCtr="0" anchor="t" bIns="462325" lIns="462325" spcFirstLastPara="1" rIns="462325" wrap="square" tIns="462325">
+          <a:bodyPr spcFirstLastPara="1" wrap="square" lIns="462325" tIns="462325" rIns="462325" bIns="462325" anchor="t" anchorCtr="0">
             <a:normAutofit/>
           </a:bodyPr>
           <a:lstStyle>
-            <a:lvl1pPr indent="-806450" lvl="0" marL="457200" algn="ctr">
+            <a:lvl1pPr marL="457200" lvl="0" indent="-806450" algn="ctr">
               <a:lnSpc>
                 <a:spcPct val="115000"/>
               </a:lnSpc>
@@ -1482,7 +1504,7 @@
               <a:buChar char="●"/>
               <a:defRPr/>
             </a:lvl1pPr>
-            <a:lvl2pPr indent="-679450" lvl="1" marL="914400" algn="ctr">
+            <a:lvl2pPr marL="914400" lvl="1" indent="-679450" algn="ctr">
               <a:lnSpc>
                 <a:spcPct val="115000"/>
               </a:lnSpc>
@@ -1496,7 +1518,7 @@
               <a:buChar char="○"/>
               <a:defRPr/>
             </a:lvl2pPr>
-            <a:lvl3pPr indent="-679450" lvl="2" marL="1371600" algn="ctr">
+            <a:lvl3pPr marL="1371600" lvl="2" indent="-679450" algn="ctr">
               <a:lnSpc>
                 <a:spcPct val="115000"/>
               </a:lnSpc>
@@ -1510,7 +1532,7 @@
               <a:buChar char="■"/>
               <a:defRPr/>
             </a:lvl3pPr>
-            <a:lvl4pPr indent="-679450" lvl="3" marL="1828800" algn="ctr">
+            <a:lvl4pPr marL="1828800" lvl="3" indent="-679450" algn="ctr">
               <a:lnSpc>
                 <a:spcPct val="115000"/>
               </a:lnSpc>
@@ -1524,7 +1546,7 @@
               <a:buChar char="●"/>
               <a:defRPr/>
             </a:lvl4pPr>
-            <a:lvl5pPr indent="-679450" lvl="4" marL="2286000" algn="ctr">
+            <a:lvl5pPr marL="2286000" lvl="4" indent="-679450" algn="ctr">
               <a:lnSpc>
                 <a:spcPct val="115000"/>
               </a:lnSpc>
@@ -1538,7 +1560,7 @@
               <a:buChar char="○"/>
               <a:defRPr/>
             </a:lvl5pPr>
-            <a:lvl6pPr indent="-679450" lvl="5" marL="2743200" algn="ctr">
+            <a:lvl6pPr marL="2743200" lvl="5" indent="-679450" algn="ctr">
               <a:lnSpc>
                 <a:spcPct val="115000"/>
               </a:lnSpc>
@@ -1552,7 +1574,7 @@
               <a:buChar char="■"/>
               <a:defRPr/>
             </a:lvl6pPr>
-            <a:lvl7pPr indent="-679450" lvl="6" marL="3200400" algn="ctr">
+            <a:lvl7pPr marL="3200400" lvl="6" indent="-679450" algn="ctr">
               <a:lnSpc>
                 <a:spcPct val="115000"/>
               </a:lnSpc>
@@ -1566,7 +1588,7 @@
               <a:buChar char="●"/>
               <a:defRPr/>
             </a:lvl7pPr>
-            <a:lvl8pPr indent="-679450" lvl="7" marL="3657600" algn="ctr">
+            <a:lvl8pPr marL="3657600" lvl="7" indent="-679450" algn="ctr">
               <a:lnSpc>
                 <a:spcPct val="115000"/>
               </a:lnSpc>
@@ -1580,7 +1602,7 @@
               <a:buChar char="○"/>
               <a:defRPr/>
             </a:lvl8pPr>
-            <a:lvl9pPr indent="-679450" lvl="8" marL="4114800" algn="ctr">
+            <a:lvl9pPr marL="4114800" lvl="8" indent="-679450" algn="ctr">
               <a:lnSpc>
                 <a:spcPct val="115000"/>
               </a:lnSpc>
@@ -1595,15 +1617,19 @@
               <a:defRPr/>
             </a:lvl9pPr>
           </a:lstStyle>
-          <a:p/>
+          <a:p>
+            <a:endParaRPr/>
+          </a:p>
         </p:txBody>
       </p:sp>
       <p:sp>
         <p:nvSpPr>
           <p:cNvPr id="47" name="Google Shape;47;g2b16e703bd7_0_39"/>
-          <p:cNvSpPr txBox="1"/>
+          <p:cNvSpPr txBox="1">
+            <a:spLocks noGrp="1"/>
+          </p:cNvSpPr>
           <p:nvPr>
-            <p:ph idx="12" type="sldNum"/>
+            <p:ph type="sldNum" idx="12"/>
           </p:nvPr>
         </p:nvSpPr>
         <p:spPr>
@@ -1620,11 +1646,11 @@
           </a:ln>
         </p:spPr>
         <p:txBody>
-          <a:bodyPr anchorCtr="0" anchor="ctr" bIns="462325" lIns="462325" spcFirstLastPara="1" rIns="462325" wrap="square" tIns="462325">
+          <a:bodyPr spcFirstLastPara="1" wrap="square" lIns="462325" tIns="462325" rIns="462325" bIns="462325" anchor="ctr" anchorCtr="0">
             <a:normAutofit/>
           </a:bodyPr>
           <a:lstStyle>
-            <a:lvl1pPr indent="0" lvl="0" marL="0" marR="0" algn="r">
+            <a:lvl1pPr marL="0" marR="0" lvl="0" indent="0" algn="r">
               <a:lnSpc>
                 <a:spcPct val="100000"/>
               </a:lnSpc>
@@ -1640,7 +1666,7 @@
               <a:buSzPts val="5100"/>
               <a:buFont typeface="Arial"/>
               <a:buNone/>
-              <a:defRPr b="0" i="0" sz="5100" u="none" cap="none" strike="noStrike">
+              <a:defRPr sz="5100" b="0" i="0" u="none" strike="noStrike" cap="none">
                 <a:solidFill>
                   <a:schemeClr val="dk2"/>
                 </a:solidFill>
@@ -1650,7 +1676,7 @@
                 <a:sym typeface="Arial"/>
               </a:defRPr>
             </a:lvl1pPr>
-            <a:lvl2pPr indent="0" lvl="1" marL="0" marR="0" algn="r">
+            <a:lvl2pPr marL="0" marR="0" lvl="1" indent="0" algn="r">
               <a:lnSpc>
                 <a:spcPct val="100000"/>
               </a:lnSpc>
@@ -1666,7 +1692,7 @@
               <a:buSzPts val="5100"/>
               <a:buFont typeface="Arial"/>
               <a:buNone/>
-              <a:defRPr b="0" i="0" sz="5100" u="none" cap="none" strike="noStrike">
+              <a:defRPr sz="5100" b="0" i="0" u="none" strike="noStrike" cap="none">
                 <a:solidFill>
                   <a:schemeClr val="dk2"/>
                 </a:solidFill>
@@ -1676,7 +1702,7 @@
                 <a:sym typeface="Arial"/>
               </a:defRPr>
             </a:lvl2pPr>
-            <a:lvl3pPr indent="0" lvl="2" marL="0" marR="0" algn="r">
+            <a:lvl3pPr marL="0" marR="0" lvl="2" indent="0" algn="r">
               <a:lnSpc>
                 <a:spcPct val="100000"/>
               </a:lnSpc>
@@ -1692,7 +1718,7 @@
               <a:buSzPts val="5100"/>
               <a:buFont typeface="Arial"/>
               <a:buNone/>
-              <a:defRPr b="0" i="0" sz="5100" u="none" cap="none" strike="noStrike">
+              <a:defRPr sz="5100" b="0" i="0" u="none" strike="noStrike" cap="none">
                 <a:solidFill>
                   <a:schemeClr val="dk2"/>
                 </a:solidFill>
@@ -1702,7 +1728,7 @@
                 <a:sym typeface="Arial"/>
               </a:defRPr>
             </a:lvl3pPr>
-            <a:lvl4pPr indent="0" lvl="3" marL="0" marR="0" algn="r">
+            <a:lvl4pPr marL="0" marR="0" lvl="3" indent="0" algn="r">
               <a:lnSpc>
                 <a:spcPct val="100000"/>
               </a:lnSpc>
@@ -1718,7 +1744,7 @@
               <a:buSzPts val="5100"/>
               <a:buFont typeface="Arial"/>
               <a:buNone/>
-              <a:defRPr b="0" i="0" sz="5100" u="none" cap="none" strike="noStrike">
+              <a:defRPr sz="5100" b="0" i="0" u="none" strike="noStrike" cap="none">
                 <a:solidFill>
                   <a:schemeClr val="dk2"/>
                 </a:solidFill>
@@ -1728,7 +1754,7 @@
                 <a:sym typeface="Arial"/>
               </a:defRPr>
             </a:lvl4pPr>
-            <a:lvl5pPr indent="0" lvl="4" marL="0" marR="0" algn="r">
+            <a:lvl5pPr marL="0" marR="0" lvl="4" indent="0" algn="r">
               <a:lnSpc>
                 <a:spcPct val="100000"/>
               </a:lnSpc>
@@ -1744,7 +1770,7 @@
               <a:buSzPts val="5100"/>
               <a:buFont typeface="Arial"/>
               <a:buNone/>
-              <a:defRPr b="0" i="0" sz="5100" u="none" cap="none" strike="noStrike">
+              <a:defRPr sz="5100" b="0" i="0" u="none" strike="noStrike" cap="none">
                 <a:solidFill>
                   <a:schemeClr val="dk2"/>
                 </a:solidFill>
@@ -1754,7 +1780,7 @@
                 <a:sym typeface="Arial"/>
               </a:defRPr>
             </a:lvl5pPr>
-            <a:lvl6pPr indent="0" lvl="5" marL="0" marR="0" algn="r">
+            <a:lvl6pPr marL="0" marR="0" lvl="5" indent="0" algn="r">
               <a:lnSpc>
                 <a:spcPct val="100000"/>
               </a:lnSpc>
@@ -1770,7 +1796,7 @@
               <a:buSzPts val="5100"/>
               <a:buFont typeface="Arial"/>
               <a:buNone/>
-              <a:defRPr b="0" i="0" sz="5100" u="none" cap="none" strike="noStrike">
+              <a:defRPr sz="5100" b="0" i="0" u="none" strike="noStrike" cap="none">
                 <a:solidFill>
                   <a:schemeClr val="dk2"/>
                 </a:solidFill>
@@ -1780,7 +1806,7 @@
                 <a:sym typeface="Arial"/>
               </a:defRPr>
             </a:lvl6pPr>
-            <a:lvl7pPr indent="0" lvl="6" marL="0" marR="0" algn="r">
+            <a:lvl7pPr marL="0" marR="0" lvl="6" indent="0" algn="r">
               <a:lnSpc>
                 <a:spcPct val="100000"/>
               </a:lnSpc>
@@ -1796,7 +1822,7 @@
               <a:buSzPts val="5100"/>
               <a:buFont typeface="Arial"/>
               <a:buNone/>
-              <a:defRPr b="0" i="0" sz="5100" u="none" cap="none" strike="noStrike">
+              <a:defRPr sz="5100" b="0" i="0" u="none" strike="noStrike" cap="none">
                 <a:solidFill>
                   <a:schemeClr val="dk2"/>
                 </a:solidFill>
@@ -1806,7 +1832,7 @@
                 <a:sym typeface="Arial"/>
               </a:defRPr>
             </a:lvl7pPr>
-            <a:lvl8pPr indent="0" lvl="7" marL="0" marR="0" algn="r">
+            <a:lvl8pPr marL="0" marR="0" lvl="7" indent="0" algn="r">
               <a:lnSpc>
                 <a:spcPct val="100000"/>
               </a:lnSpc>
@@ -1822,7 +1848,7 @@
               <a:buSzPts val="5100"/>
               <a:buFont typeface="Arial"/>
               <a:buNone/>
-              <a:defRPr b="0" i="0" sz="5100" u="none" cap="none" strike="noStrike">
+              <a:defRPr sz="5100" b="0" i="0" u="none" strike="noStrike" cap="none">
                 <a:solidFill>
                   <a:schemeClr val="dk2"/>
                 </a:solidFill>
@@ -1832,7 +1858,7 @@
                 <a:sym typeface="Arial"/>
               </a:defRPr>
             </a:lvl8pPr>
-            <a:lvl9pPr indent="0" lvl="8" marL="0" marR="0" algn="r">
+            <a:lvl9pPr marL="0" marR="0" lvl="8" indent="0" algn="r">
               <a:lnSpc>
                 <a:spcPct val="100000"/>
               </a:lnSpc>
@@ -1848,7 +1874,7 @@
               <a:buSzPts val="5100"/>
               <a:buFont typeface="Arial"/>
               <a:buNone/>
-              <a:defRPr b="0" i="0" sz="5100" u="none" cap="none" strike="noStrike">
+              <a:defRPr sz="5100" b="0" i="0" u="none" strike="noStrike" cap="none">
                 <a:solidFill>
                   <a:schemeClr val="dk2"/>
                 </a:solidFill>
@@ -1860,7 +1886,7 @@
             </a:lvl9pPr>
           </a:lstStyle>
           <a:p>
-            <a:pPr indent="0" lvl="0" marL="0" rtl="0" algn="r">
+            <a:pPr marL="0" lvl="0" indent="0" algn="r" rtl="0">
               <a:spcBef>
                 <a:spcPts val="0"/>
               </a:spcBef>
@@ -1886,11 +1912,11 @@
 </file>
 
 <file path=ppt/slideLayouts/slideLayout2.xml><?xml version="1.0" encoding="utf-8"?>
-<p:sldLayout xmlns:a="http://schemas.openxmlformats.org/drawingml/2006/main" xmlns:r="http://schemas.openxmlformats.org/officeDocument/2006/relationships" xmlns:mc="http://schemas.openxmlformats.org/markup-compatibility/2006" xmlns:mv="urn:schemas-microsoft-com:mac:vml" xmlns:p="http://schemas.openxmlformats.org/presentationml/2006/main" xmlns:c="http://schemas.openxmlformats.org/drawingml/2006/chart" xmlns:dgm="http://schemas.openxmlformats.org/drawingml/2006/diagram" xmlns:o="urn:schemas-microsoft-com:office:office" xmlns:v="urn:schemas-microsoft-com:vml" xmlns:pvml="urn:schemas-microsoft-com:office:powerpoint" xmlns:com="http://schemas.openxmlformats.org/drawingml/2006/compatibility" xmlns:p14="http://schemas.microsoft.com/office/powerpoint/2010/main" xmlns:p15="http://schemas.microsoft.com/office/powerpoint/2012/main" xmlns:ahyp="http://schemas.microsoft.com/office/drawing/2018/hyperlinkcolor" matchingName="Title slide" type="title">
+<p:sldLayout xmlns:a="http://schemas.openxmlformats.org/drawingml/2006/main" xmlns:r="http://schemas.openxmlformats.org/officeDocument/2006/relationships" xmlns:p="http://schemas.openxmlformats.org/presentationml/2006/main" matchingName="Title slide" type="title">
   <p:cSld name="TITLE">
     <p:spTree>
       <p:nvGrpSpPr>
-        <p:cNvPr id="12" name="Shape 12"/>
+        <p:cNvPr id="1" name="Shape 12"/>
         <p:cNvGrpSpPr/>
         <p:nvPr/>
       </p:nvGrpSpPr>
@@ -1905,7 +1931,9 @@
       <p:sp>
         <p:nvSpPr>
           <p:cNvPr id="13" name="Google Shape;13;g2b16e703bd7_0_4"/>
-          <p:cNvSpPr txBox="1"/>
+          <p:cNvSpPr txBox="1">
+            <a:spLocks noGrp="1"/>
+          </p:cNvSpPr>
           <p:nvPr>
             <p:ph type="ctrTitle"/>
           </p:nvPr>
@@ -1924,7 +1952,7 @@
           </a:ln>
         </p:spPr>
         <p:txBody>
-          <a:bodyPr anchorCtr="0" anchor="b" bIns="462325" lIns="462325" spcFirstLastPara="1" rIns="462325" wrap="square" tIns="462325">
+          <a:bodyPr spcFirstLastPara="1" wrap="square" lIns="462325" tIns="462325" rIns="462325" bIns="462325" anchor="b" anchorCtr="0">
             <a:normAutofit/>
           </a:bodyPr>
           <a:lstStyle>
@@ -2055,15 +2083,19 @@
               <a:defRPr sz="26300"/>
             </a:lvl9pPr>
           </a:lstStyle>
-          <a:p/>
+          <a:p>
+            <a:endParaRPr/>
+          </a:p>
         </p:txBody>
       </p:sp>
       <p:sp>
         <p:nvSpPr>
           <p:cNvPr id="14" name="Google Shape;14;g2b16e703bd7_0_4"/>
-          <p:cNvSpPr txBox="1"/>
+          <p:cNvSpPr txBox="1">
+            <a:spLocks noGrp="1"/>
+          </p:cNvSpPr>
           <p:nvPr>
-            <p:ph idx="1" type="subTitle"/>
+            <p:ph type="subTitle" idx="1"/>
           </p:nvPr>
         </p:nvSpPr>
         <p:spPr>
@@ -2080,7 +2112,7 @@
           </a:ln>
         </p:spPr>
         <p:txBody>
-          <a:bodyPr anchorCtr="0" anchor="t" bIns="462325" lIns="462325" spcFirstLastPara="1" rIns="462325" wrap="square" tIns="462325">
+          <a:bodyPr spcFirstLastPara="1" wrap="square" lIns="462325" tIns="462325" rIns="462325" bIns="462325" anchor="t" anchorCtr="0">
             <a:normAutofit/>
           </a:bodyPr>
           <a:lstStyle>
@@ -2211,15 +2243,19 @@
               <a:defRPr sz="14200"/>
             </a:lvl9pPr>
           </a:lstStyle>
-          <a:p/>
+          <a:p>
+            <a:endParaRPr/>
+          </a:p>
         </p:txBody>
       </p:sp>
       <p:sp>
         <p:nvSpPr>
           <p:cNvPr id="15" name="Google Shape;15;g2b16e703bd7_0_4"/>
-          <p:cNvSpPr txBox="1"/>
+          <p:cNvSpPr txBox="1">
+            <a:spLocks noGrp="1"/>
+          </p:cNvSpPr>
           <p:nvPr>
-            <p:ph idx="12" type="sldNum"/>
+            <p:ph type="sldNum" idx="12"/>
           </p:nvPr>
         </p:nvSpPr>
         <p:spPr>
@@ -2236,11 +2272,11 @@
           </a:ln>
         </p:spPr>
         <p:txBody>
-          <a:bodyPr anchorCtr="0" anchor="ctr" bIns="462325" lIns="462325" spcFirstLastPara="1" rIns="462325" wrap="square" tIns="462325">
+          <a:bodyPr spcFirstLastPara="1" wrap="square" lIns="462325" tIns="462325" rIns="462325" bIns="462325" anchor="ctr" anchorCtr="0">
             <a:normAutofit/>
           </a:bodyPr>
           <a:lstStyle>
-            <a:lvl1pPr indent="0" lvl="0" marL="0" marR="0" algn="r">
+            <a:lvl1pPr marL="0" marR="0" lvl="0" indent="0" algn="r">
               <a:lnSpc>
                 <a:spcPct val="100000"/>
               </a:lnSpc>
@@ -2256,7 +2292,7 @@
               <a:buSzPts val="5100"/>
               <a:buFont typeface="Arial"/>
               <a:buNone/>
-              <a:defRPr b="0" i="0" sz="5100" u="none" cap="none" strike="noStrike">
+              <a:defRPr sz="5100" b="0" i="0" u="none" strike="noStrike" cap="none">
                 <a:solidFill>
                   <a:schemeClr val="dk2"/>
                 </a:solidFill>
@@ -2266,7 +2302,7 @@
                 <a:sym typeface="Arial"/>
               </a:defRPr>
             </a:lvl1pPr>
-            <a:lvl2pPr indent="0" lvl="1" marL="0" marR="0" algn="r">
+            <a:lvl2pPr marL="0" marR="0" lvl="1" indent="0" algn="r">
               <a:lnSpc>
                 <a:spcPct val="100000"/>
               </a:lnSpc>
@@ -2282,7 +2318,7 @@
               <a:buSzPts val="5100"/>
               <a:buFont typeface="Arial"/>
               <a:buNone/>
-              <a:defRPr b="0" i="0" sz="5100" u="none" cap="none" strike="noStrike">
+              <a:defRPr sz="5100" b="0" i="0" u="none" strike="noStrike" cap="none">
                 <a:solidFill>
                   <a:schemeClr val="dk2"/>
                 </a:solidFill>
@@ -2292,7 +2328,7 @@
                 <a:sym typeface="Arial"/>
               </a:defRPr>
             </a:lvl2pPr>
-            <a:lvl3pPr indent="0" lvl="2" marL="0" marR="0" algn="r">
+            <a:lvl3pPr marL="0" marR="0" lvl="2" indent="0" algn="r">
               <a:lnSpc>
                 <a:spcPct val="100000"/>
               </a:lnSpc>
@@ -2308,7 +2344,7 @@
               <a:buSzPts val="5100"/>
               <a:buFont typeface="Arial"/>
               <a:buNone/>
-              <a:defRPr b="0" i="0" sz="5100" u="none" cap="none" strike="noStrike">
+              <a:defRPr sz="5100" b="0" i="0" u="none" strike="noStrike" cap="none">
                 <a:solidFill>
                   <a:schemeClr val="dk2"/>
                 </a:solidFill>
@@ -2318,7 +2354,7 @@
                 <a:sym typeface="Arial"/>
               </a:defRPr>
             </a:lvl3pPr>
-            <a:lvl4pPr indent="0" lvl="3" marL="0" marR="0" algn="r">
+            <a:lvl4pPr marL="0" marR="0" lvl="3" indent="0" algn="r">
               <a:lnSpc>
                 <a:spcPct val="100000"/>
               </a:lnSpc>
@@ -2334,7 +2370,7 @@
               <a:buSzPts val="5100"/>
               <a:buFont typeface="Arial"/>
               <a:buNone/>
-              <a:defRPr b="0" i="0" sz="5100" u="none" cap="none" strike="noStrike">
+              <a:defRPr sz="5100" b="0" i="0" u="none" strike="noStrike" cap="none">
                 <a:solidFill>
                   <a:schemeClr val="dk2"/>
                 </a:solidFill>
@@ -2344,7 +2380,7 @@
                 <a:sym typeface="Arial"/>
               </a:defRPr>
             </a:lvl4pPr>
-            <a:lvl5pPr indent="0" lvl="4" marL="0" marR="0" algn="r">
+            <a:lvl5pPr marL="0" marR="0" lvl="4" indent="0" algn="r">
               <a:lnSpc>
                 <a:spcPct val="100000"/>
               </a:lnSpc>
@@ -2360,7 +2396,7 @@
               <a:buSzPts val="5100"/>
               <a:buFont typeface="Arial"/>
               <a:buNone/>
-              <a:defRPr b="0" i="0" sz="5100" u="none" cap="none" strike="noStrike">
+              <a:defRPr sz="5100" b="0" i="0" u="none" strike="noStrike" cap="none">
                 <a:solidFill>
                   <a:schemeClr val="dk2"/>
                 </a:solidFill>
@@ -2370,7 +2406,7 @@
                 <a:sym typeface="Arial"/>
               </a:defRPr>
             </a:lvl5pPr>
-            <a:lvl6pPr indent="0" lvl="5" marL="0" marR="0" algn="r">
+            <a:lvl6pPr marL="0" marR="0" lvl="5" indent="0" algn="r">
               <a:lnSpc>
                 <a:spcPct val="100000"/>
               </a:lnSpc>
@@ -2386,7 +2422,7 @@
               <a:buSzPts val="5100"/>
               <a:buFont typeface="Arial"/>
               <a:buNone/>
-              <a:defRPr b="0" i="0" sz="5100" u="none" cap="none" strike="noStrike">
+              <a:defRPr sz="5100" b="0" i="0" u="none" strike="noStrike" cap="none">
                 <a:solidFill>
                   <a:schemeClr val="dk2"/>
                 </a:solidFill>
@@ -2396,7 +2432,7 @@
                 <a:sym typeface="Arial"/>
               </a:defRPr>
             </a:lvl6pPr>
-            <a:lvl7pPr indent="0" lvl="6" marL="0" marR="0" algn="r">
+            <a:lvl7pPr marL="0" marR="0" lvl="6" indent="0" algn="r">
               <a:lnSpc>
                 <a:spcPct val="100000"/>
               </a:lnSpc>
@@ -2412,7 +2448,7 @@
               <a:buSzPts val="5100"/>
               <a:buFont typeface="Arial"/>
               <a:buNone/>
-              <a:defRPr b="0" i="0" sz="5100" u="none" cap="none" strike="noStrike">
+              <a:defRPr sz="5100" b="0" i="0" u="none" strike="noStrike" cap="none">
                 <a:solidFill>
                   <a:schemeClr val="dk2"/>
                 </a:solidFill>
@@ -2422,7 +2458,7 @@
                 <a:sym typeface="Arial"/>
               </a:defRPr>
             </a:lvl7pPr>
-            <a:lvl8pPr indent="0" lvl="7" marL="0" marR="0" algn="r">
+            <a:lvl8pPr marL="0" marR="0" lvl="7" indent="0" algn="r">
               <a:lnSpc>
                 <a:spcPct val="100000"/>
               </a:lnSpc>
@@ -2438,7 +2474,7 @@
               <a:buSzPts val="5100"/>
               <a:buFont typeface="Arial"/>
               <a:buNone/>
-              <a:defRPr b="0" i="0" sz="5100" u="none" cap="none" strike="noStrike">
+              <a:defRPr sz="5100" b="0" i="0" u="none" strike="noStrike" cap="none">
                 <a:solidFill>
                   <a:schemeClr val="dk2"/>
                 </a:solidFill>
@@ -2448,7 +2484,7 @@
                 <a:sym typeface="Arial"/>
               </a:defRPr>
             </a:lvl8pPr>
-            <a:lvl9pPr indent="0" lvl="8" marL="0" marR="0" algn="r">
+            <a:lvl9pPr marL="0" marR="0" lvl="8" indent="0" algn="r">
               <a:lnSpc>
                 <a:spcPct val="100000"/>
               </a:lnSpc>
@@ -2464,7 +2500,7 @@
               <a:buSzPts val="5100"/>
               <a:buFont typeface="Arial"/>
               <a:buNone/>
-              <a:defRPr b="0" i="0" sz="5100" u="none" cap="none" strike="noStrike">
+              <a:defRPr sz="5100" b="0" i="0" u="none" strike="noStrike" cap="none">
                 <a:solidFill>
                   <a:schemeClr val="dk2"/>
                 </a:solidFill>
@@ -2476,7 +2512,7 @@
             </a:lvl9pPr>
           </a:lstStyle>
           <a:p>
-            <a:pPr indent="0" lvl="0" marL="0" rtl="0" algn="r">
+            <a:pPr marL="0" lvl="0" indent="0" algn="r" rtl="0">
               <a:spcBef>
                 <a:spcPts val="0"/>
               </a:spcBef>
@@ -2502,11 +2538,11 @@
 </file>
 
 <file path=ppt/slideLayouts/slideLayout3.xml><?xml version="1.0" encoding="utf-8"?>
-<p:sldLayout xmlns:a="http://schemas.openxmlformats.org/drawingml/2006/main" xmlns:r="http://schemas.openxmlformats.org/officeDocument/2006/relationships" xmlns:mc="http://schemas.openxmlformats.org/markup-compatibility/2006" xmlns:mv="urn:schemas-microsoft-com:mac:vml" xmlns:p="http://schemas.openxmlformats.org/presentationml/2006/main" xmlns:c="http://schemas.openxmlformats.org/drawingml/2006/chart" xmlns:dgm="http://schemas.openxmlformats.org/drawingml/2006/diagram" xmlns:o="urn:schemas-microsoft-com:office:office" xmlns:v="urn:schemas-microsoft-com:vml" xmlns:pvml="urn:schemas-microsoft-com:office:powerpoint" xmlns:com="http://schemas.openxmlformats.org/drawingml/2006/compatibility" xmlns:p14="http://schemas.microsoft.com/office/powerpoint/2010/main" xmlns:p15="http://schemas.microsoft.com/office/powerpoint/2012/main" xmlns:ahyp="http://schemas.microsoft.com/office/drawing/2018/hyperlinkcolor" matchingName="Section header" type="secHead">
+<p:sldLayout xmlns:a="http://schemas.openxmlformats.org/drawingml/2006/main" xmlns:r="http://schemas.openxmlformats.org/officeDocument/2006/relationships" xmlns:p="http://schemas.openxmlformats.org/presentationml/2006/main" matchingName="Section header" type="secHead">
   <p:cSld name="SECTION_HEADER">
     <p:spTree>
       <p:nvGrpSpPr>
-        <p:cNvPr id="16" name="Shape 16"/>
+        <p:cNvPr id="1" name="Shape 16"/>
         <p:cNvGrpSpPr/>
         <p:nvPr/>
       </p:nvGrpSpPr>
@@ -2521,7 +2557,9 @@
       <p:sp>
         <p:nvSpPr>
           <p:cNvPr id="17" name="Google Shape;17;g2b16e703bd7_0_8"/>
-          <p:cNvSpPr txBox="1"/>
+          <p:cNvSpPr txBox="1">
+            <a:spLocks noGrp="1"/>
+          </p:cNvSpPr>
           <p:nvPr>
             <p:ph type="title"/>
           </p:nvPr>
@@ -2540,7 +2578,7 @@
           </a:ln>
         </p:spPr>
         <p:txBody>
-          <a:bodyPr anchorCtr="0" anchor="ctr" bIns="462325" lIns="462325" spcFirstLastPara="1" rIns="462325" wrap="square" tIns="462325">
+          <a:bodyPr spcFirstLastPara="1" wrap="square" lIns="462325" tIns="462325" rIns="462325" bIns="462325" anchor="ctr" anchorCtr="0">
             <a:normAutofit/>
           </a:bodyPr>
           <a:lstStyle>
@@ -2671,15 +2709,19 @@
               <a:defRPr sz="18200"/>
             </a:lvl9pPr>
           </a:lstStyle>
-          <a:p/>
+          <a:p>
+            <a:endParaRPr/>
+          </a:p>
         </p:txBody>
       </p:sp>
       <p:sp>
         <p:nvSpPr>
           <p:cNvPr id="18" name="Google Shape;18;g2b16e703bd7_0_8"/>
-          <p:cNvSpPr txBox="1"/>
+          <p:cNvSpPr txBox="1">
+            <a:spLocks noGrp="1"/>
+          </p:cNvSpPr>
           <p:nvPr>
-            <p:ph idx="12" type="sldNum"/>
+            <p:ph type="sldNum" idx="12"/>
           </p:nvPr>
         </p:nvSpPr>
         <p:spPr>
@@ -2696,11 +2738,11 @@
           </a:ln>
         </p:spPr>
         <p:txBody>
-          <a:bodyPr anchorCtr="0" anchor="ctr" bIns="462325" lIns="462325" spcFirstLastPara="1" rIns="462325" wrap="square" tIns="462325">
+          <a:bodyPr spcFirstLastPara="1" wrap="square" lIns="462325" tIns="462325" rIns="462325" bIns="462325" anchor="ctr" anchorCtr="0">
             <a:normAutofit/>
           </a:bodyPr>
           <a:lstStyle>
-            <a:lvl1pPr indent="0" lvl="0" marL="0" marR="0" algn="r">
+            <a:lvl1pPr marL="0" marR="0" lvl="0" indent="0" algn="r">
               <a:lnSpc>
                 <a:spcPct val="100000"/>
               </a:lnSpc>
@@ -2716,7 +2758,7 @@
               <a:buSzPts val="5100"/>
               <a:buFont typeface="Arial"/>
               <a:buNone/>
-              <a:defRPr b="0" i="0" sz="5100" u="none" cap="none" strike="noStrike">
+              <a:defRPr sz="5100" b="0" i="0" u="none" strike="noStrike" cap="none">
                 <a:solidFill>
                   <a:schemeClr val="dk2"/>
                 </a:solidFill>
@@ -2726,7 +2768,7 @@
                 <a:sym typeface="Arial"/>
               </a:defRPr>
             </a:lvl1pPr>
-            <a:lvl2pPr indent="0" lvl="1" marL="0" marR="0" algn="r">
+            <a:lvl2pPr marL="0" marR="0" lvl="1" indent="0" algn="r">
               <a:lnSpc>
                 <a:spcPct val="100000"/>
               </a:lnSpc>
@@ -2742,7 +2784,7 @@
               <a:buSzPts val="5100"/>
               <a:buFont typeface="Arial"/>
               <a:buNone/>
-              <a:defRPr b="0" i="0" sz="5100" u="none" cap="none" strike="noStrike">
+              <a:defRPr sz="5100" b="0" i="0" u="none" strike="noStrike" cap="none">
                 <a:solidFill>
                   <a:schemeClr val="dk2"/>
                 </a:solidFill>
@@ -2752,7 +2794,7 @@
                 <a:sym typeface="Arial"/>
               </a:defRPr>
             </a:lvl2pPr>
-            <a:lvl3pPr indent="0" lvl="2" marL="0" marR="0" algn="r">
+            <a:lvl3pPr marL="0" marR="0" lvl="2" indent="0" algn="r">
               <a:lnSpc>
                 <a:spcPct val="100000"/>
               </a:lnSpc>
@@ -2768,7 +2810,7 @@
               <a:buSzPts val="5100"/>
               <a:buFont typeface="Arial"/>
               <a:buNone/>
-              <a:defRPr b="0" i="0" sz="5100" u="none" cap="none" strike="noStrike">
+              <a:defRPr sz="5100" b="0" i="0" u="none" strike="noStrike" cap="none">
                 <a:solidFill>
                   <a:schemeClr val="dk2"/>
                 </a:solidFill>
@@ -2778,7 +2820,7 @@
                 <a:sym typeface="Arial"/>
               </a:defRPr>
             </a:lvl3pPr>
-            <a:lvl4pPr indent="0" lvl="3" marL="0" marR="0" algn="r">
+            <a:lvl4pPr marL="0" marR="0" lvl="3" indent="0" algn="r">
               <a:lnSpc>
                 <a:spcPct val="100000"/>
               </a:lnSpc>
@@ -2794,7 +2836,7 @@
               <a:buSzPts val="5100"/>
               <a:buFont typeface="Arial"/>
               <a:buNone/>
-              <a:defRPr b="0" i="0" sz="5100" u="none" cap="none" strike="noStrike">
+              <a:defRPr sz="5100" b="0" i="0" u="none" strike="noStrike" cap="none">
                 <a:solidFill>
                   <a:schemeClr val="dk2"/>
                 </a:solidFill>
@@ -2804,7 +2846,7 @@
                 <a:sym typeface="Arial"/>
               </a:defRPr>
             </a:lvl4pPr>
-            <a:lvl5pPr indent="0" lvl="4" marL="0" marR="0" algn="r">
+            <a:lvl5pPr marL="0" marR="0" lvl="4" indent="0" algn="r">
               <a:lnSpc>
                 <a:spcPct val="100000"/>
               </a:lnSpc>
@@ -2820,7 +2862,7 @@
               <a:buSzPts val="5100"/>
               <a:buFont typeface="Arial"/>
               <a:buNone/>
-              <a:defRPr b="0" i="0" sz="5100" u="none" cap="none" strike="noStrike">
+              <a:defRPr sz="5100" b="0" i="0" u="none" strike="noStrike" cap="none">
                 <a:solidFill>
                   <a:schemeClr val="dk2"/>
                 </a:solidFill>
@@ -2830,7 +2872,7 @@
                 <a:sym typeface="Arial"/>
               </a:defRPr>
             </a:lvl5pPr>
-            <a:lvl6pPr indent="0" lvl="5" marL="0" marR="0" algn="r">
+            <a:lvl6pPr marL="0" marR="0" lvl="5" indent="0" algn="r">
               <a:lnSpc>
                 <a:spcPct val="100000"/>
               </a:lnSpc>
@@ -2846,7 +2888,7 @@
               <a:buSzPts val="5100"/>
               <a:buFont typeface="Arial"/>
               <a:buNone/>
-              <a:defRPr b="0" i="0" sz="5100" u="none" cap="none" strike="noStrike">
+              <a:defRPr sz="5100" b="0" i="0" u="none" strike="noStrike" cap="none">
                 <a:solidFill>
                   <a:schemeClr val="dk2"/>
                 </a:solidFill>
@@ -2856,7 +2898,7 @@
                 <a:sym typeface="Arial"/>
               </a:defRPr>
             </a:lvl6pPr>
-            <a:lvl7pPr indent="0" lvl="6" marL="0" marR="0" algn="r">
+            <a:lvl7pPr marL="0" marR="0" lvl="6" indent="0" algn="r">
               <a:lnSpc>
                 <a:spcPct val="100000"/>
               </a:lnSpc>
@@ -2872,7 +2914,7 @@
               <a:buSzPts val="5100"/>
               <a:buFont typeface="Arial"/>
               <a:buNone/>
-              <a:defRPr b="0" i="0" sz="5100" u="none" cap="none" strike="noStrike">
+              <a:defRPr sz="5100" b="0" i="0" u="none" strike="noStrike" cap="none">
                 <a:solidFill>
                   <a:schemeClr val="dk2"/>
                 </a:solidFill>
@@ -2882,7 +2924,7 @@
                 <a:sym typeface="Arial"/>
               </a:defRPr>
             </a:lvl7pPr>
-            <a:lvl8pPr indent="0" lvl="7" marL="0" marR="0" algn="r">
+            <a:lvl8pPr marL="0" marR="0" lvl="7" indent="0" algn="r">
               <a:lnSpc>
                 <a:spcPct val="100000"/>
               </a:lnSpc>
@@ -2898,7 +2940,7 @@
               <a:buSzPts val="5100"/>
               <a:buFont typeface="Arial"/>
               <a:buNone/>
-              <a:defRPr b="0" i="0" sz="5100" u="none" cap="none" strike="noStrike">
+              <a:defRPr sz="5100" b="0" i="0" u="none" strike="noStrike" cap="none">
                 <a:solidFill>
                   <a:schemeClr val="dk2"/>
                 </a:solidFill>
@@ -2908,7 +2950,7 @@
                 <a:sym typeface="Arial"/>
               </a:defRPr>
             </a:lvl8pPr>
-            <a:lvl9pPr indent="0" lvl="8" marL="0" marR="0" algn="r">
+            <a:lvl9pPr marL="0" marR="0" lvl="8" indent="0" algn="r">
               <a:lnSpc>
                 <a:spcPct val="100000"/>
               </a:lnSpc>
@@ -2924,7 +2966,7 @@
               <a:buSzPts val="5100"/>
               <a:buFont typeface="Arial"/>
               <a:buNone/>
-              <a:defRPr b="0" i="0" sz="5100" u="none" cap="none" strike="noStrike">
+              <a:defRPr sz="5100" b="0" i="0" u="none" strike="noStrike" cap="none">
                 <a:solidFill>
                   <a:schemeClr val="dk2"/>
                 </a:solidFill>
@@ -2936,7 +2978,7 @@
             </a:lvl9pPr>
           </a:lstStyle>
           <a:p>
-            <a:pPr indent="0" lvl="0" marL="0" rtl="0" algn="r">
+            <a:pPr marL="0" lvl="0" indent="0" algn="r" rtl="0">
               <a:spcBef>
                 <a:spcPts val="0"/>
               </a:spcBef>
@@ -2962,11 +3004,11 @@
 </file>
 
 <file path=ppt/slideLayouts/slideLayout4.xml><?xml version="1.0" encoding="utf-8"?>
-<p:sldLayout xmlns:a="http://schemas.openxmlformats.org/drawingml/2006/main" xmlns:r="http://schemas.openxmlformats.org/officeDocument/2006/relationships" xmlns:mc="http://schemas.openxmlformats.org/markup-compatibility/2006" xmlns:mv="urn:schemas-microsoft-com:mac:vml" xmlns:p="http://schemas.openxmlformats.org/presentationml/2006/main" xmlns:c="http://schemas.openxmlformats.org/drawingml/2006/chart" xmlns:dgm="http://schemas.openxmlformats.org/drawingml/2006/diagram" xmlns:o="urn:schemas-microsoft-com:office:office" xmlns:v="urn:schemas-microsoft-com:vml" xmlns:pvml="urn:schemas-microsoft-com:office:powerpoint" xmlns:com="http://schemas.openxmlformats.org/drawingml/2006/compatibility" xmlns:p14="http://schemas.microsoft.com/office/powerpoint/2010/main" xmlns:p15="http://schemas.microsoft.com/office/powerpoint/2012/main" xmlns:ahyp="http://schemas.microsoft.com/office/drawing/2018/hyperlinkcolor" matchingName="Title and body" type="tx">
+<p:sldLayout xmlns:a="http://schemas.openxmlformats.org/drawingml/2006/main" xmlns:r="http://schemas.openxmlformats.org/officeDocument/2006/relationships" xmlns:p="http://schemas.openxmlformats.org/presentationml/2006/main" matchingName="Title and body" type="tx">
   <p:cSld name="TITLE_AND_BODY">
     <p:spTree>
       <p:nvGrpSpPr>
-        <p:cNvPr id="19" name="Shape 19"/>
+        <p:cNvPr id="1" name="Shape 19"/>
         <p:cNvGrpSpPr/>
         <p:nvPr/>
       </p:nvGrpSpPr>
@@ -2981,7 +3023,9 @@
       <p:sp>
         <p:nvSpPr>
           <p:cNvPr id="20" name="Google Shape;20;g2b16e703bd7_0_11"/>
-          <p:cNvSpPr txBox="1"/>
+          <p:cNvSpPr txBox="1">
+            <a:spLocks noGrp="1"/>
+          </p:cNvSpPr>
           <p:nvPr>
             <p:ph type="title"/>
           </p:nvPr>
@@ -3000,7 +3044,7 @@
           </a:ln>
         </p:spPr>
         <p:txBody>
-          <a:bodyPr anchorCtr="0" anchor="t" bIns="462325" lIns="462325" spcFirstLastPara="1" rIns="462325" wrap="square" tIns="462325">
+          <a:bodyPr spcFirstLastPara="1" wrap="square" lIns="462325" tIns="462325" rIns="462325" bIns="462325" anchor="t" anchorCtr="0">
             <a:normAutofit/>
           </a:bodyPr>
           <a:lstStyle>
@@ -3131,15 +3175,19 @@
               <a:defRPr/>
             </a:lvl9pPr>
           </a:lstStyle>
-          <a:p/>
+          <a:p>
+            <a:endParaRPr/>
+          </a:p>
         </p:txBody>
       </p:sp>
       <p:sp>
         <p:nvSpPr>
           <p:cNvPr id="21" name="Google Shape;21;g2b16e703bd7_0_11"/>
-          <p:cNvSpPr txBox="1"/>
+          <p:cNvSpPr txBox="1">
+            <a:spLocks noGrp="1"/>
+          </p:cNvSpPr>
           <p:nvPr>
-            <p:ph idx="1" type="body"/>
+            <p:ph type="body" idx="1"/>
           </p:nvPr>
         </p:nvSpPr>
         <p:spPr>
@@ -3156,11 +3204,11 @@
           </a:ln>
         </p:spPr>
         <p:txBody>
-          <a:bodyPr anchorCtr="0" anchor="t" bIns="462325" lIns="462325" spcFirstLastPara="1" rIns="462325" wrap="square" tIns="462325">
+          <a:bodyPr spcFirstLastPara="1" wrap="square" lIns="462325" tIns="462325" rIns="462325" bIns="462325" anchor="t" anchorCtr="0">
             <a:normAutofit/>
           </a:bodyPr>
           <a:lstStyle>
-            <a:lvl1pPr indent="-806450" lvl="0" marL="457200" algn="l">
+            <a:lvl1pPr marL="457200" lvl="0" indent="-806450" algn="l">
               <a:lnSpc>
                 <a:spcPct val="115000"/>
               </a:lnSpc>
@@ -3174,7 +3222,7 @@
               <a:buChar char="●"/>
               <a:defRPr/>
             </a:lvl1pPr>
-            <a:lvl2pPr indent="-679450" lvl="1" marL="914400" algn="l">
+            <a:lvl2pPr marL="914400" lvl="1" indent="-679450" algn="l">
               <a:lnSpc>
                 <a:spcPct val="115000"/>
               </a:lnSpc>
@@ -3188,7 +3236,7 @@
               <a:buChar char="○"/>
               <a:defRPr/>
             </a:lvl2pPr>
-            <a:lvl3pPr indent="-679450" lvl="2" marL="1371600" algn="l">
+            <a:lvl3pPr marL="1371600" lvl="2" indent="-679450" algn="l">
               <a:lnSpc>
                 <a:spcPct val="115000"/>
               </a:lnSpc>
@@ -3202,7 +3250,7 @@
               <a:buChar char="■"/>
               <a:defRPr/>
             </a:lvl3pPr>
-            <a:lvl4pPr indent="-679450" lvl="3" marL="1828800" algn="l">
+            <a:lvl4pPr marL="1828800" lvl="3" indent="-679450" algn="l">
               <a:lnSpc>
                 <a:spcPct val="115000"/>
               </a:lnSpc>
@@ -3216,7 +3264,7 @@
               <a:buChar char="●"/>
               <a:defRPr/>
             </a:lvl4pPr>
-            <a:lvl5pPr indent="-679450" lvl="4" marL="2286000" algn="l">
+            <a:lvl5pPr marL="2286000" lvl="4" indent="-679450" algn="l">
               <a:lnSpc>
                 <a:spcPct val="115000"/>
               </a:lnSpc>
@@ -3230,7 +3278,7 @@
               <a:buChar char="○"/>
               <a:defRPr/>
             </a:lvl5pPr>
-            <a:lvl6pPr indent="-679450" lvl="5" marL="2743200" algn="l">
+            <a:lvl6pPr marL="2743200" lvl="5" indent="-679450" algn="l">
               <a:lnSpc>
                 <a:spcPct val="115000"/>
               </a:lnSpc>
@@ -3244,7 +3292,7 @@
               <a:buChar char="■"/>
               <a:defRPr/>
             </a:lvl6pPr>
-            <a:lvl7pPr indent="-679450" lvl="6" marL="3200400" algn="l">
+            <a:lvl7pPr marL="3200400" lvl="6" indent="-679450" algn="l">
               <a:lnSpc>
                 <a:spcPct val="115000"/>
               </a:lnSpc>
@@ -3258,7 +3306,7 @@
               <a:buChar char="●"/>
               <a:defRPr/>
             </a:lvl7pPr>
-            <a:lvl8pPr indent="-679450" lvl="7" marL="3657600" algn="l">
+            <a:lvl8pPr marL="3657600" lvl="7" indent="-679450" algn="l">
               <a:lnSpc>
                 <a:spcPct val="115000"/>
               </a:lnSpc>
@@ -3272,7 +3320,7 @@
               <a:buChar char="○"/>
               <a:defRPr/>
             </a:lvl8pPr>
-            <a:lvl9pPr indent="-679450" lvl="8" marL="4114800" algn="l">
+            <a:lvl9pPr marL="4114800" lvl="8" indent="-679450" algn="l">
               <a:lnSpc>
                 <a:spcPct val="115000"/>
               </a:lnSpc>
@@ -3287,15 +3335,19 @@
               <a:defRPr/>
             </a:lvl9pPr>
           </a:lstStyle>
-          <a:p/>
+          <a:p>
+            <a:endParaRPr/>
+          </a:p>
         </p:txBody>
       </p:sp>
       <p:sp>
         <p:nvSpPr>
           <p:cNvPr id="22" name="Google Shape;22;g2b16e703bd7_0_11"/>
-          <p:cNvSpPr txBox="1"/>
+          <p:cNvSpPr txBox="1">
+            <a:spLocks noGrp="1"/>
+          </p:cNvSpPr>
           <p:nvPr>
-            <p:ph idx="12" type="sldNum"/>
+            <p:ph type="sldNum" idx="12"/>
           </p:nvPr>
         </p:nvSpPr>
         <p:spPr>
@@ -3312,11 +3364,11 @@
           </a:ln>
         </p:spPr>
         <p:txBody>
-          <a:bodyPr anchorCtr="0" anchor="ctr" bIns="462325" lIns="462325" spcFirstLastPara="1" rIns="462325" wrap="square" tIns="462325">
+          <a:bodyPr spcFirstLastPara="1" wrap="square" lIns="462325" tIns="462325" rIns="462325" bIns="462325" anchor="ctr" anchorCtr="0">
             <a:normAutofit/>
           </a:bodyPr>
           <a:lstStyle>
-            <a:lvl1pPr indent="0" lvl="0" marL="0" marR="0" algn="r">
+            <a:lvl1pPr marL="0" marR="0" lvl="0" indent="0" algn="r">
               <a:lnSpc>
                 <a:spcPct val="100000"/>
               </a:lnSpc>
@@ -3332,7 +3384,7 @@
               <a:buSzPts val="5100"/>
               <a:buFont typeface="Arial"/>
               <a:buNone/>
-              <a:defRPr b="0" i="0" sz="5100" u="none" cap="none" strike="noStrike">
+              <a:defRPr sz="5100" b="0" i="0" u="none" strike="noStrike" cap="none">
                 <a:solidFill>
                   <a:schemeClr val="dk2"/>
                 </a:solidFill>
@@ -3342,7 +3394,7 @@
                 <a:sym typeface="Arial"/>
               </a:defRPr>
             </a:lvl1pPr>
-            <a:lvl2pPr indent="0" lvl="1" marL="0" marR="0" algn="r">
+            <a:lvl2pPr marL="0" marR="0" lvl="1" indent="0" algn="r">
               <a:lnSpc>
                 <a:spcPct val="100000"/>
               </a:lnSpc>
@@ -3358,7 +3410,7 @@
               <a:buSzPts val="5100"/>
               <a:buFont typeface="Arial"/>
               <a:buNone/>
-              <a:defRPr b="0" i="0" sz="5100" u="none" cap="none" strike="noStrike">
+              <a:defRPr sz="5100" b="0" i="0" u="none" strike="noStrike" cap="none">
                 <a:solidFill>
                   <a:schemeClr val="dk2"/>
                 </a:solidFill>
@@ -3368,7 +3420,7 @@
                 <a:sym typeface="Arial"/>
               </a:defRPr>
             </a:lvl2pPr>
-            <a:lvl3pPr indent="0" lvl="2" marL="0" marR="0" algn="r">
+            <a:lvl3pPr marL="0" marR="0" lvl="2" indent="0" algn="r">
               <a:lnSpc>
                 <a:spcPct val="100000"/>
               </a:lnSpc>
@@ -3384,7 +3436,7 @@
               <a:buSzPts val="5100"/>
               <a:buFont typeface="Arial"/>
               <a:buNone/>
-              <a:defRPr b="0" i="0" sz="5100" u="none" cap="none" strike="noStrike">
+              <a:defRPr sz="5100" b="0" i="0" u="none" strike="noStrike" cap="none">
                 <a:solidFill>
                   <a:schemeClr val="dk2"/>
                 </a:solidFill>
@@ -3394,7 +3446,7 @@
                 <a:sym typeface="Arial"/>
               </a:defRPr>
             </a:lvl3pPr>
-            <a:lvl4pPr indent="0" lvl="3" marL="0" marR="0" algn="r">
+            <a:lvl4pPr marL="0" marR="0" lvl="3" indent="0" algn="r">
               <a:lnSpc>
                 <a:spcPct val="100000"/>
               </a:lnSpc>
@@ -3410,7 +3462,7 @@
               <a:buSzPts val="5100"/>
               <a:buFont typeface="Arial"/>
               <a:buNone/>
-              <a:defRPr b="0" i="0" sz="5100" u="none" cap="none" strike="noStrike">
+              <a:defRPr sz="5100" b="0" i="0" u="none" strike="noStrike" cap="none">
                 <a:solidFill>
                   <a:schemeClr val="dk2"/>
                 </a:solidFill>
@@ -3420,7 +3472,7 @@
                 <a:sym typeface="Arial"/>
               </a:defRPr>
             </a:lvl4pPr>
-            <a:lvl5pPr indent="0" lvl="4" marL="0" marR="0" algn="r">
+            <a:lvl5pPr marL="0" marR="0" lvl="4" indent="0" algn="r">
               <a:lnSpc>
                 <a:spcPct val="100000"/>
               </a:lnSpc>
@@ -3436,7 +3488,7 @@
               <a:buSzPts val="5100"/>
               <a:buFont typeface="Arial"/>
               <a:buNone/>
-              <a:defRPr b="0" i="0" sz="5100" u="none" cap="none" strike="noStrike">
+              <a:defRPr sz="5100" b="0" i="0" u="none" strike="noStrike" cap="none">
                 <a:solidFill>
                   <a:schemeClr val="dk2"/>
                 </a:solidFill>
@@ -3446,7 +3498,7 @@
                 <a:sym typeface="Arial"/>
               </a:defRPr>
             </a:lvl5pPr>
-            <a:lvl6pPr indent="0" lvl="5" marL="0" marR="0" algn="r">
+            <a:lvl6pPr marL="0" marR="0" lvl="5" indent="0" algn="r">
               <a:lnSpc>
                 <a:spcPct val="100000"/>
               </a:lnSpc>
@@ -3462,7 +3514,7 @@
               <a:buSzPts val="5100"/>
               <a:buFont typeface="Arial"/>
               <a:buNone/>
-              <a:defRPr b="0" i="0" sz="5100" u="none" cap="none" strike="noStrike">
+              <a:defRPr sz="5100" b="0" i="0" u="none" strike="noStrike" cap="none">
                 <a:solidFill>
                   <a:schemeClr val="dk2"/>
                 </a:solidFill>
@@ -3472,7 +3524,7 @@
                 <a:sym typeface="Arial"/>
               </a:defRPr>
             </a:lvl6pPr>
-            <a:lvl7pPr indent="0" lvl="6" marL="0" marR="0" algn="r">
+            <a:lvl7pPr marL="0" marR="0" lvl="6" indent="0" algn="r">
               <a:lnSpc>
                 <a:spcPct val="100000"/>
               </a:lnSpc>
@@ -3488,7 +3540,7 @@
               <a:buSzPts val="5100"/>
               <a:buFont typeface="Arial"/>
               <a:buNone/>
-              <a:defRPr b="0" i="0" sz="5100" u="none" cap="none" strike="noStrike">
+              <a:defRPr sz="5100" b="0" i="0" u="none" strike="noStrike" cap="none">
                 <a:solidFill>
                   <a:schemeClr val="dk2"/>
                 </a:solidFill>
@@ -3498,7 +3550,7 @@
                 <a:sym typeface="Arial"/>
               </a:defRPr>
             </a:lvl7pPr>
-            <a:lvl8pPr indent="0" lvl="7" marL="0" marR="0" algn="r">
+            <a:lvl8pPr marL="0" marR="0" lvl="7" indent="0" algn="r">
               <a:lnSpc>
                 <a:spcPct val="100000"/>
               </a:lnSpc>
@@ -3514,7 +3566,7 @@
               <a:buSzPts val="5100"/>
               <a:buFont typeface="Arial"/>
               <a:buNone/>
-              <a:defRPr b="0" i="0" sz="5100" u="none" cap="none" strike="noStrike">
+              <a:defRPr sz="5100" b="0" i="0" u="none" strike="noStrike" cap="none">
                 <a:solidFill>
                   <a:schemeClr val="dk2"/>
                 </a:solidFill>
@@ -3524,7 +3576,7 @@
                 <a:sym typeface="Arial"/>
               </a:defRPr>
             </a:lvl8pPr>
-            <a:lvl9pPr indent="0" lvl="8" marL="0" marR="0" algn="r">
+            <a:lvl9pPr marL="0" marR="0" lvl="8" indent="0" algn="r">
               <a:lnSpc>
                 <a:spcPct val="100000"/>
               </a:lnSpc>
@@ -3540,7 +3592,7 @@
               <a:buSzPts val="5100"/>
               <a:buFont typeface="Arial"/>
               <a:buNone/>
-              <a:defRPr b="0" i="0" sz="5100" u="none" cap="none" strike="noStrike">
+              <a:defRPr sz="5100" b="0" i="0" u="none" strike="noStrike" cap="none">
                 <a:solidFill>
                   <a:schemeClr val="dk2"/>
                 </a:solidFill>
@@ -3552,7 +3604,7 @@
             </a:lvl9pPr>
           </a:lstStyle>
           <a:p>
-            <a:pPr indent="0" lvl="0" marL="0" rtl="0" algn="r">
+            <a:pPr marL="0" lvl="0" indent="0" algn="r" rtl="0">
               <a:spcBef>
                 <a:spcPts val="0"/>
               </a:spcBef>
@@ -3578,11 +3630,11 @@
 </file>
 
 <file path=ppt/slideLayouts/slideLayout5.xml><?xml version="1.0" encoding="utf-8"?>
-<p:sldLayout xmlns:a="http://schemas.openxmlformats.org/drawingml/2006/main" xmlns:r="http://schemas.openxmlformats.org/officeDocument/2006/relationships" xmlns:mc="http://schemas.openxmlformats.org/markup-compatibility/2006" xmlns:mv="urn:schemas-microsoft-com:mac:vml" xmlns:p="http://schemas.openxmlformats.org/presentationml/2006/main" xmlns:c="http://schemas.openxmlformats.org/drawingml/2006/chart" xmlns:dgm="http://schemas.openxmlformats.org/drawingml/2006/diagram" xmlns:o="urn:schemas-microsoft-com:office:office" xmlns:v="urn:schemas-microsoft-com:vml" xmlns:pvml="urn:schemas-microsoft-com:office:powerpoint" xmlns:com="http://schemas.openxmlformats.org/drawingml/2006/compatibility" xmlns:p14="http://schemas.microsoft.com/office/powerpoint/2010/main" xmlns:p15="http://schemas.microsoft.com/office/powerpoint/2012/main" xmlns:ahyp="http://schemas.microsoft.com/office/drawing/2018/hyperlinkcolor" matchingName="Title and two columns" type="twoColTx">
+<p:sldLayout xmlns:a="http://schemas.openxmlformats.org/drawingml/2006/main" xmlns:r="http://schemas.openxmlformats.org/officeDocument/2006/relationships" xmlns:p="http://schemas.openxmlformats.org/presentationml/2006/main" matchingName="Title and two columns" type="twoColTx">
   <p:cSld name="TITLE_AND_TWO_COLUMNS">
     <p:spTree>
       <p:nvGrpSpPr>
-        <p:cNvPr id="23" name="Shape 23"/>
+        <p:cNvPr id="1" name="Shape 23"/>
         <p:cNvGrpSpPr/>
         <p:nvPr/>
       </p:nvGrpSpPr>
@@ -3597,7 +3649,9 @@
       <p:sp>
         <p:nvSpPr>
           <p:cNvPr id="24" name="Google Shape;24;g2b16e703bd7_0_15"/>
-          <p:cNvSpPr txBox="1"/>
+          <p:cNvSpPr txBox="1">
+            <a:spLocks noGrp="1"/>
+          </p:cNvSpPr>
           <p:nvPr>
             <p:ph type="title"/>
           </p:nvPr>
@@ -3616,7 +3670,7 @@
           </a:ln>
         </p:spPr>
         <p:txBody>
-          <a:bodyPr anchorCtr="0" anchor="t" bIns="462325" lIns="462325" spcFirstLastPara="1" rIns="462325" wrap="square" tIns="462325">
+          <a:bodyPr spcFirstLastPara="1" wrap="square" lIns="462325" tIns="462325" rIns="462325" bIns="462325" anchor="t" anchorCtr="0">
             <a:normAutofit/>
           </a:bodyPr>
           <a:lstStyle>
@@ -3747,15 +3801,19 @@
               <a:defRPr/>
             </a:lvl9pPr>
           </a:lstStyle>
-          <a:p/>
+          <a:p>
+            <a:endParaRPr/>
+          </a:p>
         </p:txBody>
       </p:sp>
       <p:sp>
         <p:nvSpPr>
           <p:cNvPr id="25" name="Google Shape;25;g2b16e703bd7_0_15"/>
-          <p:cNvSpPr txBox="1"/>
+          <p:cNvSpPr txBox="1">
+            <a:spLocks noGrp="1"/>
+          </p:cNvSpPr>
           <p:nvPr>
-            <p:ph idx="1" type="body"/>
+            <p:ph type="body" idx="1"/>
           </p:nvPr>
         </p:nvSpPr>
         <p:spPr>
@@ -3772,11 +3830,11 @@
           </a:ln>
         </p:spPr>
         <p:txBody>
-          <a:bodyPr anchorCtr="0" anchor="t" bIns="462325" lIns="462325" spcFirstLastPara="1" rIns="462325" wrap="square" tIns="462325">
+          <a:bodyPr spcFirstLastPara="1" wrap="square" lIns="462325" tIns="462325" rIns="462325" bIns="462325" anchor="t" anchorCtr="0">
             <a:normAutofit/>
           </a:bodyPr>
           <a:lstStyle>
-            <a:lvl1pPr indent="-679450" lvl="0" marL="457200" algn="l">
+            <a:lvl1pPr marL="457200" lvl="0" indent="-679450" algn="l">
               <a:lnSpc>
                 <a:spcPct val="115000"/>
               </a:lnSpc>
@@ -3790,7 +3848,7 @@
               <a:buChar char="●"/>
               <a:defRPr sz="7100"/>
             </a:lvl1pPr>
-            <a:lvl2pPr indent="-615950" lvl="1" marL="914400" algn="l">
+            <a:lvl2pPr marL="914400" lvl="1" indent="-615950" algn="l">
               <a:lnSpc>
                 <a:spcPct val="115000"/>
               </a:lnSpc>
@@ -3804,7 +3862,7 @@
               <a:buChar char="○"/>
               <a:defRPr sz="6100"/>
             </a:lvl2pPr>
-            <a:lvl3pPr indent="-615950" lvl="2" marL="1371600" algn="l">
+            <a:lvl3pPr marL="1371600" lvl="2" indent="-615950" algn="l">
               <a:lnSpc>
                 <a:spcPct val="115000"/>
               </a:lnSpc>
@@ -3818,7 +3876,7 @@
               <a:buChar char="■"/>
               <a:defRPr sz="6100"/>
             </a:lvl3pPr>
-            <a:lvl4pPr indent="-615950" lvl="3" marL="1828800" algn="l">
+            <a:lvl4pPr marL="1828800" lvl="3" indent="-615950" algn="l">
               <a:lnSpc>
                 <a:spcPct val="115000"/>
               </a:lnSpc>
@@ -3832,7 +3890,7 @@
               <a:buChar char="●"/>
               <a:defRPr sz="6100"/>
             </a:lvl4pPr>
-            <a:lvl5pPr indent="-615950" lvl="4" marL="2286000" algn="l">
+            <a:lvl5pPr marL="2286000" lvl="4" indent="-615950" algn="l">
               <a:lnSpc>
                 <a:spcPct val="115000"/>
               </a:lnSpc>
@@ -3846,7 +3904,7 @@
               <a:buChar char="○"/>
               <a:defRPr sz="6100"/>
             </a:lvl5pPr>
-            <a:lvl6pPr indent="-615950" lvl="5" marL="2743200" algn="l">
+            <a:lvl6pPr marL="2743200" lvl="5" indent="-615950" algn="l">
               <a:lnSpc>
                 <a:spcPct val="115000"/>
               </a:lnSpc>
@@ -3860,7 +3918,7 @@
               <a:buChar char="■"/>
               <a:defRPr sz="6100"/>
             </a:lvl6pPr>
-            <a:lvl7pPr indent="-615950" lvl="6" marL="3200400" algn="l">
+            <a:lvl7pPr marL="3200400" lvl="6" indent="-615950" algn="l">
               <a:lnSpc>
                 <a:spcPct val="115000"/>
               </a:lnSpc>
@@ -3874,7 +3932,7 @@
               <a:buChar char="●"/>
               <a:defRPr sz="6100"/>
             </a:lvl7pPr>
-            <a:lvl8pPr indent="-615950" lvl="7" marL="3657600" algn="l">
+            <a:lvl8pPr marL="3657600" lvl="7" indent="-615950" algn="l">
               <a:lnSpc>
                 <a:spcPct val="115000"/>
               </a:lnSpc>
@@ -3888,7 +3946,7 @@
               <a:buChar char="○"/>
               <a:defRPr sz="6100"/>
             </a:lvl8pPr>
-            <a:lvl9pPr indent="-615950" lvl="8" marL="4114800" algn="l">
+            <a:lvl9pPr marL="4114800" lvl="8" indent="-615950" algn="l">
               <a:lnSpc>
                 <a:spcPct val="115000"/>
               </a:lnSpc>
@@ -3903,15 +3961,19 @@
               <a:defRPr sz="6100"/>
             </a:lvl9pPr>
           </a:lstStyle>
-          <a:p/>
+          <a:p>
+            <a:endParaRPr/>
+          </a:p>
         </p:txBody>
       </p:sp>
       <p:sp>
         <p:nvSpPr>
           <p:cNvPr id="26" name="Google Shape;26;g2b16e703bd7_0_15"/>
-          <p:cNvSpPr txBox="1"/>
+          <p:cNvSpPr txBox="1">
+            <a:spLocks noGrp="1"/>
+          </p:cNvSpPr>
           <p:nvPr>
-            <p:ph idx="2" type="body"/>
+            <p:ph type="body" idx="2"/>
           </p:nvPr>
         </p:nvSpPr>
         <p:spPr>
@@ -3928,11 +3990,11 @@
           </a:ln>
         </p:spPr>
         <p:txBody>
-          <a:bodyPr anchorCtr="0" anchor="t" bIns="462325" lIns="462325" spcFirstLastPara="1" rIns="462325" wrap="square" tIns="462325">
+          <a:bodyPr spcFirstLastPara="1" wrap="square" lIns="462325" tIns="462325" rIns="462325" bIns="462325" anchor="t" anchorCtr="0">
             <a:normAutofit/>
           </a:bodyPr>
           <a:lstStyle>
-            <a:lvl1pPr indent="-679450" lvl="0" marL="457200" algn="l">
+            <a:lvl1pPr marL="457200" lvl="0" indent="-679450" algn="l">
               <a:lnSpc>
                 <a:spcPct val="115000"/>
               </a:lnSpc>
@@ -3946,7 +4008,7 @@
               <a:buChar char="●"/>
               <a:defRPr sz="7100"/>
             </a:lvl1pPr>
-            <a:lvl2pPr indent="-615950" lvl="1" marL="914400" algn="l">
+            <a:lvl2pPr marL="914400" lvl="1" indent="-615950" algn="l">
               <a:lnSpc>
                 <a:spcPct val="115000"/>
               </a:lnSpc>
@@ -3960,7 +4022,7 @@
               <a:buChar char="○"/>
               <a:defRPr sz="6100"/>
             </a:lvl2pPr>
-            <a:lvl3pPr indent="-615950" lvl="2" marL="1371600" algn="l">
+            <a:lvl3pPr marL="1371600" lvl="2" indent="-615950" algn="l">
               <a:lnSpc>
                 <a:spcPct val="115000"/>
               </a:lnSpc>
@@ -3974,7 +4036,7 @@
               <a:buChar char="■"/>
               <a:defRPr sz="6100"/>
             </a:lvl3pPr>
-            <a:lvl4pPr indent="-615950" lvl="3" marL="1828800" algn="l">
+            <a:lvl4pPr marL="1828800" lvl="3" indent="-615950" algn="l">
               <a:lnSpc>
                 <a:spcPct val="115000"/>
               </a:lnSpc>
@@ -3988,7 +4050,7 @@
               <a:buChar char="●"/>
               <a:defRPr sz="6100"/>
             </a:lvl4pPr>
-            <a:lvl5pPr indent="-615950" lvl="4" marL="2286000" algn="l">
+            <a:lvl5pPr marL="2286000" lvl="4" indent="-615950" algn="l">
               <a:lnSpc>
                 <a:spcPct val="115000"/>
               </a:lnSpc>
@@ -4002,7 +4064,7 @@
               <a:buChar char="○"/>
               <a:defRPr sz="6100"/>
             </a:lvl5pPr>
-            <a:lvl6pPr indent="-615950" lvl="5" marL="2743200" algn="l">
+            <a:lvl6pPr marL="2743200" lvl="5" indent="-615950" algn="l">
               <a:lnSpc>
                 <a:spcPct val="115000"/>
               </a:lnSpc>
@@ -4016,7 +4078,7 @@
               <a:buChar char="■"/>
               <a:defRPr sz="6100"/>
             </a:lvl6pPr>
-            <a:lvl7pPr indent="-615950" lvl="6" marL="3200400" algn="l">
+            <a:lvl7pPr marL="3200400" lvl="6" indent="-615950" algn="l">
               <a:lnSpc>
                 <a:spcPct val="115000"/>
               </a:lnSpc>
@@ -4030,7 +4092,7 @@
               <a:buChar char="●"/>
               <a:defRPr sz="6100"/>
             </a:lvl7pPr>
-            <a:lvl8pPr indent="-615950" lvl="7" marL="3657600" algn="l">
+            <a:lvl8pPr marL="3657600" lvl="7" indent="-615950" algn="l">
               <a:lnSpc>
                 <a:spcPct val="115000"/>
               </a:lnSpc>
@@ -4044,7 +4106,7 @@
               <a:buChar char="○"/>
               <a:defRPr sz="6100"/>
             </a:lvl8pPr>
-            <a:lvl9pPr indent="-615950" lvl="8" marL="4114800" algn="l">
+            <a:lvl9pPr marL="4114800" lvl="8" indent="-615950" algn="l">
               <a:lnSpc>
                 <a:spcPct val="115000"/>
               </a:lnSpc>
@@ -4059,15 +4121,19 @@
               <a:defRPr sz="6100"/>
             </a:lvl9pPr>
           </a:lstStyle>
-          <a:p/>
+          <a:p>
+            <a:endParaRPr/>
+          </a:p>
         </p:txBody>
       </p:sp>
       <p:sp>
         <p:nvSpPr>
           <p:cNvPr id="27" name="Google Shape;27;g2b16e703bd7_0_15"/>
-          <p:cNvSpPr txBox="1"/>
+          <p:cNvSpPr txBox="1">
+            <a:spLocks noGrp="1"/>
+          </p:cNvSpPr>
           <p:nvPr>
-            <p:ph idx="12" type="sldNum"/>
+            <p:ph type="sldNum" idx="12"/>
           </p:nvPr>
         </p:nvSpPr>
         <p:spPr>
@@ -4084,11 +4150,11 @@
           </a:ln>
         </p:spPr>
         <p:txBody>
-          <a:bodyPr anchorCtr="0" anchor="ctr" bIns="462325" lIns="462325" spcFirstLastPara="1" rIns="462325" wrap="square" tIns="462325">
+          <a:bodyPr spcFirstLastPara="1" wrap="square" lIns="462325" tIns="462325" rIns="462325" bIns="462325" anchor="ctr" anchorCtr="0">
             <a:normAutofit/>
           </a:bodyPr>
           <a:lstStyle>
-            <a:lvl1pPr indent="0" lvl="0" marL="0" marR="0" algn="r">
+            <a:lvl1pPr marL="0" marR="0" lvl="0" indent="0" algn="r">
               <a:lnSpc>
                 <a:spcPct val="100000"/>
               </a:lnSpc>
@@ -4104,7 +4170,7 @@
               <a:buSzPts val="5100"/>
               <a:buFont typeface="Arial"/>
               <a:buNone/>
-              <a:defRPr b="0" i="0" sz="5100" u="none" cap="none" strike="noStrike">
+              <a:defRPr sz="5100" b="0" i="0" u="none" strike="noStrike" cap="none">
                 <a:solidFill>
                   <a:schemeClr val="dk2"/>
                 </a:solidFill>
@@ -4114,7 +4180,7 @@
                 <a:sym typeface="Arial"/>
               </a:defRPr>
             </a:lvl1pPr>
-            <a:lvl2pPr indent="0" lvl="1" marL="0" marR="0" algn="r">
+            <a:lvl2pPr marL="0" marR="0" lvl="1" indent="0" algn="r">
               <a:lnSpc>
                 <a:spcPct val="100000"/>
               </a:lnSpc>
@@ -4130,7 +4196,7 @@
               <a:buSzPts val="5100"/>
               <a:buFont typeface="Arial"/>
               <a:buNone/>
-              <a:defRPr b="0" i="0" sz="5100" u="none" cap="none" strike="noStrike">
+              <a:defRPr sz="5100" b="0" i="0" u="none" strike="noStrike" cap="none">
                 <a:solidFill>
                   <a:schemeClr val="dk2"/>
                 </a:solidFill>
@@ -4140,7 +4206,7 @@
                 <a:sym typeface="Arial"/>
               </a:defRPr>
             </a:lvl2pPr>
-            <a:lvl3pPr indent="0" lvl="2" marL="0" marR="0" algn="r">
+            <a:lvl3pPr marL="0" marR="0" lvl="2" indent="0" algn="r">
               <a:lnSpc>
                 <a:spcPct val="100000"/>
               </a:lnSpc>
@@ -4156,7 +4222,7 @@
               <a:buSzPts val="5100"/>
               <a:buFont typeface="Arial"/>
               <a:buNone/>
-              <a:defRPr b="0" i="0" sz="5100" u="none" cap="none" strike="noStrike">
+              <a:defRPr sz="5100" b="0" i="0" u="none" strike="noStrike" cap="none">
                 <a:solidFill>
                   <a:schemeClr val="dk2"/>
                 </a:solidFill>
@@ -4166,7 +4232,7 @@
                 <a:sym typeface="Arial"/>
               </a:defRPr>
             </a:lvl3pPr>
-            <a:lvl4pPr indent="0" lvl="3" marL="0" marR="0" algn="r">
+            <a:lvl4pPr marL="0" marR="0" lvl="3" indent="0" algn="r">
               <a:lnSpc>
                 <a:spcPct val="100000"/>
               </a:lnSpc>
@@ -4182,7 +4248,7 @@
               <a:buSzPts val="5100"/>
               <a:buFont typeface="Arial"/>
               <a:buNone/>
-              <a:defRPr b="0" i="0" sz="5100" u="none" cap="none" strike="noStrike">
+              <a:defRPr sz="5100" b="0" i="0" u="none" strike="noStrike" cap="none">
                 <a:solidFill>
                   <a:schemeClr val="dk2"/>
                 </a:solidFill>
@@ -4192,7 +4258,7 @@
                 <a:sym typeface="Arial"/>
               </a:defRPr>
             </a:lvl4pPr>
-            <a:lvl5pPr indent="0" lvl="4" marL="0" marR="0" algn="r">
+            <a:lvl5pPr marL="0" marR="0" lvl="4" indent="0" algn="r">
               <a:lnSpc>
                 <a:spcPct val="100000"/>
               </a:lnSpc>
@@ -4208,7 +4274,7 @@
               <a:buSzPts val="5100"/>
               <a:buFont typeface="Arial"/>
               <a:buNone/>
-              <a:defRPr b="0" i="0" sz="5100" u="none" cap="none" strike="noStrike">
+              <a:defRPr sz="5100" b="0" i="0" u="none" strike="noStrike" cap="none">
                 <a:solidFill>
                   <a:schemeClr val="dk2"/>
                 </a:solidFill>
@@ -4218,7 +4284,7 @@
                 <a:sym typeface="Arial"/>
               </a:defRPr>
             </a:lvl5pPr>
-            <a:lvl6pPr indent="0" lvl="5" marL="0" marR="0" algn="r">
+            <a:lvl6pPr marL="0" marR="0" lvl="5" indent="0" algn="r">
               <a:lnSpc>
                 <a:spcPct val="100000"/>
               </a:lnSpc>
@@ -4234,7 +4300,7 @@
               <a:buSzPts val="5100"/>
               <a:buFont typeface="Arial"/>
               <a:buNone/>
-              <a:defRPr b="0" i="0" sz="5100" u="none" cap="none" strike="noStrike">
+              <a:defRPr sz="5100" b="0" i="0" u="none" strike="noStrike" cap="none">
                 <a:solidFill>
                   <a:schemeClr val="dk2"/>
                 </a:solidFill>
@@ -4244,7 +4310,7 @@
                 <a:sym typeface="Arial"/>
               </a:defRPr>
             </a:lvl6pPr>
-            <a:lvl7pPr indent="0" lvl="6" marL="0" marR="0" algn="r">
+            <a:lvl7pPr marL="0" marR="0" lvl="6" indent="0" algn="r">
               <a:lnSpc>
                 <a:spcPct val="100000"/>
               </a:lnSpc>
@@ -4260,7 +4326,7 @@
               <a:buSzPts val="5100"/>
               <a:buFont typeface="Arial"/>
               <a:buNone/>
-              <a:defRPr b="0" i="0" sz="5100" u="none" cap="none" strike="noStrike">
+              <a:defRPr sz="5100" b="0" i="0" u="none" strike="noStrike" cap="none">
                 <a:solidFill>
                   <a:schemeClr val="dk2"/>
                 </a:solidFill>
@@ -4270,7 +4336,7 @@
                 <a:sym typeface="Arial"/>
               </a:defRPr>
             </a:lvl7pPr>
-            <a:lvl8pPr indent="0" lvl="7" marL="0" marR="0" algn="r">
+            <a:lvl8pPr marL="0" marR="0" lvl="7" indent="0" algn="r">
               <a:lnSpc>
                 <a:spcPct val="100000"/>
               </a:lnSpc>
@@ -4286,7 +4352,7 @@
               <a:buSzPts val="5100"/>
               <a:buFont typeface="Arial"/>
               <a:buNone/>
-              <a:defRPr b="0" i="0" sz="5100" u="none" cap="none" strike="noStrike">
+              <a:defRPr sz="5100" b="0" i="0" u="none" strike="noStrike" cap="none">
                 <a:solidFill>
                   <a:schemeClr val="dk2"/>
                 </a:solidFill>
@@ -4296,7 +4362,7 @@
                 <a:sym typeface="Arial"/>
               </a:defRPr>
             </a:lvl8pPr>
-            <a:lvl9pPr indent="0" lvl="8" marL="0" marR="0" algn="r">
+            <a:lvl9pPr marL="0" marR="0" lvl="8" indent="0" algn="r">
               <a:lnSpc>
                 <a:spcPct val="100000"/>
               </a:lnSpc>
@@ -4312,7 +4378,7 @@
               <a:buSzPts val="5100"/>
               <a:buFont typeface="Arial"/>
               <a:buNone/>
-              <a:defRPr b="0" i="0" sz="5100" u="none" cap="none" strike="noStrike">
+              <a:defRPr sz="5100" b="0" i="0" u="none" strike="noStrike" cap="none">
                 <a:solidFill>
                   <a:schemeClr val="dk2"/>
                 </a:solidFill>
@@ -4324,7 +4390,7 @@
             </a:lvl9pPr>
           </a:lstStyle>
           <a:p>
-            <a:pPr indent="0" lvl="0" marL="0" rtl="0" algn="r">
+            <a:pPr marL="0" lvl="0" indent="0" algn="r" rtl="0">
               <a:spcBef>
                 <a:spcPts val="0"/>
               </a:spcBef>
@@ -4350,11 +4416,11 @@
 </file>
 
 <file path=ppt/slideLayouts/slideLayout6.xml><?xml version="1.0" encoding="utf-8"?>
-<p:sldLayout xmlns:a="http://schemas.openxmlformats.org/drawingml/2006/main" xmlns:r="http://schemas.openxmlformats.org/officeDocument/2006/relationships" xmlns:mc="http://schemas.openxmlformats.org/markup-compatibility/2006" xmlns:mv="urn:schemas-microsoft-com:mac:vml" xmlns:p="http://schemas.openxmlformats.org/presentationml/2006/main" xmlns:c="http://schemas.openxmlformats.org/drawingml/2006/chart" xmlns:dgm="http://schemas.openxmlformats.org/drawingml/2006/diagram" xmlns:o="urn:schemas-microsoft-com:office:office" xmlns:v="urn:schemas-microsoft-com:vml" xmlns:pvml="urn:schemas-microsoft-com:office:powerpoint" xmlns:com="http://schemas.openxmlformats.org/drawingml/2006/compatibility" xmlns:p14="http://schemas.microsoft.com/office/powerpoint/2010/main" xmlns:p15="http://schemas.microsoft.com/office/powerpoint/2012/main" xmlns:ahyp="http://schemas.microsoft.com/office/drawing/2018/hyperlinkcolor" matchingName="Title only" type="titleOnly">
+<p:sldLayout xmlns:a="http://schemas.openxmlformats.org/drawingml/2006/main" xmlns:r="http://schemas.openxmlformats.org/officeDocument/2006/relationships" xmlns:p="http://schemas.openxmlformats.org/presentationml/2006/main" matchingName="Title only" type="titleOnly">
   <p:cSld name="TITLE_ONLY">
     <p:spTree>
       <p:nvGrpSpPr>
-        <p:cNvPr id="28" name="Shape 28"/>
+        <p:cNvPr id="1" name="Shape 28"/>
         <p:cNvGrpSpPr/>
         <p:nvPr/>
       </p:nvGrpSpPr>
@@ -4369,7 +4435,9 @@
       <p:sp>
         <p:nvSpPr>
           <p:cNvPr id="29" name="Google Shape;29;g2b16e703bd7_0_20"/>
-          <p:cNvSpPr txBox="1"/>
+          <p:cNvSpPr txBox="1">
+            <a:spLocks noGrp="1"/>
+          </p:cNvSpPr>
           <p:nvPr>
             <p:ph type="title"/>
           </p:nvPr>
@@ -4388,7 +4456,7 @@
           </a:ln>
         </p:spPr>
         <p:txBody>
-          <a:bodyPr anchorCtr="0" anchor="t" bIns="462325" lIns="462325" spcFirstLastPara="1" rIns="462325" wrap="square" tIns="462325">
+          <a:bodyPr spcFirstLastPara="1" wrap="square" lIns="462325" tIns="462325" rIns="462325" bIns="462325" anchor="t" anchorCtr="0">
             <a:normAutofit/>
           </a:bodyPr>
           <a:lstStyle>
@@ -4519,15 +4587,19 @@
               <a:defRPr/>
             </a:lvl9pPr>
           </a:lstStyle>
-          <a:p/>
+          <a:p>
+            <a:endParaRPr/>
+          </a:p>
         </p:txBody>
       </p:sp>
       <p:sp>
         <p:nvSpPr>
           <p:cNvPr id="30" name="Google Shape;30;g2b16e703bd7_0_20"/>
-          <p:cNvSpPr txBox="1"/>
+          <p:cNvSpPr txBox="1">
+            <a:spLocks noGrp="1"/>
+          </p:cNvSpPr>
           <p:nvPr>
-            <p:ph idx="12" type="sldNum"/>
+            <p:ph type="sldNum" idx="12"/>
           </p:nvPr>
         </p:nvSpPr>
         <p:spPr>
@@ -4544,11 +4616,11 @@
           </a:ln>
         </p:spPr>
         <p:txBody>
-          <a:bodyPr anchorCtr="0" anchor="ctr" bIns="462325" lIns="462325" spcFirstLastPara="1" rIns="462325" wrap="square" tIns="462325">
+          <a:bodyPr spcFirstLastPara="1" wrap="square" lIns="462325" tIns="462325" rIns="462325" bIns="462325" anchor="ctr" anchorCtr="0">
             <a:normAutofit/>
           </a:bodyPr>
           <a:lstStyle>
-            <a:lvl1pPr indent="0" lvl="0" marL="0" marR="0" algn="r">
+            <a:lvl1pPr marL="0" marR="0" lvl="0" indent="0" algn="r">
               <a:lnSpc>
                 <a:spcPct val="100000"/>
               </a:lnSpc>
@@ -4564,7 +4636,7 @@
               <a:buSzPts val="5100"/>
               <a:buFont typeface="Arial"/>
               <a:buNone/>
-              <a:defRPr b="0" i="0" sz="5100" u="none" cap="none" strike="noStrike">
+              <a:defRPr sz="5100" b="0" i="0" u="none" strike="noStrike" cap="none">
                 <a:solidFill>
                   <a:schemeClr val="dk2"/>
                 </a:solidFill>
@@ -4574,7 +4646,7 @@
                 <a:sym typeface="Arial"/>
               </a:defRPr>
             </a:lvl1pPr>
-            <a:lvl2pPr indent="0" lvl="1" marL="0" marR="0" algn="r">
+            <a:lvl2pPr marL="0" marR="0" lvl="1" indent="0" algn="r">
               <a:lnSpc>
                 <a:spcPct val="100000"/>
               </a:lnSpc>
@@ -4590,7 +4662,7 @@
               <a:buSzPts val="5100"/>
               <a:buFont typeface="Arial"/>
               <a:buNone/>
-              <a:defRPr b="0" i="0" sz="5100" u="none" cap="none" strike="noStrike">
+              <a:defRPr sz="5100" b="0" i="0" u="none" strike="noStrike" cap="none">
                 <a:solidFill>
                   <a:schemeClr val="dk2"/>
                 </a:solidFill>
@@ -4600,7 +4672,7 @@
                 <a:sym typeface="Arial"/>
               </a:defRPr>
             </a:lvl2pPr>
-            <a:lvl3pPr indent="0" lvl="2" marL="0" marR="0" algn="r">
+            <a:lvl3pPr marL="0" marR="0" lvl="2" indent="0" algn="r">
               <a:lnSpc>
                 <a:spcPct val="100000"/>
               </a:lnSpc>
@@ -4616,7 +4688,7 @@
               <a:buSzPts val="5100"/>
               <a:buFont typeface="Arial"/>
               <a:buNone/>
-              <a:defRPr b="0" i="0" sz="5100" u="none" cap="none" strike="noStrike">
+              <a:defRPr sz="5100" b="0" i="0" u="none" strike="noStrike" cap="none">
                 <a:solidFill>
                   <a:schemeClr val="dk2"/>
                 </a:solidFill>
@@ -4626,7 +4698,7 @@
                 <a:sym typeface="Arial"/>
               </a:defRPr>
             </a:lvl3pPr>
-            <a:lvl4pPr indent="0" lvl="3" marL="0" marR="0" algn="r">
+            <a:lvl4pPr marL="0" marR="0" lvl="3" indent="0" algn="r">
               <a:lnSpc>
                 <a:spcPct val="100000"/>
               </a:lnSpc>
@@ -4642,7 +4714,7 @@
               <a:buSzPts val="5100"/>
               <a:buFont typeface="Arial"/>
               <a:buNone/>
-              <a:defRPr b="0" i="0" sz="5100" u="none" cap="none" strike="noStrike">
+              <a:defRPr sz="5100" b="0" i="0" u="none" strike="noStrike" cap="none">
                 <a:solidFill>
                   <a:schemeClr val="dk2"/>
                 </a:solidFill>
@@ -4652,7 +4724,7 @@
                 <a:sym typeface="Arial"/>
               </a:defRPr>
             </a:lvl4pPr>
-            <a:lvl5pPr indent="0" lvl="4" marL="0" marR="0" algn="r">
+            <a:lvl5pPr marL="0" marR="0" lvl="4" indent="0" algn="r">
               <a:lnSpc>
                 <a:spcPct val="100000"/>
               </a:lnSpc>
@@ -4668,7 +4740,7 @@
               <a:buSzPts val="5100"/>
               <a:buFont typeface="Arial"/>
               <a:buNone/>
-              <a:defRPr b="0" i="0" sz="5100" u="none" cap="none" strike="noStrike">
+              <a:defRPr sz="5100" b="0" i="0" u="none" strike="noStrike" cap="none">
                 <a:solidFill>
                   <a:schemeClr val="dk2"/>
                 </a:solidFill>
@@ -4678,7 +4750,7 @@
                 <a:sym typeface="Arial"/>
               </a:defRPr>
             </a:lvl5pPr>
-            <a:lvl6pPr indent="0" lvl="5" marL="0" marR="0" algn="r">
+            <a:lvl6pPr marL="0" marR="0" lvl="5" indent="0" algn="r">
               <a:lnSpc>
                 <a:spcPct val="100000"/>
               </a:lnSpc>
@@ -4694,7 +4766,7 @@
               <a:buSzPts val="5100"/>
               <a:buFont typeface="Arial"/>
               <a:buNone/>
-              <a:defRPr b="0" i="0" sz="5100" u="none" cap="none" strike="noStrike">
+              <a:defRPr sz="5100" b="0" i="0" u="none" strike="noStrike" cap="none">
                 <a:solidFill>
                   <a:schemeClr val="dk2"/>
                 </a:solidFill>
@@ -4704,7 +4776,7 @@
                 <a:sym typeface="Arial"/>
               </a:defRPr>
             </a:lvl6pPr>
-            <a:lvl7pPr indent="0" lvl="6" marL="0" marR="0" algn="r">
+            <a:lvl7pPr marL="0" marR="0" lvl="6" indent="0" algn="r">
               <a:lnSpc>
                 <a:spcPct val="100000"/>
               </a:lnSpc>
@@ -4720,7 +4792,7 @@
               <a:buSzPts val="5100"/>
               <a:buFont typeface="Arial"/>
               <a:buNone/>
-              <a:defRPr b="0" i="0" sz="5100" u="none" cap="none" strike="noStrike">
+              <a:defRPr sz="5100" b="0" i="0" u="none" strike="noStrike" cap="none">
                 <a:solidFill>
                   <a:schemeClr val="dk2"/>
                 </a:solidFill>
@@ -4730,7 +4802,7 @@
                 <a:sym typeface="Arial"/>
               </a:defRPr>
             </a:lvl7pPr>
-            <a:lvl8pPr indent="0" lvl="7" marL="0" marR="0" algn="r">
+            <a:lvl8pPr marL="0" marR="0" lvl="7" indent="0" algn="r">
               <a:lnSpc>
                 <a:spcPct val="100000"/>
               </a:lnSpc>
@@ -4746,7 +4818,7 @@
               <a:buSzPts val="5100"/>
               <a:buFont typeface="Arial"/>
               <a:buNone/>
-              <a:defRPr b="0" i="0" sz="5100" u="none" cap="none" strike="noStrike">
+              <a:defRPr sz="5100" b="0" i="0" u="none" strike="noStrike" cap="none">
                 <a:solidFill>
                   <a:schemeClr val="dk2"/>
                 </a:solidFill>
@@ -4756,7 +4828,7 @@
                 <a:sym typeface="Arial"/>
               </a:defRPr>
             </a:lvl8pPr>
-            <a:lvl9pPr indent="0" lvl="8" marL="0" marR="0" algn="r">
+            <a:lvl9pPr marL="0" marR="0" lvl="8" indent="0" algn="r">
               <a:lnSpc>
                 <a:spcPct val="100000"/>
               </a:lnSpc>
@@ -4772,7 +4844,7 @@
               <a:buSzPts val="5100"/>
               <a:buFont typeface="Arial"/>
               <a:buNone/>
-              <a:defRPr b="0" i="0" sz="5100" u="none" cap="none" strike="noStrike">
+              <a:defRPr sz="5100" b="0" i="0" u="none" strike="noStrike" cap="none">
                 <a:solidFill>
                   <a:schemeClr val="dk2"/>
                 </a:solidFill>
@@ -4784,7 +4856,7 @@
             </a:lvl9pPr>
           </a:lstStyle>
           <a:p>
-            <a:pPr indent="0" lvl="0" marL="0" rtl="0" algn="r">
+            <a:pPr marL="0" lvl="0" indent="0" algn="r" rtl="0">
               <a:spcBef>
                 <a:spcPts val="0"/>
               </a:spcBef>
@@ -4810,11 +4882,11 @@
 </file>
 
 <file path=ppt/slideLayouts/slideLayout7.xml><?xml version="1.0" encoding="utf-8"?>
-<p:sldLayout xmlns:a="http://schemas.openxmlformats.org/drawingml/2006/main" xmlns:r="http://schemas.openxmlformats.org/officeDocument/2006/relationships" xmlns:mc="http://schemas.openxmlformats.org/markup-compatibility/2006" xmlns:mv="urn:schemas-microsoft-com:mac:vml" xmlns:p="http://schemas.openxmlformats.org/presentationml/2006/main" xmlns:c="http://schemas.openxmlformats.org/drawingml/2006/chart" xmlns:dgm="http://schemas.openxmlformats.org/drawingml/2006/diagram" xmlns:o="urn:schemas-microsoft-com:office:office" xmlns:v="urn:schemas-microsoft-com:vml" xmlns:pvml="urn:schemas-microsoft-com:office:powerpoint" xmlns:com="http://schemas.openxmlformats.org/drawingml/2006/compatibility" xmlns:p14="http://schemas.microsoft.com/office/powerpoint/2010/main" xmlns:p15="http://schemas.microsoft.com/office/powerpoint/2012/main" xmlns:ahyp="http://schemas.microsoft.com/office/drawing/2018/hyperlinkcolor" matchingName="One column text">
+<p:sldLayout xmlns:a="http://schemas.openxmlformats.org/drawingml/2006/main" xmlns:r="http://schemas.openxmlformats.org/officeDocument/2006/relationships" xmlns:p="http://schemas.openxmlformats.org/presentationml/2006/main" matchingName="One column text">
   <p:cSld name="ONE_COLUMN_TEXT">
     <p:spTree>
       <p:nvGrpSpPr>
-        <p:cNvPr id="31" name="Shape 31"/>
+        <p:cNvPr id="1" name="Shape 31"/>
         <p:cNvGrpSpPr/>
         <p:nvPr/>
       </p:nvGrpSpPr>
@@ -4829,7 +4901,9 @@
       <p:sp>
         <p:nvSpPr>
           <p:cNvPr id="32" name="Google Shape;32;g2b16e703bd7_0_23"/>
-          <p:cNvSpPr txBox="1"/>
+          <p:cNvSpPr txBox="1">
+            <a:spLocks noGrp="1"/>
+          </p:cNvSpPr>
           <p:nvPr>
             <p:ph type="title"/>
           </p:nvPr>
@@ -4848,7 +4922,7 @@
           </a:ln>
         </p:spPr>
         <p:txBody>
-          <a:bodyPr anchorCtr="0" anchor="b" bIns="462325" lIns="462325" spcFirstLastPara="1" rIns="462325" wrap="square" tIns="462325">
+          <a:bodyPr spcFirstLastPara="1" wrap="square" lIns="462325" tIns="462325" rIns="462325" bIns="462325" anchor="b" anchorCtr="0">
             <a:normAutofit/>
           </a:bodyPr>
           <a:lstStyle>
@@ -4979,15 +5053,19 @@
               <a:defRPr sz="12100"/>
             </a:lvl9pPr>
           </a:lstStyle>
-          <a:p/>
+          <a:p>
+            <a:endParaRPr/>
+          </a:p>
         </p:txBody>
       </p:sp>
       <p:sp>
         <p:nvSpPr>
           <p:cNvPr id="33" name="Google Shape;33;g2b16e703bd7_0_23"/>
-          <p:cNvSpPr txBox="1"/>
+          <p:cNvSpPr txBox="1">
+            <a:spLocks noGrp="1"/>
+          </p:cNvSpPr>
           <p:nvPr>
-            <p:ph idx="1" type="body"/>
+            <p:ph type="body" idx="1"/>
           </p:nvPr>
         </p:nvSpPr>
         <p:spPr>
@@ -5004,11 +5082,11 @@
           </a:ln>
         </p:spPr>
         <p:txBody>
-          <a:bodyPr anchorCtr="0" anchor="t" bIns="462325" lIns="462325" spcFirstLastPara="1" rIns="462325" wrap="square" tIns="462325">
+          <a:bodyPr spcFirstLastPara="1" wrap="square" lIns="462325" tIns="462325" rIns="462325" bIns="462325" anchor="t" anchorCtr="0">
             <a:normAutofit/>
           </a:bodyPr>
           <a:lstStyle>
-            <a:lvl1pPr indent="-615950" lvl="0" marL="457200" algn="l">
+            <a:lvl1pPr marL="457200" lvl="0" indent="-615950" algn="l">
               <a:lnSpc>
                 <a:spcPct val="115000"/>
               </a:lnSpc>
@@ -5022,7 +5100,7 @@
               <a:buChar char="●"/>
               <a:defRPr sz="6100"/>
             </a:lvl1pPr>
-            <a:lvl2pPr indent="-615950" lvl="1" marL="914400" algn="l">
+            <a:lvl2pPr marL="914400" lvl="1" indent="-615950" algn="l">
               <a:lnSpc>
                 <a:spcPct val="115000"/>
               </a:lnSpc>
@@ -5036,7 +5114,7 @@
               <a:buChar char="○"/>
               <a:defRPr sz="6100"/>
             </a:lvl2pPr>
-            <a:lvl3pPr indent="-615950" lvl="2" marL="1371600" algn="l">
+            <a:lvl3pPr marL="1371600" lvl="2" indent="-615950" algn="l">
               <a:lnSpc>
                 <a:spcPct val="115000"/>
               </a:lnSpc>
@@ -5050,7 +5128,7 @@
               <a:buChar char="■"/>
               <a:defRPr sz="6100"/>
             </a:lvl3pPr>
-            <a:lvl4pPr indent="-615950" lvl="3" marL="1828800" algn="l">
+            <a:lvl4pPr marL="1828800" lvl="3" indent="-615950" algn="l">
               <a:lnSpc>
                 <a:spcPct val="115000"/>
               </a:lnSpc>
@@ -5064,7 +5142,7 @@
               <a:buChar char="●"/>
               <a:defRPr sz="6100"/>
             </a:lvl4pPr>
-            <a:lvl5pPr indent="-615950" lvl="4" marL="2286000" algn="l">
+            <a:lvl5pPr marL="2286000" lvl="4" indent="-615950" algn="l">
               <a:lnSpc>
                 <a:spcPct val="115000"/>
               </a:lnSpc>
@@ -5078,7 +5156,7 @@
               <a:buChar char="○"/>
               <a:defRPr sz="6100"/>
             </a:lvl5pPr>
-            <a:lvl6pPr indent="-615950" lvl="5" marL="2743200" algn="l">
+            <a:lvl6pPr marL="2743200" lvl="5" indent="-615950" algn="l">
               <a:lnSpc>
                 <a:spcPct val="115000"/>
               </a:lnSpc>
@@ -5092,7 +5170,7 @@
               <a:buChar char="■"/>
               <a:defRPr sz="6100"/>
             </a:lvl6pPr>
-            <a:lvl7pPr indent="-615950" lvl="6" marL="3200400" algn="l">
+            <a:lvl7pPr marL="3200400" lvl="6" indent="-615950" algn="l">
               <a:lnSpc>
                 <a:spcPct val="115000"/>
               </a:lnSpc>
@@ -5106,7 +5184,7 @@
               <a:buChar char="●"/>
               <a:defRPr sz="6100"/>
             </a:lvl7pPr>
-            <a:lvl8pPr indent="-615950" lvl="7" marL="3657600" algn="l">
+            <a:lvl8pPr marL="3657600" lvl="7" indent="-615950" algn="l">
               <a:lnSpc>
                 <a:spcPct val="115000"/>
               </a:lnSpc>
@@ -5120,7 +5198,7 @@
               <a:buChar char="○"/>
               <a:defRPr sz="6100"/>
             </a:lvl8pPr>
-            <a:lvl9pPr indent="-615950" lvl="8" marL="4114800" algn="l">
+            <a:lvl9pPr marL="4114800" lvl="8" indent="-615950" algn="l">
               <a:lnSpc>
                 <a:spcPct val="115000"/>
               </a:lnSpc>
@@ -5135,15 +5213,19 @@
               <a:defRPr sz="6100"/>
             </a:lvl9pPr>
           </a:lstStyle>
-          <a:p/>
+          <a:p>
+            <a:endParaRPr/>
+          </a:p>
         </p:txBody>
       </p:sp>
       <p:sp>
         <p:nvSpPr>
           <p:cNvPr id="34" name="Google Shape;34;g2b16e703bd7_0_23"/>
-          <p:cNvSpPr txBox="1"/>
+          <p:cNvSpPr txBox="1">
+            <a:spLocks noGrp="1"/>
+          </p:cNvSpPr>
           <p:nvPr>
-            <p:ph idx="12" type="sldNum"/>
+            <p:ph type="sldNum" idx="12"/>
           </p:nvPr>
         </p:nvSpPr>
         <p:spPr>
@@ -5160,11 +5242,11 @@
           </a:ln>
         </p:spPr>
         <p:txBody>
-          <a:bodyPr anchorCtr="0" anchor="ctr" bIns="462325" lIns="462325" spcFirstLastPara="1" rIns="462325" wrap="square" tIns="462325">
+          <a:bodyPr spcFirstLastPara="1" wrap="square" lIns="462325" tIns="462325" rIns="462325" bIns="462325" anchor="ctr" anchorCtr="0">
             <a:normAutofit/>
           </a:bodyPr>
           <a:lstStyle>
-            <a:lvl1pPr indent="0" lvl="0" marL="0" marR="0" algn="r">
+            <a:lvl1pPr marL="0" marR="0" lvl="0" indent="0" algn="r">
               <a:lnSpc>
                 <a:spcPct val="100000"/>
               </a:lnSpc>
@@ -5180,7 +5262,7 @@
               <a:buSzPts val="5100"/>
               <a:buFont typeface="Arial"/>
               <a:buNone/>
-              <a:defRPr b="0" i="0" sz="5100" u="none" cap="none" strike="noStrike">
+              <a:defRPr sz="5100" b="0" i="0" u="none" strike="noStrike" cap="none">
                 <a:solidFill>
                   <a:schemeClr val="dk2"/>
                 </a:solidFill>
@@ -5190,7 +5272,7 @@
                 <a:sym typeface="Arial"/>
               </a:defRPr>
             </a:lvl1pPr>
-            <a:lvl2pPr indent="0" lvl="1" marL="0" marR="0" algn="r">
+            <a:lvl2pPr marL="0" marR="0" lvl="1" indent="0" algn="r">
               <a:lnSpc>
                 <a:spcPct val="100000"/>
               </a:lnSpc>
@@ -5206,7 +5288,7 @@
               <a:buSzPts val="5100"/>
               <a:buFont typeface="Arial"/>
               <a:buNone/>
-              <a:defRPr b="0" i="0" sz="5100" u="none" cap="none" strike="noStrike">
+              <a:defRPr sz="5100" b="0" i="0" u="none" strike="noStrike" cap="none">
                 <a:solidFill>
                   <a:schemeClr val="dk2"/>
                 </a:solidFill>
@@ -5216,7 +5298,7 @@
                 <a:sym typeface="Arial"/>
               </a:defRPr>
             </a:lvl2pPr>
-            <a:lvl3pPr indent="0" lvl="2" marL="0" marR="0" algn="r">
+            <a:lvl3pPr marL="0" marR="0" lvl="2" indent="0" algn="r">
               <a:lnSpc>
                 <a:spcPct val="100000"/>
               </a:lnSpc>
@@ -5232,7 +5314,7 @@
               <a:buSzPts val="5100"/>
               <a:buFont typeface="Arial"/>
               <a:buNone/>
-              <a:defRPr b="0" i="0" sz="5100" u="none" cap="none" strike="noStrike">
+              <a:defRPr sz="5100" b="0" i="0" u="none" strike="noStrike" cap="none">
                 <a:solidFill>
                   <a:schemeClr val="dk2"/>
                 </a:solidFill>
@@ -5242,7 +5324,7 @@
                 <a:sym typeface="Arial"/>
               </a:defRPr>
             </a:lvl3pPr>
-            <a:lvl4pPr indent="0" lvl="3" marL="0" marR="0" algn="r">
+            <a:lvl4pPr marL="0" marR="0" lvl="3" indent="0" algn="r">
               <a:lnSpc>
                 <a:spcPct val="100000"/>
               </a:lnSpc>
@@ -5258,7 +5340,7 @@
               <a:buSzPts val="5100"/>
               <a:buFont typeface="Arial"/>
               <a:buNone/>
-              <a:defRPr b="0" i="0" sz="5100" u="none" cap="none" strike="noStrike">
+              <a:defRPr sz="5100" b="0" i="0" u="none" strike="noStrike" cap="none">
                 <a:solidFill>
                   <a:schemeClr val="dk2"/>
                 </a:solidFill>
@@ -5268,7 +5350,7 @@
                 <a:sym typeface="Arial"/>
               </a:defRPr>
             </a:lvl4pPr>
-            <a:lvl5pPr indent="0" lvl="4" marL="0" marR="0" algn="r">
+            <a:lvl5pPr marL="0" marR="0" lvl="4" indent="0" algn="r">
               <a:lnSpc>
                 <a:spcPct val="100000"/>
               </a:lnSpc>
@@ -5284,7 +5366,7 @@
               <a:buSzPts val="5100"/>
               <a:buFont typeface="Arial"/>
               <a:buNone/>
-              <a:defRPr b="0" i="0" sz="5100" u="none" cap="none" strike="noStrike">
+              <a:defRPr sz="5100" b="0" i="0" u="none" strike="noStrike" cap="none">
                 <a:solidFill>
                   <a:schemeClr val="dk2"/>
                 </a:solidFill>
@@ -5294,7 +5376,7 @@
                 <a:sym typeface="Arial"/>
               </a:defRPr>
             </a:lvl5pPr>
-            <a:lvl6pPr indent="0" lvl="5" marL="0" marR="0" algn="r">
+            <a:lvl6pPr marL="0" marR="0" lvl="5" indent="0" algn="r">
               <a:lnSpc>
                 <a:spcPct val="100000"/>
               </a:lnSpc>
@@ -5310,7 +5392,7 @@
               <a:buSzPts val="5100"/>
               <a:buFont typeface="Arial"/>
               <a:buNone/>
-              <a:defRPr b="0" i="0" sz="5100" u="none" cap="none" strike="noStrike">
+              <a:defRPr sz="5100" b="0" i="0" u="none" strike="noStrike" cap="none">
                 <a:solidFill>
                   <a:schemeClr val="dk2"/>
                 </a:solidFill>
@@ -5320,7 +5402,7 @@
                 <a:sym typeface="Arial"/>
               </a:defRPr>
             </a:lvl6pPr>
-            <a:lvl7pPr indent="0" lvl="6" marL="0" marR="0" algn="r">
+            <a:lvl7pPr marL="0" marR="0" lvl="6" indent="0" algn="r">
               <a:lnSpc>
                 <a:spcPct val="100000"/>
               </a:lnSpc>
@@ -5336,7 +5418,7 @@
               <a:buSzPts val="5100"/>
               <a:buFont typeface="Arial"/>
               <a:buNone/>
-              <a:defRPr b="0" i="0" sz="5100" u="none" cap="none" strike="noStrike">
+              <a:defRPr sz="5100" b="0" i="0" u="none" strike="noStrike" cap="none">
                 <a:solidFill>
                   <a:schemeClr val="dk2"/>
                 </a:solidFill>
@@ -5346,7 +5428,7 @@
                 <a:sym typeface="Arial"/>
               </a:defRPr>
             </a:lvl7pPr>
-            <a:lvl8pPr indent="0" lvl="7" marL="0" marR="0" algn="r">
+            <a:lvl8pPr marL="0" marR="0" lvl="7" indent="0" algn="r">
               <a:lnSpc>
                 <a:spcPct val="100000"/>
               </a:lnSpc>
@@ -5362,7 +5444,7 @@
               <a:buSzPts val="5100"/>
               <a:buFont typeface="Arial"/>
               <a:buNone/>
-              <a:defRPr b="0" i="0" sz="5100" u="none" cap="none" strike="noStrike">
+              <a:defRPr sz="5100" b="0" i="0" u="none" strike="noStrike" cap="none">
                 <a:solidFill>
                   <a:schemeClr val="dk2"/>
                 </a:solidFill>
@@ -5372,7 +5454,7 @@
                 <a:sym typeface="Arial"/>
               </a:defRPr>
             </a:lvl8pPr>
-            <a:lvl9pPr indent="0" lvl="8" marL="0" marR="0" algn="r">
+            <a:lvl9pPr marL="0" marR="0" lvl="8" indent="0" algn="r">
               <a:lnSpc>
                 <a:spcPct val="100000"/>
               </a:lnSpc>
@@ -5388,7 +5470,7 @@
               <a:buSzPts val="5100"/>
               <a:buFont typeface="Arial"/>
               <a:buNone/>
-              <a:defRPr b="0" i="0" sz="5100" u="none" cap="none" strike="noStrike">
+              <a:defRPr sz="5100" b="0" i="0" u="none" strike="noStrike" cap="none">
                 <a:solidFill>
                   <a:schemeClr val="dk2"/>
                 </a:solidFill>
@@ -5400,7 +5482,7 @@
             </a:lvl9pPr>
           </a:lstStyle>
           <a:p>
-            <a:pPr indent="0" lvl="0" marL="0" rtl="0" algn="r">
+            <a:pPr marL="0" lvl="0" indent="0" algn="r" rtl="0">
               <a:spcBef>
                 <a:spcPts val="0"/>
               </a:spcBef>
@@ -5426,11 +5508,11 @@
 </file>
 
 <file path=ppt/slideLayouts/slideLayout8.xml><?xml version="1.0" encoding="utf-8"?>
-<p:sldLayout xmlns:a="http://schemas.openxmlformats.org/drawingml/2006/main" xmlns:r="http://schemas.openxmlformats.org/officeDocument/2006/relationships" xmlns:mc="http://schemas.openxmlformats.org/markup-compatibility/2006" xmlns:mv="urn:schemas-microsoft-com:mac:vml" xmlns:p="http://schemas.openxmlformats.org/presentationml/2006/main" xmlns:c="http://schemas.openxmlformats.org/drawingml/2006/chart" xmlns:dgm="http://schemas.openxmlformats.org/drawingml/2006/diagram" xmlns:o="urn:schemas-microsoft-com:office:office" xmlns:v="urn:schemas-microsoft-com:vml" xmlns:pvml="urn:schemas-microsoft-com:office:powerpoint" xmlns:com="http://schemas.openxmlformats.org/drawingml/2006/compatibility" xmlns:p14="http://schemas.microsoft.com/office/powerpoint/2010/main" xmlns:p15="http://schemas.microsoft.com/office/powerpoint/2012/main" xmlns:ahyp="http://schemas.microsoft.com/office/drawing/2018/hyperlinkcolor" matchingName="Main point">
+<p:sldLayout xmlns:a="http://schemas.openxmlformats.org/drawingml/2006/main" xmlns:r="http://schemas.openxmlformats.org/officeDocument/2006/relationships" xmlns:p="http://schemas.openxmlformats.org/presentationml/2006/main" matchingName="Main point">
   <p:cSld name="MAIN_POINT">
     <p:spTree>
       <p:nvGrpSpPr>
-        <p:cNvPr id="35" name="Shape 35"/>
+        <p:cNvPr id="1" name="Shape 35"/>
         <p:cNvGrpSpPr/>
         <p:nvPr/>
       </p:nvGrpSpPr>
@@ -5445,7 +5527,9 @@
       <p:sp>
         <p:nvSpPr>
           <p:cNvPr id="36" name="Google Shape;36;g2b16e703bd7_0_27"/>
-          <p:cNvSpPr txBox="1"/>
+          <p:cNvSpPr txBox="1">
+            <a:spLocks noGrp="1"/>
+          </p:cNvSpPr>
           <p:nvPr>
             <p:ph type="title"/>
           </p:nvPr>
@@ -5464,7 +5548,7 @@
           </a:ln>
         </p:spPr>
         <p:txBody>
-          <a:bodyPr anchorCtr="0" anchor="ctr" bIns="462325" lIns="462325" spcFirstLastPara="1" rIns="462325" wrap="square" tIns="462325">
+          <a:bodyPr spcFirstLastPara="1" wrap="square" lIns="462325" tIns="462325" rIns="462325" bIns="462325" anchor="ctr" anchorCtr="0">
             <a:normAutofit/>
           </a:bodyPr>
           <a:lstStyle>
@@ -5595,15 +5679,19 @@
               <a:defRPr sz="24300"/>
             </a:lvl9pPr>
           </a:lstStyle>
-          <a:p/>
+          <a:p>
+            <a:endParaRPr/>
+          </a:p>
         </p:txBody>
       </p:sp>
       <p:sp>
         <p:nvSpPr>
           <p:cNvPr id="37" name="Google Shape;37;g2b16e703bd7_0_27"/>
-          <p:cNvSpPr txBox="1"/>
+          <p:cNvSpPr txBox="1">
+            <a:spLocks noGrp="1"/>
+          </p:cNvSpPr>
           <p:nvPr>
-            <p:ph idx="12" type="sldNum"/>
+            <p:ph type="sldNum" idx="12"/>
           </p:nvPr>
         </p:nvSpPr>
         <p:spPr>
@@ -5620,11 +5708,11 @@
           </a:ln>
         </p:spPr>
         <p:txBody>
-          <a:bodyPr anchorCtr="0" anchor="ctr" bIns="462325" lIns="462325" spcFirstLastPara="1" rIns="462325" wrap="square" tIns="462325">
+          <a:bodyPr spcFirstLastPara="1" wrap="square" lIns="462325" tIns="462325" rIns="462325" bIns="462325" anchor="ctr" anchorCtr="0">
             <a:normAutofit/>
           </a:bodyPr>
           <a:lstStyle>
-            <a:lvl1pPr indent="0" lvl="0" marL="0" marR="0" algn="r">
+            <a:lvl1pPr marL="0" marR="0" lvl="0" indent="0" algn="r">
               <a:lnSpc>
                 <a:spcPct val="100000"/>
               </a:lnSpc>
@@ -5640,7 +5728,7 @@
               <a:buSzPts val="5100"/>
               <a:buFont typeface="Arial"/>
               <a:buNone/>
-              <a:defRPr b="0" i="0" sz="5100" u="none" cap="none" strike="noStrike">
+              <a:defRPr sz="5100" b="0" i="0" u="none" strike="noStrike" cap="none">
                 <a:solidFill>
                   <a:schemeClr val="dk2"/>
                 </a:solidFill>
@@ -5650,7 +5738,7 @@
                 <a:sym typeface="Arial"/>
               </a:defRPr>
             </a:lvl1pPr>
-            <a:lvl2pPr indent="0" lvl="1" marL="0" marR="0" algn="r">
+            <a:lvl2pPr marL="0" marR="0" lvl="1" indent="0" algn="r">
               <a:lnSpc>
                 <a:spcPct val="100000"/>
               </a:lnSpc>
@@ -5666,7 +5754,7 @@
               <a:buSzPts val="5100"/>
               <a:buFont typeface="Arial"/>
               <a:buNone/>
-              <a:defRPr b="0" i="0" sz="5100" u="none" cap="none" strike="noStrike">
+              <a:defRPr sz="5100" b="0" i="0" u="none" strike="noStrike" cap="none">
                 <a:solidFill>
                   <a:schemeClr val="dk2"/>
                 </a:solidFill>
@@ -5676,7 +5764,7 @@
                 <a:sym typeface="Arial"/>
               </a:defRPr>
             </a:lvl2pPr>
-            <a:lvl3pPr indent="0" lvl="2" marL="0" marR="0" algn="r">
+            <a:lvl3pPr marL="0" marR="0" lvl="2" indent="0" algn="r">
               <a:lnSpc>
                 <a:spcPct val="100000"/>
               </a:lnSpc>
@@ -5692,7 +5780,7 @@
               <a:buSzPts val="5100"/>
               <a:buFont typeface="Arial"/>
               <a:buNone/>
-              <a:defRPr b="0" i="0" sz="5100" u="none" cap="none" strike="noStrike">
+              <a:defRPr sz="5100" b="0" i="0" u="none" strike="noStrike" cap="none">
                 <a:solidFill>
                   <a:schemeClr val="dk2"/>
                 </a:solidFill>
@@ -5702,7 +5790,7 @@
                 <a:sym typeface="Arial"/>
               </a:defRPr>
             </a:lvl3pPr>
-            <a:lvl4pPr indent="0" lvl="3" marL="0" marR="0" algn="r">
+            <a:lvl4pPr marL="0" marR="0" lvl="3" indent="0" algn="r">
               <a:lnSpc>
                 <a:spcPct val="100000"/>
               </a:lnSpc>
@@ -5718,7 +5806,7 @@
               <a:buSzPts val="5100"/>
               <a:buFont typeface="Arial"/>
               <a:buNone/>
-              <a:defRPr b="0" i="0" sz="5100" u="none" cap="none" strike="noStrike">
+              <a:defRPr sz="5100" b="0" i="0" u="none" strike="noStrike" cap="none">
                 <a:solidFill>
                   <a:schemeClr val="dk2"/>
                 </a:solidFill>
@@ -5728,7 +5816,7 @@
                 <a:sym typeface="Arial"/>
               </a:defRPr>
             </a:lvl4pPr>
-            <a:lvl5pPr indent="0" lvl="4" marL="0" marR="0" algn="r">
+            <a:lvl5pPr marL="0" marR="0" lvl="4" indent="0" algn="r">
               <a:lnSpc>
                 <a:spcPct val="100000"/>
               </a:lnSpc>
@@ -5744,7 +5832,7 @@
               <a:buSzPts val="5100"/>
               <a:buFont typeface="Arial"/>
               <a:buNone/>
-              <a:defRPr b="0" i="0" sz="5100" u="none" cap="none" strike="noStrike">
+              <a:defRPr sz="5100" b="0" i="0" u="none" strike="noStrike" cap="none">
                 <a:solidFill>
                   <a:schemeClr val="dk2"/>
                 </a:solidFill>
@@ -5754,7 +5842,7 @@
                 <a:sym typeface="Arial"/>
               </a:defRPr>
             </a:lvl5pPr>
-            <a:lvl6pPr indent="0" lvl="5" marL="0" marR="0" algn="r">
+            <a:lvl6pPr marL="0" marR="0" lvl="5" indent="0" algn="r">
               <a:lnSpc>
                 <a:spcPct val="100000"/>
               </a:lnSpc>
@@ -5770,7 +5858,7 @@
               <a:buSzPts val="5100"/>
               <a:buFont typeface="Arial"/>
               <a:buNone/>
-              <a:defRPr b="0" i="0" sz="5100" u="none" cap="none" strike="noStrike">
+              <a:defRPr sz="5100" b="0" i="0" u="none" strike="noStrike" cap="none">
                 <a:solidFill>
                   <a:schemeClr val="dk2"/>
                 </a:solidFill>
@@ -5780,7 +5868,7 @@
                 <a:sym typeface="Arial"/>
               </a:defRPr>
             </a:lvl6pPr>
-            <a:lvl7pPr indent="0" lvl="6" marL="0" marR="0" algn="r">
+            <a:lvl7pPr marL="0" marR="0" lvl="6" indent="0" algn="r">
               <a:lnSpc>
                 <a:spcPct val="100000"/>
               </a:lnSpc>
@@ -5796,7 +5884,7 @@
               <a:buSzPts val="5100"/>
               <a:buFont typeface="Arial"/>
               <a:buNone/>
-              <a:defRPr b="0" i="0" sz="5100" u="none" cap="none" strike="noStrike">
+              <a:defRPr sz="5100" b="0" i="0" u="none" strike="noStrike" cap="none">
                 <a:solidFill>
                   <a:schemeClr val="dk2"/>
                 </a:solidFill>
@@ -5806,7 +5894,7 @@
                 <a:sym typeface="Arial"/>
               </a:defRPr>
             </a:lvl7pPr>
-            <a:lvl8pPr indent="0" lvl="7" marL="0" marR="0" algn="r">
+            <a:lvl8pPr marL="0" marR="0" lvl="7" indent="0" algn="r">
               <a:lnSpc>
                 <a:spcPct val="100000"/>
               </a:lnSpc>
@@ -5822,7 +5910,7 @@
               <a:buSzPts val="5100"/>
               <a:buFont typeface="Arial"/>
               <a:buNone/>
-              <a:defRPr b="0" i="0" sz="5100" u="none" cap="none" strike="noStrike">
+              <a:defRPr sz="5100" b="0" i="0" u="none" strike="noStrike" cap="none">
                 <a:solidFill>
                   <a:schemeClr val="dk2"/>
                 </a:solidFill>
@@ -5832,7 +5920,7 @@
                 <a:sym typeface="Arial"/>
               </a:defRPr>
             </a:lvl8pPr>
-            <a:lvl9pPr indent="0" lvl="8" marL="0" marR="0" algn="r">
+            <a:lvl9pPr marL="0" marR="0" lvl="8" indent="0" algn="r">
               <a:lnSpc>
                 <a:spcPct val="100000"/>
               </a:lnSpc>
@@ -5848,7 +5936,7 @@
               <a:buSzPts val="5100"/>
               <a:buFont typeface="Arial"/>
               <a:buNone/>
-              <a:defRPr b="0" i="0" sz="5100" u="none" cap="none" strike="noStrike">
+              <a:defRPr sz="5100" b="0" i="0" u="none" strike="noStrike" cap="none">
                 <a:solidFill>
                   <a:schemeClr val="dk2"/>
                 </a:solidFill>
@@ -5860,7 +5948,7 @@
             </a:lvl9pPr>
           </a:lstStyle>
           <a:p>
-            <a:pPr indent="0" lvl="0" marL="0" rtl="0" algn="r">
+            <a:pPr marL="0" lvl="0" indent="0" algn="r" rtl="0">
               <a:spcBef>
                 <a:spcPts val="0"/>
               </a:spcBef>
@@ -5886,11 +5974,11 @@
 </file>
 
 <file path=ppt/slideLayouts/slideLayout9.xml><?xml version="1.0" encoding="utf-8"?>
-<p:sldLayout xmlns:a="http://schemas.openxmlformats.org/drawingml/2006/main" xmlns:r="http://schemas.openxmlformats.org/officeDocument/2006/relationships" xmlns:mc="http://schemas.openxmlformats.org/markup-compatibility/2006" xmlns:mv="urn:schemas-microsoft-com:mac:vml" xmlns:p="http://schemas.openxmlformats.org/presentationml/2006/main" xmlns:c="http://schemas.openxmlformats.org/drawingml/2006/chart" xmlns:dgm="http://schemas.openxmlformats.org/drawingml/2006/diagram" xmlns:o="urn:schemas-microsoft-com:office:office" xmlns:v="urn:schemas-microsoft-com:vml" xmlns:pvml="urn:schemas-microsoft-com:office:powerpoint" xmlns:com="http://schemas.openxmlformats.org/drawingml/2006/compatibility" xmlns:p14="http://schemas.microsoft.com/office/powerpoint/2010/main" xmlns:p15="http://schemas.microsoft.com/office/powerpoint/2012/main" xmlns:ahyp="http://schemas.microsoft.com/office/drawing/2018/hyperlinkcolor" matchingName="Section title and description">
+<p:sldLayout xmlns:a="http://schemas.openxmlformats.org/drawingml/2006/main" xmlns:r="http://schemas.openxmlformats.org/officeDocument/2006/relationships" xmlns:p="http://schemas.openxmlformats.org/presentationml/2006/main" matchingName="Section title and description">
   <p:cSld name="SECTION_TITLE_AND_DESCRIPTION">
     <p:spTree>
       <p:nvGrpSpPr>
-        <p:cNvPr id="38" name="Shape 38"/>
+        <p:cNvPr id="1" name="Shape 38"/>
         <p:cNvGrpSpPr/>
         <p:nvPr/>
       </p:nvGrpSpPr>
@@ -5924,12 +6012,12 @@
           </a:ln>
         </p:spPr>
         <p:txBody>
-          <a:bodyPr anchorCtr="0" anchor="ctr" bIns="462325" lIns="462325" spcFirstLastPara="1" rIns="462325" wrap="square" tIns="462325">
+          <a:bodyPr spcFirstLastPara="1" wrap="square" lIns="462325" tIns="462325" rIns="462325" bIns="462325" anchor="ctr" anchorCtr="0">
             <a:noAutofit/>
           </a:bodyPr>
           <a:lstStyle/>
           <a:p>
-            <a:pPr indent="0" lvl="0" marL="0" marR="0" rtl="0" algn="l">
+            <a:pPr marL="0" marR="0" lvl="0" indent="0" algn="l" rtl="0">
               <a:lnSpc>
                 <a:spcPct val="100000"/>
               </a:lnSpc>
@@ -5946,10 +6034,7 @@
               <a:buFont typeface="Arial"/>
               <a:buNone/>
             </a:pPr>
-            <a:r>
-              <a:t/>
-            </a:r>
-            <a:endParaRPr b="0" i="0" sz="1400" u="none" cap="none" strike="noStrike">
+            <a:endParaRPr sz="1400" b="0" i="0" u="none" strike="noStrike" cap="none">
               <a:solidFill>
                 <a:srgbClr val="000000"/>
               </a:solidFill>
@@ -5964,7 +6049,9 @@
       <p:sp>
         <p:nvSpPr>
           <p:cNvPr id="40" name="Google Shape;40;g2b16e703bd7_0_30"/>
-          <p:cNvSpPr txBox="1"/>
+          <p:cNvSpPr txBox="1">
+            <a:spLocks noGrp="1"/>
+          </p:cNvSpPr>
           <p:nvPr>
             <p:ph type="title"/>
           </p:nvPr>
@@ -5983,7 +6070,7 @@
           </a:ln>
         </p:spPr>
         <p:txBody>
-          <a:bodyPr anchorCtr="0" anchor="b" bIns="462325" lIns="462325" spcFirstLastPara="1" rIns="462325" wrap="square" tIns="462325">
+          <a:bodyPr spcFirstLastPara="1" wrap="square" lIns="462325" tIns="462325" rIns="462325" bIns="462325" anchor="b" anchorCtr="0">
             <a:normAutofit/>
           </a:bodyPr>
           <a:lstStyle>
@@ -6114,15 +6201,19 @@
               <a:defRPr sz="21200"/>
             </a:lvl9pPr>
           </a:lstStyle>
-          <a:p/>
+          <a:p>
+            <a:endParaRPr/>
+          </a:p>
         </p:txBody>
       </p:sp>
       <p:sp>
         <p:nvSpPr>
           <p:cNvPr id="41" name="Google Shape;41;g2b16e703bd7_0_30"/>
-          <p:cNvSpPr txBox="1"/>
+          <p:cNvSpPr txBox="1">
+            <a:spLocks noGrp="1"/>
+          </p:cNvSpPr>
           <p:nvPr>
-            <p:ph idx="1" type="subTitle"/>
+            <p:ph type="subTitle" idx="1"/>
           </p:nvPr>
         </p:nvSpPr>
         <p:spPr>
@@ -6139,7 +6230,7 @@
           </a:ln>
         </p:spPr>
         <p:txBody>
-          <a:bodyPr anchorCtr="0" anchor="t" bIns="462325" lIns="462325" spcFirstLastPara="1" rIns="462325" wrap="square" tIns="462325">
+          <a:bodyPr spcFirstLastPara="1" wrap="square" lIns="462325" tIns="462325" rIns="462325" bIns="462325" anchor="t" anchorCtr="0">
             <a:normAutofit/>
           </a:bodyPr>
           <a:lstStyle>
@@ -6270,15 +6361,19 @@
               <a:defRPr sz="10600"/>
             </a:lvl9pPr>
           </a:lstStyle>
-          <a:p/>
+          <a:p>
+            <a:endParaRPr/>
+          </a:p>
         </p:txBody>
       </p:sp>
       <p:sp>
         <p:nvSpPr>
           <p:cNvPr id="42" name="Google Shape;42;g2b16e703bd7_0_30"/>
-          <p:cNvSpPr txBox="1"/>
+          <p:cNvSpPr txBox="1">
+            <a:spLocks noGrp="1"/>
+          </p:cNvSpPr>
           <p:nvPr>
-            <p:ph idx="2" type="body"/>
+            <p:ph type="body" idx="2"/>
           </p:nvPr>
         </p:nvSpPr>
         <p:spPr>
@@ -6295,11 +6390,11 @@
           </a:ln>
         </p:spPr>
         <p:txBody>
-          <a:bodyPr anchorCtr="0" anchor="ctr" bIns="462325" lIns="462325" spcFirstLastPara="1" rIns="462325" wrap="square" tIns="462325">
+          <a:bodyPr spcFirstLastPara="1" wrap="square" lIns="462325" tIns="462325" rIns="462325" bIns="462325" anchor="ctr" anchorCtr="0">
             <a:normAutofit/>
           </a:bodyPr>
           <a:lstStyle>
-            <a:lvl1pPr indent="-806450" lvl="0" marL="457200" algn="l">
+            <a:lvl1pPr marL="457200" lvl="0" indent="-806450" algn="l">
               <a:lnSpc>
                 <a:spcPct val="115000"/>
               </a:lnSpc>
@@ -6313,7 +6408,7 @@
               <a:buChar char="●"/>
               <a:defRPr/>
             </a:lvl1pPr>
-            <a:lvl2pPr indent="-679450" lvl="1" marL="914400" algn="l">
+            <a:lvl2pPr marL="914400" lvl="1" indent="-679450" algn="l">
               <a:lnSpc>
                 <a:spcPct val="115000"/>
               </a:lnSpc>
@@ -6327,7 +6422,7 @@
               <a:buChar char="○"/>
               <a:defRPr/>
             </a:lvl2pPr>
-            <a:lvl3pPr indent="-679450" lvl="2" marL="1371600" algn="l">
+            <a:lvl3pPr marL="1371600" lvl="2" indent="-679450" algn="l">
               <a:lnSpc>
                 <a:spcPct val="115000"/>
               </a:lnSpc>
@@ -6341,7 +6436,7 @@
               <a:buChar char="■"/>
               <a:defRPr/>
             </a:lvl3pPr>
-            <a:lvl4pPr indent="-679450" lvl="3" marL="1828800" algn="l">
+            <a:lvl4pPr marL="1828800" lvl="3" indent="-679450" algn="l">
               <a:lnSpc>
                 <a:spcPct val="115000"/>
               </a:lnSpc>
@@ -6355,7 +6450,7 @@
               <a:buChar char="●"/>
               <a:defRPr/>
             </a:lvl4pPr>
-            <a:lvl5pPr indent="-679450" lvl="4" marL="2286000" algn="l">
+            <a:lvl5pPr marL="2286000" lvl="4" indent="-679450" algn="l">
               <a:lnSpc>
                 <a:spcPct val="115000"/>
               </a:lnSpc>
@@ -6369,7 +6464,7 @@
               <a:buChar char="○"/>
               <a:defRPr/>
             </a:lvl5pPr>
-            <a:lvl6pPr indent="-679450" lvl="5" marL="2743200" algn="l">
+            <a:lvl6pPr marL="2743200" lvl="5" indent="-679450" algn="l">
               <a:lnSpc>
                 <a:spcPct val="115000"/>
               </a:lnSpc>
@@ -6383,7 +6478,7 @@
               <a:buChar char="■"/>
               <a:defRPr/>
             </a:lvl6pPr>
-            <a:lvl7pPr indent="-679450" lvl="6" marL="3200400" algn="l">
+            <a:lvl7pPr marL="3200400" lvl="6" indent="-679450" algn="l">
               <a:lnSpc>
                 <a:spcPct val="115000"/>
               </a:lnSpc>
@@ -6397,7 +6492,7 @@
               <a:buChar char="●"/>
               <a:defRPr/>
             </a:lvl7pPr>
-            <a:lvl8pPr indent="-679450" lvl="7" marL="3657600" algn="l">
+            <a:lvl8pPr marL="3657600" lvl="7" indent="-679450" algn="l">
               <a:lnSpc>
                 <a:spcPct val="115000"/>
               </a:lnSpc>
@@ -6411,7 +6506,7 @@
               <a:buChar char="○"/>
               <a:defRPr/>
             </a:lvl8pPr>
-            <a:lvl9pPr indent="-679450" lvl="8" marL="4114800" algn="l">
+            <a:lvl9pPr marL="4114800" lvl="8" indent="-679450" algn="l">
               <a:lnSpc>
                 <a:spcPct val="115000"/>
               </a:lnSpc>
@@ -6426,15 +6521,19 @@
               <a:defRPr/>
             </a:lvl9pPr>
           </a:lstStyle>
-          <a:p/>
+          <a:p>
+            <a:endParaRPr/>
+          </a:p>
         </p:txBody>
       </p:sp>
       <p:sp>
         <p:nvSpPr>
           <p:cNvPr id="43" name="Google Shape;43;g2b16e703bd7_0_30"/>
-          <p:cNvSpPr txBox="1"/>
+          <p:cNvSpPr txBox="1">
+            <a:spLocks noGrp="1"/>
+          </p:cNvSpPr>
           <p:nvPr>
-            <p:ph idx="12" type="sldNum"/>
+            <p:ph type="sldNum" idx="12"/>
           </p:nvPr>
         </p:nvSpPr>
         <p:spPr>
@@ -6451,11 +6550,11 @@
           </a:ln>
         </p:spPr>
         <p:txBody>
-          <a:bodyPr anchorCtr="0" anchor="ctr" bIns="462325" lIns="462325" spcFirstLastPara="1" rIns="462325" wrap="square" tIns="462325">
+          <a:bodyPr spcFirstLastPara="1" wrap="square" lIns="462325" tIns="462325" rIns="462325" bIns="462325" anchor="ctr" anchorCtr="0">
             <a:normAutofit/>
           </a:bodyPr>
           <a:lstStyle>
-            <a:lvl1pPr indent="0" lvl="0" marL="0" marR="0" algn="r">
+            <a:lvl1pPr marL="0" marR="0" lvl="0" indent="0" algn="r">
               <a:lnSpc>
                 <a:spcPct val="100000"/>
               </a:lnSpc>
@@ -6471,7 +6570,7 @@
               <a:buSzPts val="5100"/>
               <a:buFont typeface="Arial"/>
               <a:buNone/>
-              <a:defRPr b="0" i="0" sz="5100" u="none" cap="none" strike="noStrike">
+              <a:defRPr sz="5100" b="0" i="0" u="none" strike="noStrike" cap="none">
                 <a:solidFill>
                   <a:schemeClr val="dk2"/>
                 </a:solidFill>
@@ -6481,7 +6580,7 @@
                 <a:sym typeface="Arial"/>
               </a:defRPr>
             </a:lvl1pPr>
-            <a:lvl2pPr indent="0" lvl="1" marL="0" marR="0" algn="r">
+            <a:lvl2pPr marL="0" marR="0" lvl="1" indent="0" algn="r">
               <a:lnSpc>
                 <a:spcPct val="100000"/>
               </a:lnSpc>
@@ -6497,7 +6596,7 @@
               <a:buSzPts val="5100"/>
               <a:buFont typeface="Arial"/>
               <a:buNone/>
-              <a:defRPr b="0" i="0" sz="5100" u="none" cap="none" strike="noStrike">
+              <a:defRPr sz="5100" b="0" i="0" u="none" strike="noStrike" cap="none">
                 <a:solidFill>
                   <a:schemeClr val="dk2"/>
                 </a:solidFill>
@@ -6507,7 +6606,7 @@
                 <a:sym typeface="Arial"/>
               </a:defRPr>
             </a:lvl2pPr>
-            <a:lvl3pPr indent="0" lvl="2" marL="0" marR="0" algn="r">
+            <a:lvl3pPr marL="0" marR="0" lvl="2" indent="0" algn="r">
               <a:lnSpc>
                 <a:spcPct val="100000"/>
               </a:lnSpc>
@@ -6523,7 +6622,7 @@
               <a:buSzPts val="5100"/>
               <a:buFont typeface="Arial"/>
               <a:buNone/>
-              <a:defRPr b="0" i="0" sz="5100" u="none" cap="none" strike="noStrike">
+              <a:defRPr sz="5100" b="0" i="0" u="none" strike="noStrike" cap="none">
                 <a:solidFill>
                   <a:schemeClr val="dk2"/>
                 </a:solidFill>
@@ -6533,7 +6632,7 @@
                 <a:sym typeface="Arial"/>
               </a:defRPr>
             </a:lvl3pPr>
-            <a:lvl4pPr indent="0" lvl="3" marL="0" marR="0" algn="r">
+            <a:lvl4pPr marL="0" marR="0" lvl="3" indent="0" algn="r">
               <a:lnSpc>
                 <a:spcPct val="100000"/>
               </a:lnSpc>
@@ -6549,7 +6648,7 @@
               <a:buSzPts val="5100"/>
               <a:buFont typeface="Arial"/>
               <a:buNone/>
-              <a:defRPr b="0" i="0" sz="5100" u="none" cap="none" strike="noStrike">
+              <a:defRPr sz="5100" b="0" i="0" u="none" strike="noStrike" cap="none">
                 <a:solidFill>
                   <a:schemeClr val="dk2"/>
                 </a:solidFill>
@@ -6559,7 +6658,7 @@
                 <a:sym typeface="Arial"/>
               </a:defRPr>
             </a:lvl4pPr>
-            <a:lvl5pPr indent="0" lvl="4" marL="0" marR="0" algn="r">
+            <a:lvl5pPr marL="0" marR="0" lvl="4" indent="0" algn="r">
               <a:lnSpc>
                 <a:spcPct val="100000"/>
               </a:lnSpc>
@@ -6575,7 +6674,7 @@
               <a:buSzPts val="5100"/>
               <a:buFont typeface="Arial"/>
               <a:buNone/>
-              <a:defRPr b="0" i="0" sz="5100" u="none" cap="none" strike="noStrike">
+              <a:defRPr sz="5100" b="0" i="0" u="none" strike="noStrike" cap="none">
                 <a:solidFill>
                   <a:schemeClr val="dk2"/>
                 </a:solidFill>
@@ -6585,7 +6684,7 @@
                 <a:sym typeface="Arial"/>
               </a:defRPr>
             </a:lvl5pPr>
-            <a:lvl6pPr indent="0" lvl="5" marL="0" marR="0" algn="r">
+            <a:lvl6pPr marL="0" marR="0" lvl="5" indent="0" algn="r">
               <a:lnSpc>
                 <a:spcPct val="100000"/>
               </a:lnSpc>
@@ -6601,7 +6700,7 @@
               <a:buSzPts val="5100"/>
               <a:buFont typeface="Arial"/>
               <a:buNone/>
-              <a:defRPr b="0" i="0" sz="5100" u="none" cap="none" strike="noStrike">
+              <a:defRPr sz="5100" b="0" i="0" u="none" strike="noStrike" cap="none">
                 <a:solidFill>
                   <a:schemeClr val="dk2"/>
                 </a:solidFill>
@@ -6611,7 +6710,7 @@
                 <a:sym typeface="Arial"/>
               </a:defRPr>
             </a:lvl6pPr>
-            <a:lvl7pPr indent="0" lvl="6" marL="0" marR="0" algn="r">
+            <a:lvl7pPr marL="0" marR="0" lvl="6" indent="0" algn="r">
               <a:lnSpc>
                 <a:spcPct val="100000"/>
               </a:lnSpc>
@@ -6627,7 +6726,7 @@
               <a:buSzPts val="5100"/>
               <a:buFont typeface="Arial"/>
               <a:buNone/>
-              <a:defRPr b="0" i="0" sz="5100" u="none" cap="none" strike="noStrike">
+              <a:defRPr sz="5100" b="0" i="0" u="none" strike="noStrike" cap="none">
                 <a:solidFill>
                   <a:schemeClr val="dk2"/>
                 </a:solidFill>
@@ -6637,7 +6736,7 @@
                 <a:sym typeface="Arial"/>
               </a:defRPr>
             </a:lvl7pPr>
-            <a:lvl8pPr indent="0" lvl="7" marL="0" marR="0" algn="r">
+            <a:lvl8pPr marL="0" marR="0" lvl="7" indent="0" algn="r">
               <a:lnSpc>
                 <a:spcPct val="100000"/>
               </a:lnSpc>
@@ -6653,7 +6752,7 @@
               <a:buSzPts val="5100"/>
               <a:buFont typeface="Arial"/>
               <a:buNone/>
-              <a:defRPr b="0" i="0" sz="5100" u="none" cap="none" strike="noStrike">
+              <a:defRPr sz="5100" b="0" i="0" u="none" strike="noStrike" cap="none">
                 <a:solidFill>
                   <a:schemeClr val="dk2"/>
                 </a:solidFill>
@@ -6663,7 +6762,7 @@
                 <a:sym typeface="Arial"/>
               </a:defRPr>
             </a:lvl8pPr>
-            <a:lvl9pPr indent="0" lvl="8" marL="0" marR="0" algn="r">
+            <a:lvl9pPr marL="0" marR="0" lvl="8" indent="0" algn="r">
               <a:lnSpc>
                 <a:spcPct val="100000"/>
               </a:lnSpc>
@@ -6679,7 +6778,7 @@
               <a:buSzPts val="5100"/>
               <a:buFont typeface="Arial"/>
               <a:buNone/>
-              <a:defRPr b="0" i="0" sz="5100" u="none" cap="none" strike="noStrike">
+              <a:defRPr sz="5100" b="0" i="0" u="none" strike="noStrike" cap="none">
                 <a:solidFill>
                   <a:schemeClr val="dk2"/>
                 </a:solidFill>
@@ -6691,7 +6790,7 @@
             </a:lvl9pPr>
           </a:lstStyle>
           <a:p>
-            <a:pPr indent="0" lvl="0" marL="0" rtl="0" algn="r">
+            <a:pPr marL="0" lvl="0" indent="0" algn="r" rtl="0">
               <a:spcBef>
                 <a:spcPts val="0"/>
               </a:spcBef>
@@ -6717,18 +6816,19 @@
 </file>
 
 <file path=ppt/slideMasters/slideMaster1.xml><?xml version="1.0" encoding="utf-8"?>
-<p:sldMaster xmlns:a="http://schemas.openxmlformats.org/drawingml/2006/main" xmlns:r="http://schemas.openxmlformats.org/officeDocument/2006/relationships" xmlns:mc="http://schemas.openxmlformats.org/markup-compatibility/2006" xmlns:mv="urn:schemas-microsoft-com:mac:vml" xmlns:p="http://schemas.openxmlformats.org/presentationml/2006/main" xmlns:c="http://schemas.openxmlformats.org/drawingml/2006/chart" xmlns:dgm="http://schemas.openxmlformats.org/drawingml/2006/diagram" xmlns:o="urn:schemas-microsoft-com:office:office" xmlns:v="urn:schemas-microsoft-com:vml" xmlns:pvml="urn:schemas-microsoft-com:office:powerpoint" xmlns:com="http://schemas.openxmlformats.org/drawingml/2006/compatibility" xmlns:p14="http://schemas.microsoft.com/office/powerpoint/2010/main" xmlns:p15="http://schemas.microsoft.com/office/powerpoint/2012/main" xmlns:ahyp="http://schemas.microsoft.com/office/drawing/2018/hyperlinkcolor">
+<p:sldMaster xmlns:a="http://schemas.openxmlformats.org/drawingml/2006/main" xmlns:r="http://schemas.openxmlformats.org/officeDocument/2006/relationships" xmlns:p="http://schemas.openxmlformats.org/presentationml/2006/main">
   <p:cSld name="simple-light-2">
     <p:bg>
       <p:bgPr>
         <a:solidFill>
           <a:schemeClr val="lt1"/>
         </a:solidFill>
+        <a:effectLst/>
       </p:bgPr>
     </p:bg>
     <p:spTree>
       <p:nvGrpSpPr>
-        <p:cNvPr id="5" name="Shape 5"/>
+        <p:cNvPr id="1" name="Shape 5"/>
         <p:cNvGrpSpPr/>
         <p:nvPr/>
       </p:nvGrpSpPr>
@@ -6743,7 +6843,9 @@
       <p:sp>
         <p:nvSpPr>
           <p:cNvPr id="6" name="Google Shape;6;g2b16e703bd7_0_0"/>
-          <p:cNvSpPr txBox="1"/>
+          <p:cNvSpPr txBox="1">
+            <a:spLocks noGrp="1"/>
+          </p:cNvSpPr>
           <p:nvPr>
             <p:ph type="title"/>
           </p:nvPr>
@@ -6762,11 +6864,11 @@
           </a:ln>
         </p:spPr>
         <p:txBody>
-          <a:bodyPr anchorCtr="0" anchor="t" bIns="462325" lIns="462325" spcFirstLastPara="1" rIns="462325" wrap="square" tIns="462325">
+          <a:bodyPr spcFirstLastPara="1" wrap="square" lIns="462325" tIns="462325" rIns="462325" bIns="462325" anchor="t" anchorCtr="0">
             <a:normAutofit/>
           </a:bodyPr>
           <a:lstStyle>
-            <a:lvl1pPr lvl="0" marR="0" rtl="0" algn="l">
+            <a:lvl1pPr marR="0" lvl="0" algn="l" rtl="0">
               <a:lnSpc>
                 <a:spcPct val="100000"/>
               </a:lnSpc>
@@ -6782,7 +6884,7 @@
               <a:buSzPts val="14200"/>
               <a:buFont typeface="Arial"/>
               <a:buNone/>
-              <a:defRPr b="0" i="0" sz="14200" u="none" cap="none" strike="noStrike">
+              <a:defRPr sz="14200" b="0" i="0" u="none" strike="noStrike" cap="none">
                 <a:solidFill>
                   <a:schemeClr val="dk1"/>
                 </a:solidFill>
@@ -6792,7 +6894,7 @@
                 <a:sym typeface="Arial"/>
               </a:defRPr>
             </a:lvl1pPr>
-            <a:lvl2pPr lvl="1" marR="0" rtl="0" algn="l">
+            <a:lvl2pPr marR="0" lvl="1" algn="l" rtl="0">
               <a:lnSpc>
                 <a:spcPct val="100000"/>
               </a:lnSpc>
@@ -6808,7 +6910,7 @@
               <a:buSzPts val="14200"/>
               <a:buFont typeface="Arial"/>
               <a:buNone/>
-              <a:defRPr b="0" i="0" sz="14200" u="none" cap="none" strike="noStrike">
+              <a:defRPr sz="14200" b="0" i="0" u="none" strike="noStrike" cap="none">
                 <a:solidFill>
                   <a:schemeClr val="dk1"/>
                 </a:solidFill>
@@ -6818,7 +6920,7 @@
                 <a:sym typeface="Arial"/>
               </a:defRPr>
             </a:lvl2pPr>
-            <a:lvl3pPr lvl="2" marR="0" rtl="0" algn="l">
+            <a:lvl3pPr marR="0" lvl="2" algn="l" rtl="0">
               <a:lnSpc>
                 <a:spcPct val="100000"/>
               </a:lnSpc>
@@ -6834,7 +6936,7 @@
               <a:buSzPts val="14200"/>
               <a:buFont typeface="Arial"/>
               <a:buNone/>
-              <a:defRPr b="0" i="0" sz="14200" u="none" cap="none" strike="noStrike">
+              <a:defRPr sz="14200" b="0" i="0" u="none" strike="noStrike" cap="none">
                 <a:solidFill>
                   <a:schemeClr val="dk1"/>
                 </a:solidFill>
@@ -6844,7 +6946,7 @@
                 <a:sym typeface="Arial"/>
               </a:defRPr>
             </a:lvl3pPr>
-            <a:lvl4pPr lvl="3" marR="0" rtl="0" algn="l">
+            <a:lvl4pPr marR="0" lvl="3" algn="l" rtl="0">
               <a:lnSpc>
                 <a:spcPct val="100000"/>
               </a:lnSpc>
@@ -6860,7 +6962,7 @@
               <a:buSzPts val="14200"/>
               <a:buFont typeface="Arial"/>
               <a:buNone/>
-              <a:defRPr b="0" i="0" sz="14200" u="none" cap="none" strike="noStrike">
+              <a:defRPr sz="14200" b="0" i="0" u="none" strike="noStrike" cap="none">
                 <a:solidFill>
                   <a:schemeClr val="dk1"/>
                 </a:solidFill>
@@ -6870,7 +6972,7 @@
                 <a:sym typeface="Arial"/>
               </a:defRPr>
             </a:lvl4pPr>
-            <a:lvl5pPr lvl="4" marR="0" rtl="0" algn="l">
+            <a:lvl5pPr marR="0" lvl="4" algn="l" rtl="0">
               <a:lnSpc>
                 <a:spcPct val="100000"/>
               </a:lnSpc>
@@ -6886,7 +6988,7 @@
               <a:buSzPts val="14200"/>
               <a:buFont typeface="Arial"/>
               <a:buNone/>
-              <a:defRPr b="0" i="0" sz="14200" u="none" cap="none" strike="noStrike">
+              <a:defRPr sz="14200" b="0" i="0" u="none" strike="noStrike" cap="none">
                 <a:solidFill>
                   <a:schemeClr val="dk1"/>
                 </a:solidFill>
@@ -6896,7 +6998,7 @@
                 <a:sym typeface="Arial"/>
               </a:defRPr>
             </a:lvl5pPr>
-            <a:lvl6pPr lvl="5" marR="0" rtl="0" algn="l">
+            <a:lvl6pPr marR="0" lvl="5" algn="l" rtl="0">
               <a:lnSpc>
                 <a:spcPct val="100000"/>
               </a:lnSpc>
@@ -6912,7 +7014,7 @@
               <a:buSzPts val="14200"/>
               <a:buFont typeface="Arial"/>
               <a:buNone/>
-              <a:defRPr b="0" i="0" sz="14200" u="none" cap="none" strike="noStrike">
+              <a:defRPr sz="14200" b="0" i="0" u="none" strike="noStrike" cap="none">
                 <a:solidFill>
                   <a:schemeClr val="dk1"/>
                 </a:solidFill>
@@ -6922,7 +7024,7 @@
                 <a:sym typeface="Arial"/>
               </a:defRPr>
             </a:lvl6pPr>
-            <a:lvl7pPr lvl="6" marR="0" rtl="0" algn="l">
+            <a:lvl7pPr marR="0" lvl="6" algn="l" rtl="0">
               <a:lnSpc>
                 <a:spcPct val="100000"/>
               </a:lnSpc>
@@ -6938,7 +7040,7 @@
               <a:buSzPts val="14200"/>
               <a:buFont typeface="Arial"/>
               <a:buNone/>
-              <a:defRPr b="0" i="0" sz="14200" u="none" cap="none" strike="noStrike">
+              <a:defRPr sz="14200" b="0" i="0" u="none" strike="noStrike" cap="none">
                 <a:solidFill>
                   <a:schemeClr val="dk1"/>
                 </a:solidFill>
@@ -6948,7 +7050,7 @@
                 <a:sym typeface="Arial"/>
               </a:defRPr>
             </a:lvl7pPr>
-            <a:lvl8pPr lvl="7" marR="0" rtl="0" algn="l">
+            <a:lvl8pPr marR="0" lvl="7" algn="l" rtl="0">
               <a:lnSpc>
                 <a:spcPct val="100000"/>
               </a:lnSpc>
@@ -6964,7 +7066,7 @@
               <a:buSzPts val="14200"/>
               <a:buFont typeface="Arial"/>
               <a:buNone/>
-              <a:defRPr b="0" i="0" sz="14200" u="none" cap="none" strike="noStrike">
+              <a:defRPr sz="14200" b="0" i="0" u="none" strike="noStrike" cap="none">
                 <a:solidFill>
                   <a:schemeClr val="dk1"/>
                 </a:solidFill>
@@ -6974,7 +7076,7 @@
                 <a:sym typeface="Arial"/>
               </a:defRPr>
             </a:lvl8pPr>
-            <a:lvl9pPr lvl="8" marR="0" rtl="0" algn="l">
+            <a:lvl9pPr marR="0" lvl="8" algn="l" rtl="0">
               <a:lnSpc>
                 <a:spcPct val="100000"/>
               </a:lnSpc>
@@ -6990,7 +7092,7 @@
               <a:buSzPts val="14200"/>
               <a:buFont typeface="Arial"/>
               <a:buNone/>
-              <a:defRPr b="0" i="0" sz="14200" u="none" cap="none" strike="noStrike">
+              <a:defRPr sz="14200" b="0" i="0" u="none" strike="noStrike" cap="none">
                 <a:solidFill>
                   <a:schemeClr val="dk1"/>
                 </a:solidFill>
@@ -7001,15 +7103,19 @@
               </a:defRPr>
             </a:lvl9pPr>
           </a:lstStyle>
-          <a:p/>
+          <a:p>
+            <a:endParaRPr/>
+          </a:p>
         </p:txBody>
       </p:sp>
       <p:sp>
         <p:nvSpPr>
           <p:cNvPr id="7" name="Google Shape;7;g2b16e703bd7_0_0"/>
-          <p:cNvSpPr txBox="1"/>
+          <p:cNvSpPr txBox="1">
+            <a:spLocks noGrp="1"/>
+          </p:cNvSpPr>
           <p:nvPr>
-            <p:ph idx="1" type="body"/>
+            <p:ph type="body" idx="1"/>
           </p:nvPr>
         </p:nvSpPr>
         <p:spPr>
@@ -7026,11 +7132,11 @@
           </a:ln>
         </p:spPr>
         <p:txBody>
-          <a:bodyPr anchorCtr="0" anchor="t" bIns="462325" lIns="462325" spcFirstLastPara="1" rIns="462325" wrap="square" tIns="462325">
+          <a:bodyPr spcFirstLastPara="1" wrap="square" lIns="462325" tIns="462325" rIns="462325" bIns="462325" anchor="t" anchorCtr="0">
             <a:normAutofit/>
           </a:bodyPr>
           <a:lstStyle>
-            <a:lvl1pPr indent="-806450" lvl="0" marL="457200" marR="0" rtl="0" algn="l">
+            <a:lvl1pPr marL="457200" marR="0" lvl="0" indent="-806450" algn="l" rtl="0">
               <a:lnSpc>
                 <a:spcPct val="115000"/>
               </a:lnSpc>
@@ -7046,7 +7152,7 @@
               <a:buSzPts val="9100"/>
               <a:buFont typeface="Arial"/>
               <a:buChar char="●"/>
-              <a:defRPr b="0" i="0" sz="9100" u="none" cap="none" strike="noStrike">
+              <a:defRPr sz="9100" b="0" i="0" u="none" strike="noStrike" cap="none">
                 <a:solidFill>
                   <a:schemeClr val="dk2"/>
                 </a:solidFill>
@@ -7056,7 +7162,7 @@
                 <a:sym typeface="Arial"/>
               </a:defRPr>
             </a:lvl1pPr>
-            <a:lvl2pPr indent="-679450" lvl="1" marL="914400" marR="0" rtl="0" algn="l">
+            <a:lvl2pPr marL="914400" marR="0" lvl="1" indent="-679450" algn="l" rtl="0">
               <a:lnSpc>
                 <a:spcPct val="115000"/>
               </a:lnSpc>
@@ -7072,7 +7178,7 @@
               <a:buSzPts val="7100"/>
               <a:buFont typeface="Arial"/>
               <a:buChar char="○"/>
-              <a:defRPr b="0" i="0" sz="7100" u="none" cap="none" strike="noStrike">
+              <a:defRPr sz="7100" b="0" i="0" u="none" strike="noStrike" cap="none">
                 <a:solidFill>
                   <a:schemeClr val="dk2"/>
                 </a:solidFill>
@@ -7082,7 +7188,7 @@
                 <a:sym typeface="Arial"/>
               </a:defRPr>
             </a:lvl2pPr>
-            <a:lvl3pPr indent="-679450" lvl="2" marL="1371600" marR="0" rtl="0" algn="l">
+            <a:lvl3pPr marL="1371600" marR="0" lvl="2" indent="-679450" algn="l" rtl="0">
               <a:lnSpc>
                 <a:spcPct val="115000"/>
               </a:lnSpc>
@@ -7098,7 +7204,7 @@
               <a:buSzPts val="7100"/>
               <a:buFont typeface="Arial"/>
               <a:buChar char="■"/>
-              <a:defRPr b="0" i="0" sz="7100" u="none" cap="none" strike="noStrike">
+              <a:defRPr sz="7100" b="0" i="0" u="none" strike="noStrike" cap="none">
                 <a:solidFill>
                   <a:schemeClr val="dk2"/>
                 </a:solidFill>
@@ -7108,7 +7214,7 @@
                 <a:sym typeface="Arial"/>
               </a:defRPr>
             </a:lvl3pPr>
-            <a:lvl4pPr indent="-679450" lvl="3" marL="1828800" marR="0" rtl="0" algn="l">
+            <a:lvl4pPr marL="1828800" marR="0" lvl="3" indent="-679450" algn="l" rtl="0">
               <a:lnSpc>
                 <a:spcPct val="115000"/>
               </a:lnSpc>
@@ -7124,7 +7230,7 @@
               <a:buSzPts val="7100"/>
               <a:buFont typeface="Arial"/>
               <a:buChar char="●"/>
-              <a:defRPr b="0" i="0" sz="7100" u="none" cap="none" strike="noStrike">
+              <a:defRPr sz="7100" b="0" i="0" u="none" strike="noStrike" cap="none">
                 <a:solidFill>
                   <a:schemeClr val="dk2"/>
                 </a:solidFill>
@@ -7134,7 +7240,7 @@
                 <a:sym typeface="Arial"/>
               </a:defRPr>
             </a:lvl4pPr>
-            <a:lvl5pPr indent="-679450" lvl="4" marL="2286000" marR="0" rtl="0" algn="l">
+            <a:lvl5pPr marL="2286000" marR="0" lvl="4" indent="-679450" algn="l" rtl="0">
               <a:lnSpc>
                 <a:spcPct val="115000"/>
               </a:lnSpc>
@@ -7150,7 +7256,7 @@
               <a:buSzPts val="7100"/>
               <a:buFont typeface="Arial"/>
               <a:buChar char="○"/>
-              <a:defRPr b="0" i="0" sz="7100" u="none" cap="none" strike="noStrike">
+              <a:defRPr sz="7100" b="0" i="0" u="none" strike="noStrike" cap="none">
                 <a:solidFill>
                   <a:schemeClr val="dk2"/>
                 </a:solidFill>
@@ -7160,7 +7266,7 @@
                 <a:sym typeface="Arial"/>
               </a:defRPr>
             </a:lvl5pPr>
-            <a:lvl6pPr indent="-679450" lvl="5" marL="2743200" marR="0" rtl="0" algn="l">
+            <a:lvl6pPr marL="2743200" marR="0" lvl="5" indent="-679450" algn="l" rtl="0">
               <a:lnSpc>
                 <a:spcPct val="115000"/>
               </a:lnSpc>
@@ -7176,7 +7282,7 @@
               <a:buSzPts val="7100"/>
               <a:buFont typeface="Arial"/>
               <a:buChar char="■"/>
-              <a:defRPr b="0" i="0" sz="7100" u="none" cap="none" strike="noStrike">
+              <a:defRPr sz="7100" b="0" i="0" u="none" strike="noStrike" cap="none">
                 <a:solidFill>
                   <a:schemeClr val="dk2"/>
                 </a:solidFill>
@@ -7186,7 +7292,7 @@
                 <a:sym typeface="Arial"/>
               </a:defRPr>
             </a:lvl6pPr>
-            <a:lvl7pPr indent="-679450" lvl="6" marL="3200400" marR="0" rtl="0" algn="l">
+            <a:lvl7pPr marL="3200400" marR="0" lvl="6" indent="-679450" algn="l" rtl="0">
               <a:lnSpc>
                 <a:spcPct val="115000"/>
               </a:lnSpc>
@@ -7202,7 +7308,7 @@
               <a:buSzPts val="7100"/>
               <a:buFont typeface="Arial"/>
               <a:buChar char="●"/>
-              <a:defRPr b="0" i="0" sz="7100" u="none" cap="none" strike="noStrike">
+              <a:defRPr sz="7100" b="0" i="0" u="none" strike="noStrike" cap="none">
                 <a:solidFill>
                   <a:schemeClr val="dk2"/>
                 </a:solidFill>
@@ -7212,7 +7318,7 @@
                 <a:sym typeface="Arial"/>
               </a:defRPr>
             </a:lvl7pPr>
-            <a:lvl8pPr indent="-679450" lvl="7" marL="3657600" marR="0" rtl="0" algn="l">
+            <a:lvl8pPr marL="3657600" marR="0" lvl="7" indent="-679450" algn="l" rtl="0">
               <a:lnSpc>
                 <a:spcPct val="115000"/>
               </a:lnSpc>
@@ -7228,7 +7334,7 @@
               <a:buSzPts val="7100"/>
               <a:buFont typeface="Arial"/>
               <a:buChar char="○"/>
-              <a:defRPr b="0" i="0" sz="7100" u="none" cap="none" strike="noStrike">
+              <a:defRPr sz="7100" b="0" i="0" u="none" strike="noStrike" cap="none">
                 <a:solidFill>
                   <a:schemeClr val="dk2"/>
                 </a:solidFill>
@@ -7238,7 +7344,7 @@
                 <a:sym typeface="Arial"/>
               </a:defRPr>
             </a:lvl8pPr>
-            <a:lvl9pPr indent="-679450" lvl="8" marL="4114800" marR="0" rtl="0" algn="l">
+            <a:lvl9pPr marL="4114800" marR="0" lvl="8" indent="-679450" algn="l" rtl="0">
               <a:lnSpc>
                 <a:spcPct val="115000"/>
               </a:lnSpc>
@@ -7254,7 +7360,7 @@
               <a:buSzPts val="7100"/>
               <a:buFont typeface="Arial"/>
               <a:buChar char="■"/>
-              <a:defRPr b="0" i="0" sz="7100" u="none" cap="none" strike="noStrike">
+              <a:defRPr sz="7100" b="0" i="0" u="none" strike="noStrike" cap="none">
                 <a:solidFill>
                   <a:schemeClr val="dk2"/>
                 </a:solidFill>
@@ -7265,15 +7371,19 @@
               </a:defRPr>
             </a:lvl9pPr>
           </a:lstStyle>
-          <a:p/>
+          <a:p>
+            <a:endParaRPr/>
+          </a:p>
         </p:txBody>
       </p:sp>
       <p:sp>
         <p:nvSpPr>
           <p:cNvPr id="8" name="Google Shape;8;g2b16e703bd7_0_0"/>
-          <p:cNvSpPr txBox="1"/>
+          <p:cNvSpPr txBox="1">
+            <a:spLocks noGrp="1"/>
+          </p:cNvSpPr>
           <p:nvPr>
-            <p:ph idx="12" type="sldNum"/>
+            <p:ph type="sldNum" idx="12"/>
           </p:nvPr>
         </p:nvSpPr>
         <p:spPr>
@@ -7290,11 +7400,11 @@
           </a:ln>
         </p:spPr>
         <p:txBody>
-          <a:bodyPr anchorCtr="0" anchor="ctr" bIns="462325" lIns="462325" spcFirstLastPara="1" rIns="462325" wrap="square" tIns="462325">
+          <a:bodyPr spcFirstLastPara="1" wrap="square" lIns="462325" tIns="462325" rIns="462325" bIns="462325" anchor="ctr" anchorCtr="0">
             <a:normAutofit/>
           </a:bodyPr>
           <a:lstStyle>
-            <a:lvl1pPr indent="0" lvl="0" marL="0" marR="0" rtl="0" algn="r">
+            <a:lvl1pPr marL="0" marR="0" lvl="0" indent="0" algn="r" rtl="0">
               <a:lnSpc>
                 <a:spcPct val="100000"/>
               </a:lnSpc>
@@ -7310,7 +7420,7 @@
               <a:buSzPts val="5100"/>
               <a:buFont typeface="Arial"/>
               <a:buNone/>
-              <a:defRPr b="0" i="0" sz="5100" u="none" cap="none" strike="noStrike">
+              <a:defRPr sz="5100" b="0" i="0" u="none" strike="noStrike" cap="none">
                 <a:solidFill>
                   <a:schemeClr val="dk2"/>
                 </a:solidFill>
@@ -7320,7 +7430,7 @@
                 <a:sym typeface="Arial"/>
               </a:defRPr>
             </a:lvl1pPr>
-            <a:lvl2pPr indent="0" lvl="1" marL="0" marR="0" rtl="0" algn="r">
+            <a:lvl2pPr marL="0" marR="0" lvl="1" indent="0" algn="r" rtl="0">
               <a:lnSpc>
                 <a:spcPct val="100000"/>
               </a:lnSpc>
@@ -7336,7 +7446,7 @@
               <a:buSzPts val="5100"/>
               <a:buFont typeface="Arial"/>
               <a:buNone/>
-              <a:defRPr b="0" i="0" sz="5100" u="none" cap="none" strike="noStrike">
+              <a:defRPr sz="5100" b="0" i="0" u="none" strike="noStrike" cap="none">
                 <a:solidFill>
                   <a:schemeClr val="dk2"/>
                 </a:solidFill>
@@ -7346,7 +7456,7 @@
                 <a:sym typeface="Arial"/>
               </a:defRPr>
             </a:lvl2pPr>
-            <a:lvl3pPr indent="0" lvl="2" marL="0" marR="0" rtl="0" algn="r">
+            <a:lvl3pPr marL="0" marR="0" lvl="2" indent="0" algn="r" rtl="0">
               <a:lnSpc>
                 <a:spcPct val="100000"/>
               </a:lnSpc>
@@ -7362,7 +7472,7 @@
               <a:buSzPts val="5100"/>
               <a:buFont typeface="Arial"/>
               <a:buNone/>
-              <a:defRPr b="0" i="0" sz="5100" u="none" cap="none" strike="noStrike">
+              <a:defRPr sz="5100" b="0" i="0" u="none" strike="noStrike" cap="none">
                 <a:solidFill>
                   <a:schemeClr val="dk2"/>
                 </a:solidFill>
@@ -7372,7 +7482,7 @@
                 <a:sym typeface="Arial"/>
               </a:defRPr>
             </a:lvl3pPr>
-            <a:lvl4pPr indent="0" lvl="3" marL="0" marR="0" rtl="0" algn="r">
+            <a:lvl4pPr marL="0" marR="0" lvl="3" indent="0" algn="r" rtl="0">
               <a:lnSpc>
                 <a:spcPct val="100000"/>
               </a:lnSpc>
@@ -7388,7 +7498,7 @@
               <a:buSzPts val="5100"/>
               <a:buFont typeface="Arial"/>
               <a:buNone/>
-              <a:defRPr b="0" i="0" sz="5100" u="none" cap="none" strike="noStrike">
+              <a:defRPr sz="5100" b="0" i="0" u="none" strike="noStrike" cap="none">
                 <a:solidFill>
                   <a:schemeClr val="dk2"/>
                 </a:solidFill>
@@ -7398,7 +7508,7 @@
                 <a:sym typeface="Arial"/>
               </a:defRPr>
             </a:lvl4pPr>
-            <a:lvl5pPr indent="0" lvl="4" marL="0" marR="0" rtl="0" algn="r">
+            <a:lvl5pPr marL="0" marR="0" lvl="4" indent="0" algn="r" rtl="0">
               <a:lnSpc>
                 <a:spcPct val="100000"/>
               </a:lnSpc>
@@ -7414,7 +7524,7 @@
               <a:buSzPts val="5100"/>
               <a:buFont typeface="Arial"/>
               <a:buNone/>
-              <a:defRPr b="0" i="0" sz="5100" u="none" cap="none" strike="noStrike">
+              <a:defRPr sz="5100" b="0" i="0" u="none" strike="noStrike" cap="none">
                 <a:solidFill>
                   <a:schemeClr val="dk2"/>
                 </a:solidFill>
@@ -7424,7 +7534,7 @@
                 <a:sym typeface="Arial"/>
               </a:defRPr>
             </a:lvl5pPr>
-            <a:lvl6pPr indent="0" lvl="5" marL="0" marR="0" rtl="0" algn="r">
+            <a:lvl6pPr marL="0" marR="0" lvl="5" indent="0" algn="r" rtl="0">
               <a:lnSpc>
                 <a:spcPct val="100000"/>
               </a:lnSpc>
@@ -7440,7 +7550,7 @@
               <a:buSzPts val="5100"/>
               <a:buFont typeface="Arial"/>
               <a:buNone/>
-              <a:defRPr b="0" i="0" sz="5100" u="none" cap="none" strike="noStrike">
+              <a:defRPr sz="5100" b="0" i="0" u="none" strike="noStrike" cap="none">
                 <a:solidFill>
                   <a:schemeClr val="dk2"/>
                 </a:solidFill>
@@ -7450,7 +7560,7 @@
                 <a:sym typeface="Arial"/>
               </a:defRPr>
             </a:lvl6pPr>
-            <a:lvl7pPr indent="0" lvl="6" marL="0" marR="0" rtl="0" algn="r">
+            <a:lvl7pPr marL="0" marR="0" lvl="6" indent="0" algn="r" rtl="0">
               <a:lnSpc>
                 <a:spcPct val="100000"/>
               </a:lnSpc>
@@ -7466,7 +7576,7 @@
               <a:buSzPts val="5100"/>
               <a:buFont typeface="Arial"/>
               <a:buNone/>
-              <a:defRPr b="0" i="0" sz="5100" u="none" cap="none" strike="noStrike">
+              <a:defRPr sz="5100" b="0" i="0" u="none" strike="noStrike" cap="none">
                 <a:solidFill>
                   <a:schemeClr val="dk2"/>
                 </a:solidFill>
@@ -7476,7 +7586,7 @@
                 <a:sym typeface="Arial"/>
               </a:defRPr>
             </a:lvl7pPr>
-            <a:lvl8pPr indent="0" lvl="7" marL="0" marR="0" rtl="0" algn="r">
+            <a:lvl8pPr marL="0" marR="0" lvl="7" indent="0" algn="r" rtl="0">
               <a:lnSpc>
                 <a:spcPct val="100000"/>
               </a:lnSpc>
@@ -7492,7 +7602,7 @@
               <a:buSzPts val="5100"/>
               <a:buFont typeface="Arial"/>
               <a:buNone/>
-              <a:defRPr b="0" i="0" sz="5100" u="none" cap="none" strike="noStrike">
+              <a:defRPr sz="5100" b="0" i="0" u="none" strike="noStrike" cap="none">
                 <a:solidFill>
                   <a:schemeClr val="dk2"/>
                 </a:solidFill>
@@ -7502,7 +7612,7 @@
                 <a:sym typeface="Arial"/>
               </a:defRPr>
             </a:lvl8pPr>
-            <a:lvl9pPr indent="0" lvl="8" marL="0" marR="0" rtl="0" algn="r">
+            <a:lvl9pPr marL="0" marR="0" lvl="8" indent="0" algn="r" rtl="0">
               <a:lnSpc>
                 <a:spcPct val="100000"/>
               </a:lnSpc>
@@ -7518,7 +7628,7 @@
               <a:buSzPts val="5100"/>
               <a:buFont typeface="Arial"/>
               <a:buNone/>
-              <a:defRPr b="0" i="0" sz="5100" u="none" cap="none" strike="noStrike">
+              <a:defRPr sz="5100" b="0" i="0" u="none" strike="noStrike" cap="none">
                 <a:solidFill>
                   <a:schemeClr val="dk2"/>
                 </a:solidFill>
@@ -7530,7 +7640,7 @@
             </a:lvl9pPr>
           </a:lstStyle>
           <a:p>
-            <a:pPr indent="0" lvl="0" marL="0" rtl="0" algn="r">
+            <a:pPr marL="0" lvl="0" indent="0" algn="r" rtl="0">
               <a:spcBef>
                 <a:spcPts val="0"/>
               </a:spcBef>
@@ -7549,7 +7659,7 @@
       </p:sp>
     </p:spTree>
   </p:cSld>
-  <p:clrMap accent1="accent1" accent2="accent2" accent3="accent3" accent4="accent4" accent5="accent5" accent6="accent6" bg1="lt1" bg2="dk2" tx1="dk1" tx2="lt2" folHlink="folHlink" hlink="hlink"/>
+  <p:clrMap bg1="lt1" tx1="dk1" bg2="dk2" tx2="lt2" accent1="accent1" accent2="accent2" accent3="accent3" accent4="accent4" accent5="accent5" accent6="accent6" hlink="hlink" folHlink="folHlink"/>
   <p:sldLayoutIdLst>
     <p:sldLayoutId id="2147483649" r:id="rId1"/>
     <p:sldLayoutId id="2147483650" r:id="rId2"/>
@@ -7562,10 +7672,10 @@
     <p:sldLayoutId id="2147483657" r:id="rId9"/>
     <p:sldLayoutId id="2147483658" r:id="rId10"/>
   </p:sldLayoutIdLst>
-  <p:hf dt="0" ftr="0" hdr="0" sldNum="0"/>
+  <p:hf sldNum="0" hdr="0" ftr="0" dt="0"/>
   <p:txStyles>
     <p:titleStyle>
-      <a:defPPr lvl="0" marR="0" rtl="0" algn="l">
+      <a:defPPr marR="0" lvl="0" algn="l" rtl="0">
         <a:lnSpc>
           <a:spcPct val="100000"/>
         </a:lnSpc>
@@ -7576,7 +7686,7 @@
           <a:spcPts val="0"/>
         </a:spcAft>
       </a:defPPr>
-      <a:lvl1pPr lvl="0" marR="0" rtl="0" algn="l">
+      <a:lvl1pPr marR="0" lvl="0" algn="l" rtl="0">
         <a:lnSpc>
           <a:spcPct val="100000"/>
         </a:lnSpc>
@@ -7590,7 +7700,7 @@
           <a:srgbClr val="000000"/>
         </a:buClr>
         <a:buFont typeface="Arial"/>
-        <a:defRPr b="0" i="0" sz="1400" u="none" cap="none" strike="noStrike">
+        <a:defRPr sz="1400" b="0" i="0" u="none" strike="noStrike" cap="none">
           <a:solidFill>
             <a:srgbClr val="000000"/>
           </a:solidFill>
@@ -7600,7 +7710,7 @@
           <a:sym typeface="Arial"/>
         </a:defRPr>
       </a:lvl1pPr>
-      <a:lvl2pPr lvl="1" marR="0" rtl="0" algn="l">
+      <a:lvl2pPr marR="0" lvl="1" algn="l" rtl="0">
         <a:lnSpc>
           <a:spcPct val="100000"/>
         </a:lnSpc>
@@ -7614,7 +7724,7 @@
           <a:srgbClr val="000000"/>
         </a:buClr>
         <a:buFont typeface="Arial"/>
-        <a:defRPr b="0" i="0" sz="1400" u="none" cap="none" strike="noStrike">
+        <a:defRPr sz="1400" b="0" i="0" u="none" strike="noStrike" cap="none">
           <a:solidFill>
             <a:srgbClr val="000000"/>
           </a:solidFill>
@@ -7624,7 +7734,7 @@
           <a:sym typeface="Arial"/>
         </a:defRPr>
       </a:lvl2pPr>
-      <a:lvl3pPr lvl="2" marR="0" rtl="0" algn="l">
+      <a:lvl3pPr marR="0" lvl="2" algn="l" rtl="0">
         <a:lnSpc>
           <a:spcPct val="100000"/>
         </a:lnSpc>
@@ -7638,7 +7748,7 @@
           <a:srgbClr val="000000"/>
         </a:buClr>
         <a:buFont typeface="Arial"/>
-        <a:defRPr b="0" i="0" sz="1400" u="none" cap="none" strike="noStrike">
+        <a:defRPr sz="1400" b="0" i="0" u="none" strike="noStrike" cap="none">
           <a:solidFill>
             <a:srgbClr val="000000"/>
           </a:solidFill>
@@ -7648,7 +7758,7 @@
           <a:sym typeface="Arial"/>
         </a:defRPr>
       </a:lvl3pPr>
-      <a:lvl4pPr lvl="3" marR="0" rtl="0" algn="l">
+      <a:lvl4pPr marR="0" lvl="3" algn="l" rtl="0">
         <a:lnSpc>
           <a:spcPct val="100000"/>
         </a:lnSpc>
@@ -7662,7 +7772,7 @@
           <a:srgbClr val="000000"/>
         </a:buClr>
         <a:buFont typeface="Arial"/>
-        <a:defRPr b="0" i="0" sz="1400" u="none" cap="none" strike="noStrike">
+        <a:defRPr sz="1400" b="0" i="0" u="none" strike="noStrike" cap="none">
           <a:solidFill>
             <a:srgbClr val="000000"/>
           </a:solidFill>
@@ -7672,7 +7782,7 @@
           <a:sym typeface="Arial"/>
         </a:defRPr>
       </a:lvl4pPr>
-      <a:lvl5pPr lvl="4" marR="0" rtl="0" algn="l">
+      <a:lvl5pPr marR="0" lvl="4" algn="l" rtl="0">
         <a:lnSpc>
           <a:spcPct val="100000"/>
         </a:lnSpc>
@@ -7686,7 +7796,7 @@
           <a:srgbClr val="000000"/>
         </a:buClr>
         <a:buFont typeface="Arial"/>
-        <a:defRPr b="0" i="0" sz="1400" u="none" cap="none" strike="noStrike">
+        <a:defRPr sz="1400" b="0" i="0" u="none" strike="noStrike" cap="none">
           <a:solidFill>
             <a:srgbClr val="000000"/>
           </a:solidFill>
@@ -7696,7 +7806,7 @@
           <a:sym typeface="Arial"/>
         </a:defRPr>
       </a:lvl5pPr>
-      <a:lvl6pPr lvl="5" marR="0" rtl="0" algn="l">
+      <a:lvl6pPr marR="0" lvl="5" algn="l" rtl="0">
         <a:lnSpc>
           <a:spcPct val="100000"/>
         </a:lnSpc>
@@ -7710,7 +7820,7 @@
           <a:srgbClr val="000000"/>
         </a:buClr>
         <a:buFont typeface="Arial"/>
-        <a:defRPr b="0" i="0" sz="1400" u="none" cap="none" strike="noStrike">
+        <a:defRPr sz="1400" b="0" i="0" u="none" strike="noStrike" cap="none">
           <a:solidFill>
             <a:srgbClr val="000000"/>
           </a:solidFill>
@@ -7720,7 +7830,7 @@
           <a:sym typeface="Arial"/>
         </a:defRPr>
       </a:lvl6pPr>
-      <a:lvl7pPr lvl="6" marR="0" rtl="0" algn="l">
+      <a:lvl7pPr marR="0" lvl="6" algn="l" rtl="0">
         <a:lnSpc>
           <a:spcPct val="100000"/>
         </a:lnSpc>
@@ -7734,7 +7844,7 @@
           <a:srgbClr val="000000"/>
         </a:buClr>
         <a:buFont typeface="Arial"/>
-        <a:defRPr b="0" i="0" sz="1400" u="none" cap="none" strike="noStrike">
+        <a:defRPr sz="1400" b="0" i="0" u="none" strike="noStrike" cap="none">
           <a:solidFill>
             <a:srgbClr val="000000"/>
           </a:solidFill>
@@ -7744,7 +7854,7 @@
           <a:sym typeface="Arial"/>
         </a:defRPr>
       </a:lvl7pPr>
-      <a:lvl8pPr lvl="7" marR="0" rtl="0" algn="l">
+      <a:lvl8pPr marR="0" lvl="7" algn="l" rtl="0">
         <a:lnSpc>
           <a:spcPct val="100000"/>
         </a:lnSpc>
@@ -7758,7 +7868,7 @@
           <a:srgbClr val="000000"/>
         </a:buClr>
         <a:buFont typeface="Arial"/>
-        <a:defRPr b="0" i="0" sz="1400" u="none" cap="none" strike="noStrike">
+        <a:defRPr sz="1400" b="0" i="0" u="none" strike="noStrike" cap="none">
           <a:solidFill>
             <a:srgbClr val="000000"/>
           </a:solidFill>
@@ -7768,7 +7878,7 @@
           <a:sym typeface="Arial"/>
         </a:defRPr>
       </a:lvl8pPr>
-      <a:lvl9pPr lvl="8" marR="0" rtl="0" algn="l">
+      <a:lvl9pPr marR="0" lvl="8" algn="l" rtl="0">
         <a:lnSpc>
           <a:spcPct val="100000"/>
         </a:lnSpc>
@@ -7782,7 +7892,7 @@
           <a:srgbClr val="000000"/>
         </a:buClr>
         <a:buFont typeface="Arial"/>
-        <a:defRPr b="0" i="0" sz="1400" u="none" cap="none" strike="noStrike">
+        <a:defRPr sz="1400" b="0" i="0" u="none" strike="noStrike" cap="none">
           <a:solidFill>
             <a:srgbClr val="000000"/>
           </a:solidFill>
@@ -7794,7 +7904,7 @@
       </a:lvl9pPr>
     </p:titleStyle>
     <p:bodyStyle>
-      <a:defPPr lvl="0" marR="0" rtl="0" algn="l">
+      <a:defPPr marR="0" lvl="0" algn="l" rtl="0">
         <a:lnSpc>
           <a:spcPct val="100000"/>
         </a:lnSpc>
@@ -7805,7 +7915,7 @@
           <a:spcPts val="0"/>
         </a:spcAft>
       </a:defPPr>
-      <a:lvl1pPr lvl="0" marR="0" rtl="0" algn="l">
+      <a:lvl1pPr marR="0" lvl="0" algn="l" rtl="0">
         <a:lnSpc>
           <a:spcPct val="100000"/>
         </a:lnSpc>
@@ -7819,7 +7929,7 @@
           <a:srgbClr val="000000"/>
         </a:buClr>
         <a:buFont typeface="Arial"/>
-        <a:defRPr b="0" i="0" sz="1400" u="none" cap="none" strike="noStrike">
+        <a:defRPr sz="1400" b="0" i="0" u="none" strike="noStrike" cap="none">
           <a:solidFill>
             <a:srgbClr val="000000"/>
           </a:solidFill>
@@ -7829,7 +7939,7 @@
           <a:sym typeface="Arial"/>
         </a:defRPr>
       </a:lvl1pPr>
-      <a:lvl2pPr lvl="1" marR="0" rtl="0" algn="l">
+      <a:lvl2pPr marR="0" lvl="1" algn="l" rtl="0">
         <a:lnSpc>
           <a:spcPct val="100000"/>
         </a:lnSpc>
@@ -7843,7 +7953,7 @@
           <a:srgbClr val="000000"/>
         </a:buClr>
         <a:buFont typeface="Arial"/>
-        <a:defRPr b="0" i="0" sz="1400" u="none" cap="none" strike="noStrike">
+        <a:defRPr sz="1400" b="0" i="0" u="none" strike="noStrike" cap="none">
           <a:solidFill>
             <a:srgbClr val="000000"/>
           </a:solidFill>
@@ -7853,7 +7963,7 @@
           <a:sym typeface="Arial"/>
         </a:defRPr>
       </a:lvl2pPr>
-      <a:lvl3pPr lvl="2" marR="0" rtl="0" algn="l">
+      <a:lvl3pPr marR="0" lvl="2" algn="l" rtl="0">
         <a:lnSpc>
           <a:spcPct val="100000"/>
         </a:lnSpc>
@@ -7867,7 +7977,7 @@
           <a:srgbClr val="000000"/>
         </a:buClr>
         <a:buFont typeface="Arial"/>
-        <a:defRPr b="0" i="0" sz="1400" u="none" cap="none" strike="noStrike">
+        <a:defRPr sz="1400" b="0" i="0" u="none" strike="noStrike" cap="none">
           <a:solidFill>
             <a:srgbClr val="000000"/>
           </a:solidFill>
@@ -7877,7 +7987,7 @@
           <a:sym typeface="Arial"/>
         </a:defRPr>
       </a:lvl3pPr>
-      <a:lvl4pPr lvl="3" marR="0" rtl="0" algn="l">
+      <a:lvl4pPr marR="0" lvl="3" algn="l" rtl="0">
         <a:lnSpc>
           <a:spcPct val="100000"/>
         </a:lnSpc>
@@ -7891,7 +8001,7 @@
           <a:srgbClr val="000000"/>
         </a:buClr>
         <a:buFont typeface="Arial"/>
-        <a:defRPr b="0" i="0" sz="1400" u="none" cap="none" strike="noStrike">
+        <a:defRPr sz="1400" b="0" i="0" u="none" strike="noStrike" cap="none">
           <a:solidFill>
             <a:srgbClr val="000000"/>
           </a:solidFill>
@@ -7901,7 +8011,7 @@
           <a:sym typeface="Arial"/>
         </a:defRPr>
       </a:lvl4pPr>
-      <a:lvl5pPr lvl="4" marR="0" rtl="0" algn="l">
+      <a:lvl5pPr marR="0" lvl="4" algn="l" rtl="0">
         <a:lnSpc>
           <a:spcPct val="100000"/>
         </a:lnSpc>
@@ -7915,7 +8025,7 @@
           <a:srgbClr val="000000"/>
         </a:buClr>
         <a:buFont typeface="Arial"/>
-        <a:defRPr b="0" i="0" sz="1400" u="none" cap="none" strike="noStrike">
+        <a:defRPr sz="1400" b="0" i="0" u="none" strike="noStrike" cap="none">
           <a:solidFill>
             <a:srgbClr val="000000"/>
           </a:solidFill>
@@ -7925,7 +8035,7 @@
           <a:sym typeface="Arial"/>
         </a:defRPr>
       </a:lvl5pPr>
-      <a:lvl6pPr lvl="5" marR="0" rtl="0" algn="l">
+      <a:lvl6pPr marR="0" lvl="5" algn="l" rtl="0">
         <a:lnSpc>
           <a:spcPct val="100000"/>
         </a:lnSpc>
@@ -7939,7 +8049,7 @@
           <a:srgbClr val="000000"/>
         </a:buClr>
         <a:buFont typeface="Arial"/>
-        <a:defRPr b="0" i="0" sz="1400" u="none" cap="none" strike="noStrike">
+        <a:defRPr sz="1400" b="0" i="0" u="none" strike="noStrike" cap="none">
           <a:solidFill>
             <a:srgbClr val="000000"/>
           </a:solidFill>
@@ -7949,7 +8059,7 @@
           <a:sym typeface="Arial"/>
         </a:defRPr>
       </a:lvl6pPr>
-      <a:lvl7pPr lvl="6" marR="0" rtl="0" algn="l">
+      <a:lvl7pPr marR="0" lvl="6" algn="l" rtl="0">
         <a:lnSpc>
           <a:spcPct val="100000"/>
         </a:lnSpc>
@@ -7963,7 +8073,7 @@
           <a:srgbClr val="000000"/>
         </a:buClr>
         <a:buFont typeface="Arial"/>
-        <a:defRPr b="0" i="0" sz="1400" u="none" cap="none" strike="noStrike">
+        <a:defRPr sz="1400" b="0" i="0" u="none" strike="noStrike" cap="none">
           <a:solidFill>
             <a:srgbClr val="000000"/>
           </a:solidFill>
@@ -7973,7 +8083,7 @@
           <a:sym typeface="Arial"/>
         </a:defRPr>
       </a:lvl7pPr>
-      <a:lvl8pPr lvl="7" marR="0" rtl="0" algn="l">
+      <a:lvl8pPr marR="0" lvl="7" algn="l" rtl="0">
         <a:lnSpc>
           <a:spcPct val="100000"/>
         </a:lnSpc>
@@ -7987,7 +8097,7 @@
           <a:srgbClr val="000000"/>
         </a:buClr>
         <a:buFont typeface="Arial"/>
-        <a:defRPr b="0" i="0" sz="1400" u="none" cap="none" strike="noStrike">
+        <a:defRPr sz="1400" b="0" i="0" u="none" strike="noStrike" cap="none">
           <a:solidFill>
             <a:srgbClr val="000000"/>
           </a:solidFill>
@@ -7997,7 +8107,7 @@
           <a:sym typeface="Arial"/>
         </a:defRPr>
       </a:lvl8pPr>
-      <a:lvl9pPr lvl="8" marR="0" rtl="0" algn="l">
+      <a:lvl9pPr marR="0" lvl="8" algn="l" rtl="0">
         <a:lnSpc>
           <a:spcPct val="100000"/>
         </a:lnSpc>
@@ -8011,7 +8121,7 @@
           <a:srgbClr val="000000"/>
         </a:buClr>
         <a:buFont typeface="Arial"/>
-        <a:defRPr b="0" i="0" sz="1400" u="none" cap="none" strike="noStrike">
+        <a:defRPr sz="1400" b="0" i="0" u="none" strike="noStrike" cap="none">
           <a:solidFill>
             <a:srgbClr val="000000"/>
           </a:solidFill>
@@ -8023,7 +8133,7 @@
       </a:lvl9pPr>
     </p:bodyStyle>
     <p:otherStyle>
-      <a:defPPr lvl="0" marR="0" rtl="0" algn="l">
+      <a:defPPr marR="0" lvl="0" algn="l" rtl="0">
         <a:lnSpc>
           <a:spcPct val="100000"/>
         </a:lnSpc>
@@ -8034,7 +8144,7 @@
           <a:spcPts val="0"/>
         </a:spcAft>
       </a:defPPr>
-      <a:lvl1pPr lvl="0" marR="0" rtl="0" algn="l">
+      <a:lvl1pPr marR="0" lvl="0" algn="l" rtl="0">
         <a:lnSpc>
           <a:spcPct val="100000"/>
         </a:lnSpc>
@@ -8048,7 +8158,7 @@
           <a:srgbClr val="000000"/>
         </a:buClr>
         <a:buFont typeface="Arial"/>
-        <a:defRPr b="0" i="0" sz="1400" u="none" cap="none" strike="noStrike">
+        <a:defRPr sz="1400" b="0" i="0" u="none" strike="noStrike" cap="none">
           <a:solidFill>
             <a:srgbClr val="000000"/>
           </a:solidFill>
@@ -8058,7 +8168,7 @@
           <a:sym typeface="Arial"/>
         </a:defRPr>
       </a:lvl1pPr>
-      <a:lvl2pPr lvl="1" marR="0" rtl="0" algn="l">
+      <a:lvl2pPr marR="0" lvl="1" algn="l" rtl="0">
         <a:lnSpc>
           <a:spcPct val="100000"/>
         </a:lnSpc>
@@ -8072,7 +8182,7 @@
           <a:srgbClr val="000000"/>
         </a:buClr>
         <a:buFont typeface="Arial"/>
-        <a:defRPr b="0" i="0" sz="1400" u="none" cap="none" strike="noStrike">
+        <a:defRPr sz="1400" b="0" i="0" u="none" strike="noStrike" cap="none">
           <a:solidFill>
             <a:srgbClr val="000000"/>
           </a:solidFill>
@@ -8082,7 +8192,7 @@
           <a:sym typeface="Arial"/>
         </a:defRPr>
       </a:lvl2pPr>
-      <a:lvl3pPr lvl="2" marR="0" rtl="0" algn="l">
+      <a:lvl3pPr marR="0" lvl="2" algn="l" rtl="0">
         <a:lnSpc>
           <a:spcPct val="100000"/>
         </a:lnSpc>
@@ -8096,7 +8206,7 @@
           <a:srgbClr val="000000"/>
         </a:buClr>
         <a:buFont typeface="Arial"/>
-        <a:defRPr b="0" i="0" sz="1400" u="none" cap="none" strike="noStrike">
+        <a:defRPr sz="1400" b="0" i="0" u="none" strike="noStrike" cap="none">
           <a:solidFill>
             <a:srgbClr val="000000"/>
           </a:solidFill>
@@ -8106,7 +8216,7 @@
           <a:sym typeface="Arial"/>
         </a:defRPr>
       </a:lvl3pPr>
-      <a:lvl4pPr lvl="3" marR="0" rtl="0" algn="l">
+      <a:lvl4pPr marR="0" lvl="3" algn="l" rtl="0">
         <a:lnSpc>
           <a:spcPct val="100000"/>
         </a:lnSpc>
@@ -8120,7 +8230,7 @@
           <a:srgbClr val="000000"/>
         </a:buClr>
         <a:buFont typeface="Arial"/>
-        <a:defRPr b="0" i="0" sz="1400" u="none" cap="none" strike="noStrike">
+        <a:defRPr sz="1400" b="0" i="0" u="none" strike="noStrike" cap="none">
           <a:solidFill>
             <a:srgbClr val="000000"/>
           </a:solidFill>
@@ -8130,7 +8240,7 @@
           <a:sym typeface="Arial"/>
         </a:defRPr>
       </a:lvl4pPr>
-      <a:lvl5pPr lvl="4" marR="0" rtl="0" algn="l">
+      <a:lvl5pPr marR="0" lvl="4" algn="l" rtl="0">
         <a:lnSpc>
           <a:spcPct val="100000"/>
         </a:lnSpc>
@@ -8144,7 +8254,7 @@
           <a:srgbClr val="000000"/>
         </a:buClr>
         <a:buFont typeface="Arial"/>
-        <a:defRPr b="0" i="0" sz="1400" u="none" cap="none" strike="noStrike">
+        <a:defRPr sz="1400" b="0" i="0" u="none" strike="noStrike" cap="none">
           <a:solidFill>
             <a:srgbClr val="000000"/>
           </a:solidFill>
@@ -8154,7 +8264,7 @@
           <a:sym typeface="Arial"/>
         </a:defRPr>
       </a:lvl5pPr>
-      <a:lvl6pPr lvl="5" marR="0" rtl="0" algn="l">
+      <a:lvl6pPr marR="0" lvl="5" algn="l" rtl="0">
         <a:lnSpc>
           <a:spcPct val="100000"/>
         </a:lnSpc>
@@ -8168,7 +8278,7 @@
           <a:srgbClr val="000000"/>
         </a:buClr>
         <a:buFont typeface="Arial"/>
-        <a:defRPr b="0" i="0" sz="1400" u="none" cap="none" strike="noStrike">
+        <a:defRPr sz="1400" b="0" i="0" u="none" strike="noStrike" cap="none">
           <a:solidFill>
             <a:srgbClr val="000000"/>
           </a:solidFill>
@@ -8178,7 +8288,7 @@
           <a:sym typeface="Arial"/>
         </a:defRPr>
       </a:lvl6pPr>
-      <a:lvl7pPr lvl="6" marR="0" rtl="0" algn="l">
+      <a:lvl7pPr marR="0" lvl="6" algn="l" rtl="0">
         <a:lnSpc>
           <a:spcPct val="100000"/>
         </a:lnSpc>
@@ -8192,7 +8302,7 @@
           <a:srgbClr val="000000"/>
         </a:buClr>
         <a:buFont typeface="Arial"/>
-        <a:defRPr b="0" i="0" sz="1400" u="none" cap="none" strike="noStrike">
+        <a:defRPr sz="1400" b="0" i="0" u="none" strike="noStrike" cap="none">
           <a:solidFill>
             <a:srgbClr val="000000"/>
           </a:solidFill>
@@ -8202,7 +8312,7 @@
           <a:sym typeface="Arial"/>
         </a:defRPr>
       </a:lvl7pPr>
-      <a:lvl8pPr lvl="7" marR="0" rtl="0" algn="l">
+      <a:lvl8pPr marR="0" lvl="7" algn="l" rtl="0">
         <a:lnSpc>
           <a:spcPct val="100000"/>
         </a:lnSpc>
@@ -8216,7 +8326,7 @@
           <a:srgbClr val="000000"/>
         </a:buClr>
         <a:buFont typeface="Arial"/>
-        <a:defRPr b="0" i="0" sz="1400" u="none" cap="none" strike="noStrike">
+        <a:defRPr sz="1400" b="0" i="0" u="none" strike="noStrike" cap="none">
           <a:solidFill>
             <a:srgbClr val="000000"/>
           </a:solidFill>
@@ -8226,7 +8336,7 @@
           <a:sym typeface="Arial"/>
         </a:defRPr>
       </a:lvl8pPr>
-      <a:lvl9pPr lvl="8" marR="0" rtl="0" algn="l">
+      <a:lvl9pPr marR="0" lvl="8" algn="l" rtl="0">
         <a:lnSpc>
           <a:spcPct val="100000"/>
         </a:lnSpc>
@@ -8240,7 +8350,7 @@
           <a:srgbClr val="000000"/>
         </a:buClr>
         <a:buFont typeface="Arial"/>
-        <a:defRPr b="0" i="0" sz="1400" u="none" cap="none" strike="noStrike">
+        <a:defRPr sz="1400" b="0" i="0" u="none" strike="noStrike" cap="none">
           <a:solidFill>
             <a:srgbClr val="000000"/>
           </a:solidFill>
@@ -8256,11 +8366,11 @@
 </file>
 
 <file path=ppt/slides/slide1.xml><?xml version="1.0" encoding="utf-8"?>
-<p:sld xmlns:a="http://schemas.openxmlformats.org/drawingml/2006/main" xmlns:r="http://schemas.openxmlformats.org/officeDocument/2006/relationships" xmlns:mc="http://schemas.openxmlformats.org/markup-compatibility/2006" xmlns:mv="urn:schemas-microsoft-com:mac:vml" xmlns:p="http://schemas.openxmlformats.org/presentationml/2006/main" xmlns:c="http://schemas.openxmlformats.org/drawingml/2006/chart" xmlns:dgm="http://schemas.openxmlformats.org/drawingml/2006/diagram" xmlns:o="urn:schemas-microsoft-com:office:office" xmlns:v="urn:schemas-microsoft-com:vml" xmlns:pvml="urn:schemas-microsoft-com:office:powerpoint" xmlns:com="http://schemas.openxmlformats.org/drawingml/2006/compatibility" xmlns:p14="http://schemas.microsoft.com/office/powerpoint/2010/main" xmlns:p15="http://schemas.microsoft.com/office/powerpoint/2012/main" xmlns:ahyp="http://schemas.microsoft.com/office/drawing/2018/hyperlinkcolor">
+<p:sld xmlns:a="http://schemas.openxmlformats.org/drawingml/2006/main" xmlns:r="http://schemas.openxmlformats.org/officeDocument/2006/relationships" xmlns:p="http://schemas.openxmlformats.org/presentationml/2006/main">
   <p:cSld>
     <p:spTree>
       <p:nvGrpSpPr>
-        <p:cNvPr id="51" name="Shape 51"/>
+        <p:cNvPr id="1" name="Shape 51"/>
         <p:cNvGrpSpPr/>
         <p:nvPr/>
       </p:nvGrpSpPr>
@@ -8305,12 +8415,12 @@
           </a:ln>
         </p:spPr>
         <p:txBody>
-          <a:bodyPr anchorCtr="0" anchor="t" bIns="45700" lIns="91425" spcFirstLastPara="1" rIns="91425" wrap="square" tIns="45700">
+          <a:bodyPr spcFirstLastPara="1" wrap="square" lIns="91425" tIns="45700" rIns="91425" bIns="45700" anchor="t" anchorCtr="0">
             <a:spAutoFit/>
           </a:bodyPr>
           <a:lstStyle/>
           <a:p>
-            <a:pPr indent="0" lvl="0" marL="0" marR="0" rtl="0" algn="l">
+            <a:pPr marL="0" marR="0" lvl="0" indent="0" algn="l" rtl="0">
               <a:lnSpc>
                 <a:spcPct val="100000"/>
               </a:lnSpc>
@@ -8328,7 +8438,7 @@
               <a:buNone/>
             </a:pPr>
             <a:r>
-              <a:rPr b="0" i="0" lang="ko-KR" sz="4800" u="none" cap="none" strike="noStrike">
+              <a:rPr lang="ko-KR" sz="4800" b="0" i="0" u="none" strike="noStrike" cap="none">
                 <a:solidFill>
                   <a:schemeClr val="lt1"/>
                 </a:solidFill>
@@ -8339,7 +8449,7 @@
               </a:rPr>
               <a:t>Aim</a:t>
             </a:r>
-            <a:endParaRPr b="0" i="0" sz="4800" u="none" cap="none" strike="noStrike">
+            <a:endParaRPr sz="4800" b="0" i="0" u="none" strike="noStrike" cap="none">
               <a:solidFill>
                 <a:schemeClr val="lt1"/>
               </a:solidFill>
@@ -8384,12 +8494,12 @@
           </a:ln>
         </p:spPr>
         <p:txBody>
-          <a:bodyPr anchorCtr="0" anchor="t" bIns="45700" lIns="91425" spcFirstLastPara="1" rIns="91425" wrap="square" tIns="45700">
+          <a:bodyPr spcFirstLastPara="1" wrap="square" lIns="91425" tIns="45700" rIns="91425" bIns="45700" anchor="t" anchorCtr="0">
             <a:spAutoFit/>
           </a:bodyPr>
           <a:lstStyle/>
           <a:p>
-            <a:pPr indent="0" lvl="0" marL="0" marR="0" rtl="0" algn="l">
+            <a:pPr marL="0" marR="0" lvl="0" indent="0" algn="l" rtl="0">
               <a:lnSpc>
                 <a:spcPct val="100000"/>
               </a:lnSpc>
@@ -8407,7 +8517,7 @@
               <a:buNone/>
             </a:pPr>
             <a:r>
-              <a:rPr b="0" i="0" lang="ko-KR" sz="4800" u="none" cap="none" strike="noStrike">
+              <a:rPr lang="ko-KR" sz="4800" b="0" i="0" u="none" strike="noStrike" cap="none">
                 <a:solidFill>
                   <a:schemeClr val="lt1"/>
                 </a:solidFill>
@@ -8418,7 +8528,7 @@
               </a:rPr>
               <a:t>Introduction</a:t>
             </a:r>
-            <a:endParaRPr b="0" i="0" sz="4800" u="none" cap="none" strike="noStrike">
+            <a:endParaRPr sz="4800" b="0" i="0" u="none" strike="noStrike" cap="none">
               <a:solidFill>
                 <a:schemeClr val="lt1"/>
               </a:solidFill>
@@ -8450,12 +8560,12 @@
           </a:ln>
         </p:spPr>
         <p:txBody>
-          <a:bodyPr anchorCtr="0" anchor="t" bIns="45700" lIns="91425" spcFirstLastPara="1" rIns="91425" wrap="square" tIns="45700">
+          <a:bodyPr spcFirstLastPara="1" wrap="square" lIns="91425" tIns="45700" rIns="91425" bIns="45700" anchor="t" anchorCtr="0">
             <a:spAutoFit/>
           </a:bodyPr>
           <a:lstStyle/>
           <a:p>
-            <a:pPr indent="0" lvl="0" marL="0" marR="0" rtl="0" algn="r">
+            <a:pPr marL="0" marR="0" lvl="0" indent="0" algn="r" rtl="0">
               <a:lnSpc>
                 <a:spcPct val="100000"/>
               </a:lnSpc>
@@ -8473,7 +8583,7 @@
               <a:buNone/>
             </a:pPr>
             <a:r>
-              <a:rPr b="0" i="0" lang="ko-KR" sz="4200" u="none" cap="none" strike="noStrike">
+              <a:rPr lang="ko-KR" sz="4200" b="0" i="0" u="none" strike="noStrike" cap="none" dirty="0">
                 <a:solidFill>
                   <a:schemeClr val="lt1"/>
                 </a:solidFill>
@@ -8485,15 +8595,19 @@
               <a:t>202</a:t>
             </a:r>
             <a:r>
-              <a:rPr lang="ko-KR" sz="4200">
+              <a:rPr lang="en-US" altLang="ko-KR" sz="4200" b="0" i="0" u="none" strike="noStrike" cap="none" dirty="0">
                 <a:solidFill>
                   <a:schemeClr val="lt1"/>
                 </a:solidFill>
+                <a:latin typeface="Arial"/>
+                <a:ea typeface="Arial"/>
+                <a:cs typeface="Arial"/>
+                <a:sym typeface="Arial"/>
               </a:rPr>
-              <a:t>5</a:t>
+              <a:t>6</a:t>
             </a:r>
             <a:r>
-              <a:rPr b="0" i="0" lang="ko-KR" sz="4200" u="none" cap="none" strike="noStrike">
+              <a:rPr lang="ko-KR" sz="4200" b="0" i="0" u="none" strike="noStrike" cap="none" dirty="0">
                 <a:solidFill>
                   <a:schemeClr val="lt1"/>
                 </a:solidFill>
@@ -8504,7 +8618,7 @@
               </a:rPr>
               <a:t> CUAI 중앙대학교 인공지능 학회 하계 컨퍼런스</a:t>
             </a:r>
-            <a:endParaRPr b="0" i="0" sz="1400" u="none" cap="none" strike="noStrike">
+            <a:endParaRPr sz="1400" b="0" i="0" u="none" strike="noStrike" cap="none" dirty="0">
               <a:solidFill>
                 <a:srgbClr val="000000"/>
               </a:solidFill>
@@ -8536,12 +8650,12 @@
           </a:ln>
         </p:spPr>
         <p:txBody>
-          <a:bodyPr anchorCtr="0" anchor="t" bIns="45700" lIns="91425" spcFirstLastPara="1" rIns="91425" wrap="square" tIns="45700">
+          <a:bodyPr spcFirstLastPara="1" wrap="square" lIns="91425" tIns="45700" rIns="91425" bIns="45700" anchor="t" anchorCtr="0">
             <a:spAutoFit/>
           </a:bodyPr>
           <a:lstStyle/>
           <a:p>
-            <a:pPr indent="0" lvl="0" marL="0" marR="0" rtl="0" algn="r">
+            <a:pPr marL="0" marR="0" lvl="0" indent="0" algn="r" rtl="0">
               <a:lnSpc>
                 <a:spcPct val="100000"/>
               </a:lnSpc>
@@ -8559,7 +8673,7 @@
               <a:buNone/>
             </a:pPr>
             <a:r>
-              <a:rPr b="0" i="0" lang="ko-KR" sz="3200" u="none" cap="none" strike="noStrike">
+              <a:rPr lang="ko-KR" sz="3200" b="0" i="0" u="none" strike="noStrike" cap="none" dirty="0" err="1">
                 <a:solidFill>
                   <a:schemeClr val="lt1"/>
                 </a:solidFill>
@@ -8568,18 +8682,22 @@
                 <a:cs typeface="Arial"/>
                 <a:sym typeface="Arial"/>
               </a:rPr>
-              <a:t>Proceeding of 202</a:t>
+              <a:t>Proceeding</a:t>
             </a:r>
             <a:r>
-              <a:rPr lang="ko-KR" sz="3200">
+              <a:rPr lang="ko-KR" sz="3200" b="0" i="0" u="none" strike="noStrike" cap="none" dirty="0">
                 <a:solidFill>
                   <a:schemeClr val="lt1"/>
                 </a:solidFill>
+                <a:latin typeface="Arial"/>
+                <a:ea typeface="Arial"/>
+                <a:cs typeface="Arial"/>
+                <a:sym typeface="Arial"/>
               </a:rPr>
-              <a:t>5</a:t>
+              <a:t> of 202</a:t>
             </a:r>
             <a:r>
-              <a:rPr b="0" i="0" lang="ko-KR" sz="3200" u="none" cap="none" strike="noStrike">
+              <a:rPr lang="en-US" altLang="ko-KR" sz="3200" b="0" i="0" u="none" strike="noStrike" cap="none" dirty="0">
                 <a:solidFill>
                   <a:schemeClr val="lt1"/>
                 </a:solidFill>
@@ -8588,9 +8706,153 @@
                 <a:cs typeface="Arial"/>
                 <a:sym typeface="Arial"/>
               </a:rPr>
-              <a:t> Chung-Ang University Artificial Intelligence Summer Conference</a:t>
+              <a:t>6</a:t>
             </a:r>
-            <a:endParaRPr b="0" i="0" sz="3200" u="none" cap="none" strike="noStrike">
+            <a:r>
+              <a:rPr lang="ko-KR" sz="3200" b="0" i="0" u="none" strike="noStrike" cap="none" dirty="0">
+                <a:solidFill>
+                  <a:schemeClr val="lt1"/>
+                </a:solidFill>
+                <a:latin typeface="Arial"/>
+                <a:ea typeface="Arial"/>
+                <a:cs typeface="Arial"/>
+                <a:sym typeface="Arial"/>
+              </a:rPr>
+              <a:t> </a:t>
+            </a:r>
+            <a:r>
+              <a:rPr lang="ko-KR" sz="3200" b="0" i="0" u="none" strike="noStrike" cap="none" dirty="0" err="1">
+                <a:solidFill>
+                  <a:schemeClr val="lt1"/>
+                </a:solidFill>
+                <a:latin typeface="Arial"/>
+                <a:ea typeface="Arial"/>
+                <a:cs typeface="Arial"/>
+                <a:sym typeface="Arial"/>
+              </a:rPr>
+              <a:t>Chung-Ang</a:t>
+            </a:r>
+            <a:r>
+              <a:rPr lang="ko-KR" sz="3200" b="0" i="0" u="none" strike="noStrike" cap="none" dirty="0">
+                <a:solidFill>
+                  <a:schemeClr val="lt1"/>
+                </a:solidFill>
+                <a:latin typeface="Arial"/>
+                <a:ea typeface="Arial"/>
+                <a:cs typeface="Arial"/>
+                <a:sym typeface="Arial"/>
+              </a:rPr>
+              <a:t> </a:t>
+            </a:r>
+            <a:r>
+              <a:rPr lang="ko-KR" sz="3200" b="0" i="0" u="none" strike="noStrike" cap="none" dirty="0" err="1">
+                <a:solidFill>
+                  <a:schemeClr val="lt1"/>
+                </a:solidFill>
+                <a:latin typeface="Arial"/>
+                <a:ea typeface="Arial"/>
+                <a:cs typeface="Arial"/>
+                <a:sym typeface="Arial"/>
+              </a:rPr>
+              <a:t>University</a:t>
+            </a:r>
+            <a:r>
+              <a:rPr lang="ko-KR" sz="3200" b="0" i="0" u="none" strike="noStrike" cap="none" dirty="0">
+                <a:solidFill>
+                  <a:schemeClr val="lt1"/>
+                </a:solidFill>
+                <a:latin typeface="Arial"/>
+                <a:ea typeface="Arial"/>
+                <a:cs typeface="Arial"/>
+                <a:sym typeface="Arial"/>
+              </a:rPr>
+              <a:t> </a:t>
+            </a:r>
+            <a:r>
+              <a:rPr lang="ko-KR" sz="3200" b="0" i="0" u="none" strike="noStrike" cap="none" dirty="0" err="1">
+                <a:solidFill>
+                  <a:schemeClr val="lt1"/>
+                </a:solidFill>
+                <a:latin typeface="Arial"/>
+                <a:ea typeface="Arial"/>
+                <a:cs typeface="Arial"/>
+                <a:sym typeface="Arial"/>
+              </a:rPr>
+              <a:t>Artificial</a:t>
+            </a:r>
+            <a:r>
+              <a:rPr lang="ko-KR" sz="3200" b="0" i="0" u="none" strike="noStrike" cap="none" dirty="0">
+                <a:solidFill>
+                  <a:schemeClr val="lt1"/>
+                </a:solidFill>
+                <a:latin typeface="Arial"/>
+                <a:ea typeface="Arial"/>
+                <a:cs typeface="Arial"/>
+                <a:sym typeface="Arial"/>
+              </a:rPr>
+              <a:t> </a:t>
+            </a:r>
+            <a:r>
+              <a:rPr lang="ko-KR" sz="3200" b="0" i="0" u="none" strike="noStrike" cap="none" dirty="0" err="1">
+                <a:solidFill>
+                  <a:schemeClr val="lt1"/>
+                </a:solidFill>
+                <a:latin typeface="Arial"/>
+                <a:ea typeface="Arial"/>
+                <a:cs typeface="Arial"/>
+                <a:sym typeface="Arial"/>
+              </a:rPr>
+              <a:t>Intelligence</a:t>
+            </a:r>
+            <a:r>
+              <a:rPr lang="ko-KR" sz="3200" b="0" i="0" u="none" strike="noStrike" cap="none" dirty="0">
+                <a:solidFill>
+                  <a:schemeClr val="lt1"/>
+                </a:solidFill>
+                <a:latin typeface="Arial"/>
+                <a:ea typeface="Arial"/>
+                <a:cs typeface="Arial"/>
+                <a:sym typeface="Arial"/>
+              </a:rPr>
+              <a:t> </a:t>
+            </a:r>
+            <a:r>
+              <a:rPr lang="ko-KR" sz="3200" b="0" i="0" u="none" strike="noStrike" cap="none" dirty="0" err="1">
+                <a:solidFill>
+                  <a:schemeClr val="lt1"/>
+                </a:solidFill>
+                <a:latin typeface="Arial"/>
+                <a:ea typeface="Arial"/>
+                <a:cs typeface="Arial"/>
+                <a:sym typeface="Arial"/>
+              </a:rPr>
+              <a:t>Summer</a:t>
+            </a:r>
+            <a:r>
+              <a:rPr lang="ko-KR" sz="3200" b="0" i="0" u="none" strike="noStrike" cap="none" dirty="0">
+                <a:solidFill>
+                  <a:schemeClr val="lt1"/>
+                </a:solidFill>
+                <a:latin typeface="Arial"/>
+                <a:ea typeface="Arial"/>
+                <a:cs typeface="Arial"/>
+                <a:sym typeface="Arial"/>
+              </a:rPr>
+              <a:t> </a:t>
+            </a:r>
+            <a:r>
+              <a:rPr lang="ko-KR" sz="3200" b="0" i="0" u="none" strike="noStrike" cap="none" dirty="0" err="1">
+                <a:solidFill>
+                  <a:schemeClr val="lt1"/>
+                </a:solidFill>
+                <a:latin typeface="Arial"/>
+                <a:ea typeface="Arial"/>
+                <a:cs typeface="Arial"/>
+                <a:sym typeface="Arial"/>
+              </a:rPr>
+              <a:t>Conference</a:t>
+            </a:r>
+            <a:endParaRPr sz="3200" b="0" i="0" u="none" strike="noStrike" cap="none" dirty="0">
               <a:solidFill>
                 <a:schemeClr val="lt1"/>
               </a:solidFill>
@@ -8635,12 +8897,12 @@
           </a:ln>
         </p:spPr>
         <p:txBody>
-          <a:bodyPr anchorCtr="0" anchor="t" bIns="45700" lIns="91425" spcFirstLastPara="1" rIns="91425" wrap="square" tIns="45700">
+          <a:bodyPr spcFirstLastPara="1" wrap="square" lIns="91425" tIns="45700" rIns="91425" bIns="45700" anchor="t" anchorCtr="0">
             <a:spAutoFit/>
           </a:bodyPr>
           <a:lstStyle/>
           <a:p>
-            <a:pPr indent="0" lvl="0" marL="0" marR="0" rtl="0" algn="l">
+            <a:pPr marL="0" marR="0" lvl="0" indent="0" algn="l" rtl="0">
               <a:lnSpc>
                 <a:spcPct val="100000"/>
               </a:lnSpc>
@@ -8658,7 +8920,7 @@
               <a:buNone/>
             </a:pPr>
             <a:r>
-              <a:rPr b="0" i="0" lang="ko-KR" sz="4800" u="none" cap="none" strike="noStrike">
+              <a:rPr lang="ko-KR" sz="4800" b="0" i="0" u="none" strike="noStrike" cap="none">
                 <a:solidFill>
                   <a:schemeClr val="lt1"/>
                 </a:solidFill>
@@ -8669,7 +8931,7 @@
               </a:rPr>
               <a:t>  Abstract (나눔스퀘어 54pt) </a:t>
             </a:r>
-            <a:endParaRPr b="0" i="0" sz="4800" u="none" cap="none" strike="noStrike">
+            <a:endParaRPr sz="4800" b="0" i="0" u="none" strike="noStrike" cap="none">
               <a:solidFill>
                 <a:schemeClr val="lt1"/>
               </a:solidFill>
@@ -8714,12 +8976,12 @@
           </a:ln>
         </p:spPr>
         <p:txBody>
-          <a:bodyPr anchorCtr="0" anchor="t" bIns="45700" lIns="91425" spcFirstLastPara="1" rIns="91425" wrap="square" tIns="45700">
+          <a:bodyPr spcFirstLastPara="1" wrap="square" lIns="91425" tIns="45700" rIns="91425" bIns="45700" anchor="t" anchorCtr="0">
             <a:spAutoFit/>
           </a:bodyPr>
           <a:lstStyle/>
           <a:p>
-            <a:pPr indent="0" lvl="0" marL="0" marR="0" rtl="0" algn="l">
+            <a:pPr marL="0" marR="0" lvl="0" indent="0" algn="l" rtl="0">
               <a:lnSpc>
                 <a:spcPct val="100000"/>
               </a:lnSpc>
@@ -8737,7 +8999,7 @@
               <a:buNone/>
             </a:pPr>
             <a:r>
-              <a:rPr b="0" i="0" lang="ko-KR" sz="4800" u="none" cap="none" strike="noStrike">
+              <a:rPr lang="ko-KR" sz="4800" b="0" i="0" u="none" strike="noStrike" cap="none">
                 <a:solidFill>
                   <a:schemeClr val="lt1"/>
                 </a:solidFill>
@@ -8748,7 +9010,7 @@
               </a:rPr>
               <a:t>Methods</a:t>
             </a:r>
-            <a:endParaRPr b="0" i="0" sz="4800" u="none" cap="none" strike="noStrike">
+            <a:endParaRPr sz="4800" b="0" i="0" u="none" strike="noStrike" cap="none">
               <a:solidFill>
                 <a:schemeClr val="lt1"/>
               </a:solidFill>
@@ -8793,12 +9055,12 @@
           </a:ln>
         </p:spPr>
         <p:txBody>
-          <a:bodyPr anchorCtr="0" anchor="t" bIns="45700" lIns="91425" spcFirstLastPara="1" rIns="91425" wrap="square" tIns="45700">
+          <a:bodyPr spcFirstLastPara="1" wrap="square" lIns="91425" tIns="45700" rIns="91425" bIns="45700" anchor="t" anchorCtr="0">
             <a:spAutoFit/>
           </a:bodyPr>
           <a:lstStyle/>
           <a:p>
-            <a:pPr indent="0" lvl="0" marL="0" marR="0" rtl="0" algn="l">
+            <a:pPr marL="0" marR="0" lvl="0" indent="0" algn="l" rtl="0">
               <a:lnSpc>
                 <a:spcPct val="100000"/>
               </a:lnSpc>
@@ -8816,7 +9078,7 @@
               <a:buNone/>
             </a:pPr>
             <a:r>
-              <a:rPr b="0" i="0" lang="ko-KR" sz="4800" u="none" cap="none" strike="noStrike">
+              <a:rPr lang="ko-KR" sz="4800" b="0" i="0" u="none" strike="noStrike" cap="none">
                 <a:solidFill>
                   <a:schemeClr val="lt1"/>
                 </a:solidFill>
@@ -8827,7 +9089,7 @@
               </a:rPr>
               <a:t>Results</a:t>
             </a:r>
-            <a:endParaRPr b="0" i="0" sz="4800" u="none" cap="none" strike="noStrike">
+            <a:endParaRPr sz="4800" b="0" i="0" u="none" strike="noStrike" cap="none">
               <a:solidFill>
                 <a:schemeClr val="lt1"/>
               </a:solidFill>
@@ -8872,12 +9134,12 @@
           </a:ln>
         </p:spPr>
         <p:txBody>
-          <a:bodyPr anchorCtr="0" anchor="t" bIns="45700" lIns="91425" spcFirstLastPara="1" rIns="91425" wrap="square" tIns="45700">
+          <a:bodyPr spcFirstLastPara="1" wrap="square" lIns="91425" tIns="45700" rIns="91425" bIns="45700" anchor="t" anchorCtr="0">
             <a:spAutoFit/>
           </a:bodyPr>
           <a:lstStyle/>
           <a:p>
-            <a:pPr indent="0" lvl="0" marL="0" marR="0" rtl="0" algn="l">
+            <a:pPr marL="0" marR="0" lvl="0" indent="0" algn="l" rtl="0">
               <a:lnSpc>
                 <a:spcPct val="100000"/>
               </a:lnSpc>
@@ -8895,7 +9157,7 @@
               <a:buNone/>
             </a:pPr>
             <a:r>
-              <a:rPr b="0" i="0" lang="ko-KR" sz="4800" u="none" cap="none" strike="noStrike">
+              <a:rPr lang="ko-KR" sz="4800" b="0" i="0" u="none" strike="noStrike" cap="none">
                 <a:solidFill>
                   <a:schemeClr val="lt1"/>
                 </a:solidFill>
@@ -8906,7 +9168,7 @@
               </a:rPr>
               <a:t>Conclusion</a:t>
             </a:r>
-            <a:endParaRPr b="0" i="0" sz="4800" u="none" cap="none" strike="noStrike">
+            <a:endParaRPr sz="4800" b="0" i="0" u="none" strike="noStrike" cap="none">
               <a:solidFill>
                 <a:schemeClr val="lt1"/>
               </a:solidFill>
@@ -8938,12 +9200,12 @@
           </a:ln>
         </p:spPr>
         <p:txBody>
-          <a:bodyPr anchorCtr="0" anchor="t" bIns="45700" lIns="91425" spcFirstLastPara="1" rIns="91425" wrap="square" tIns="45700">
+          <a:bodyPr spcFirstLastPara="1" wrap="square" lIns="91425" tIns="45700" rIns="91425" bIns="45700" anchor="t" anchorCtr="0">
             <a:spAutoFit/>
           </a:bodyPr>
           <a:lstStyle/>
           <a:p>
-            <a:pPr indent="0" lvl="0" marL="0" marR="0" rtl="0" algn="l">
+            <a:pPr marL="0" marR="0" lvl="0" indent="0" algn="l" rtl="0">
               <a:lnSpc>
                 <a:spcPct val="100000"/>
               </a:lnSpc>
@@ -8961,7 +9223,7 @@
               <a:buNone/>
             </a:pPr>
             <a:r>
-              <a:rPr b="0" i="0" lang="ko-KR" sz="8000" u="none" cap="none" strike="noStrike">
+              <a:rPr lang="ko-KR" sz="8000" b="0" i="0" u="none" strike="noStrike" cap="none">
                 <a:solidFill>
                   <a:schemeClr val="lt1"/>
                 </a:solidFill>
@@ -8972,7 +9234,7 @@
               </a:rPr>
               <a:t>프로젝트 제목 (나눔스퀘어, 80pt)</a:t>
             </a:r>
-            <a:endParaRPr b="0" i="0" sz="8000" u="none" cap="none" strike="noStrike">
+            <a:endParaRPr sz="8000" b="0" i="0" u="none" strike="noStrike" cap="none">
               <a:solidFill>
                 <a:schemeClr val="lt1"/>
               </a:solidFill>
@@ -9004,12 +9266,12 @@
           </a:ln>
         </p:spPr>
         <p:txBody>
-          <a:bodyPr anchorCtr="0" anchor="t" bIns="45700" lIns="91425" spcFirstLastPara="1" rIns="91425" wrap="square" tIns="45700">
+          <a:bodyPr spcFirstLastPara="1" wrap="square" lIns="91425" tIns="45700" rIns="91425" bIns="45700" anchor="t" anchorCtr="0">
             <a:spAutoFit/>
           </a:bodyPr>
           <a:lstStyle/>
           <a:p>
-            <a:pPr indent="0" lvl="0" marL="0" marR="0" rtl="0" algn="l">
+            <a:pPr marL="0" marR="0" lvl="0" indent="0" algn="l" rtl="0">
               <a:lnSpc>
                 <a:spcPct val="100000"/>
               </a:lnSpc>
@@ -9027,7 +9289,7 @@
               <a:buNone/>
             </a:pPr>
             <a:r>
-              <a:rPr b="0" i="0" lang="ko-KR" sz="4400" u="none" cap="none" strike="noStrike">
+              <a:rPr lang="ko-KR" sz="4400" b="0" i="0" u="none" strike="noStrike" cap="none">
                 <a:solidFill>
                   <a:schemeClr val="lt1"/>
                 </a:solidFill>
@@ -9038,7 +9300,7 @@
               </a:rPr>
               <a:t>팀원1 (학과), 팀원2 (학과) ... (나눔스퀘어 54pt)</a:t>
             </a:r>
-            <a:endParaRPr b="0" i="0" sz="4400" u="none" cap="none" strike="noStrike">
+            <a:endParaRPr sz="4400" b="0" i="0" u="none" strike="noStrike" cap="none">
               <a:solidFill>
                 <a:schemeClr val="lt1"/>
               </a:solidFill>
@@ -9059,7 +9321,288 @@
 </file>
 
 <file path=ppt/theme/theme1.xml><?xml version="1.0" encoding="utf-8"?>
-<a:theme xmlns:a="http://schemas.openxmlformats.org/drawingml/2006/main" xmlns:r="http://schemas.openxmlformats.org/officeDocument/2006/relationships">
+<a:theme xmlns:a="http://schemas.openxmlformats.org/drawingml/2006/main" name="Simple Light">
+  <a:themeElements>
+    <a:clrScheme name="Simple Light">
+      <a:dk1>
+        <a:srgbClr val="000000"/>
+      </a:dk1>
+      <a:lt1>
+        <a:srgbClr val="FFFFFF"/>
+      </a:lt1>
+      <a:dk2>
+        <a:srgbClr val="595959"/>
+      </a:dk2>
+      <a:lt2>
+        <a:srgbClr val="EEEEEE"/>
+      </a:lt2>
+      <a:accent1>
+        <a:srgbClr val="4285F4"/>
+      </a:accent1>
+      <a:accent2>
+        <a:srgbClr val="212121"/>
+      </a:accent2>
+      <a:accent3>
+        <a:srgbClr val="78909C"/>
+      </a:accent3>
+      <a:accent4>
+        <a:srgbClr val="FFAB40"/>
+      </a:accent4>
+      <a:accent5>
+        <a:srgbClr val="0097A7"/>
+      </a:accent5>
+      <a:accent6>
+        <a:srgbClr val="EEFF41"/>
+      </a:accent6>
+      <a:hlink>
+        <a:srgbClr val="0097A7"/>
+      </a:hlink>
+      <a:folHlink>
+        <a:srgbClr val="0097A7"/>
+      </a:folHlink>
+    </a:clrScheme>
+    <a:fontScheme name="Office">
+      <a:majorFont>
+        <a:latin typeface="Arial"/>
+        <a:ea typeface=""/>
+        <a:cs typeface=""/>
+        <a:font script="Jpan" typeface="ＭＳ Ｐゴシック"/>
+        <a:font script="Hang" typeface="맑은 고딕"/>
+        <a:font script="Hans" typeface="宋体"/>
+        <a:font script="Hant" typeface="新細明體"/>
+        <a:font script="Arab" typeface="Times New Roman"/>
+        <a:font script="Hebr" typeface="Times New Roman"/>
+        <a:font script="Thai" typeface="Angsana New"/>
+        <a:font script="Ethi" typeface="Nyala"/>
+        <a:font script="Beng" typeface="Vrinda"/>
+        <a:font script="Gujr" typeface="Shruti"/>
+        <a:font script="Khmr" typeface="MoolBoran"/>
+        <a:font script="Knda" typeface="Tunga"/>
+        <a:font script="Guru" typeface="Raavi"/>
+        <a:font script="Cans" typeface="Euphemia"/>
+        <a:font script="Cher" typeface="Plantagenet Cherokee"/>
+        <a:font script="Yiii" typeface="Microsoft Yi Baiti"/>
+        <a:font script="Tibt" typeface="Microsoft Himalaya"/>
+        <a:font script="Thaa" typeface="MV Boli"/>
+        <a:font script="Deva" typeface="Mangal"/>
+        <a:font script="Telu" typeface="Gautami"/>
+        <a:font script="Taml" typeface="Latha"/>
+        <a:font script="Syrc" typeface="Estrangelo Edessa"/>
+        <a:font script="Orya" typeface="Kalinga"/>
+        <a:font script="Mlym" typeface="Kartika"/>
+        <a:font script="Laoo" typeface="DokChampa"/>
+        <a:font script="Sinh" typeface="Iskoola Pota"/>
+        <a:font script="Mong" typeface="Mongolian Baiti"/>
+        <a:font script="Viet" typeface="Times New Roman"/>
+        <a:font script="Uigh" typeface="Microsoft Uighur"/>
+        <a:font script="Geor" typeface="Sylfaen"/>
+      </a:majorFont>
+      <a:minorFont>
+        <a:latin typeface="Arial"/>
+        <a:ea typeface=""/>
+        <a:cs typeface=""/>
+        <a:font script="Jpan" typeface="ＭＳ Ｐゴシック"/>
+        <a:font script="Hang" typeface="맑은 고딕"/>
+        <a:font script="Hans" typeface="宋体"/>
+        <a:font script="Hant" typeface="新細明體"/>
+        <a:font script="Arab" typeface="Arial"/>
+        <a:font script="Hebr" typeface="Arial"/>
+        <a:font script="Thai" typeface="Cordia New"/>
+        <a:font script="Ethi" typeface="Nyala"/>
+        <a:font script="Beng" typeface="Vrinda"/>
+        <a:font script="Gujr" typeface="Shruti"/>
+        <a:font script="Khmr" typeface="DaunPenh"/>
+        <a:font script="Knda" typeface="Tunga"/>
+        <a:font script="Guru" typeface="Raavi"/>
+        <a:font script="Cans" typeface="Euphemia"/>
+        <a:font script="Cher" typeface="Plantagenet Cherokee"/>
+        <a:font script="Yiii" typeface="Microsoft Yi Baiti"/>
+        <a:font script="Tibt" typeface="Microsoft Himalaya"/>
+        <a:font script="Thaa" typeface="MV Boli"/>
+        <a:font script="Deva" typeface="Mangal"/>
+        <a:font script="Telu" typeface="Gautami"/>
+        <a:font script="Taml" typeface="Latha"/>
+        <a:font script="Syrc" typeface="Estrangelo Edessa"/>
+        <a:font script="Orya" typeface="Kalinga"/>
+        <a:font script="Mlym" typeface="Kartika"/>
+        <a:font script="Laoo" typeface="DokChampa"/>
+        <a:font script="Sinh" typeface="Iskoola Pota"/>
+        <a:font script="Mong" typeface="Mongolian Baiti"/>
+        <a:font script="Viet" typeface="Arial"/>
+        <a:font script="Uigh" typeface="Microsoft Uighur"/>
+        <a:font script="Geor" typeface="Sylfaen"/>
+      </a:minorFont>
+    </a:fontScheme>
+    <a:fmtScheme name="Office">
+      <a:fillStyleLst>
+        <a:solidFill>
+          <a:schemeClr val="phClr"/>
+        </a:solidFill>
+        <a:gradFill rotWithShape="1">
+          <a:gsLst>
+            <a:gs pos="0">
+              <a:schemeClr val="phClr">
+                <a:tint val="50000"/>
+                <a:satMod val="300000"/>
+              </a:schemeClr>
+            </a:gs>
+            <a:gs pos="35000">
+              <a:schemeClr val="phClr">
+                <a:tint val="37000"/>
+                <a:satMod val="300000"/>
+              </a:schemeClr>
+            </a:gs>
+            <a:gs pos="100000">
+              <a:schemeClr val="phClr">
+                <a:tint val="15000"/>
+                <a:satMod val="350000"/>
+              </a:schemeClr>
+            </a:gs>
+          </a:gsLst>
+          <a:lin ang="16200000" scaled="1"/>
+        </a:gradFill>
+        <a:gradFill rotWithShape="1">
+          <a:gsLst>
+            <a:gs pos="0">
+              <a:schemeClr val="phClr">
+                <a:tint val="100000"/>
+                <a:shade val="100000"/>
+                <a:satMod val="130000"/>
+              </a:schemeClr>
+            </a:gs>
+            <a:gs pos="100000">
+              <a:schemeClr val="phClr">
+                <a:tint val="50000"/>
+                <a:shade val="100000"/>
+                <a:satMod val="350000"/>
+              </a:schemeClr>
+            </a:gs>
+          </a:gsLst>
+          <a:lin ang="16200000" scaled="0"/>
+        </a:gradFill>
+      </a:fillStyleLst>
+      <a:lnStyleLst>
+        <a:ln w="9525" cap="flat" cmpd="sng" algn="ctr">
+          <a:solidFill>
+            <a:schemeClr val="phClr">
+              <a:shade val="95000"/>
+              <a:satMod val="105000"/>
+            </a:schemeClr>
+          </a:solidFill>
+          <a:prstDash val="solid"/>
+        </a:ln>
+        <a:ln w="25400" cap="flat" cmpd="sng" algn="ctr">
+          <a:solidFill>
+            <a:schemeClr val="phClr"/>
+          </a:solidFill>
+          <a:prstDash val="solid"/>
+        </a:ln>
+        <a:ln w="38100" cap="flat" cmpd="sng" algn="ctr">
+          <a:solidFill>
+            <a:schemeClr val="phClr"/>
+          </a:solidFill>
+          <a:prstDash val="solid"/>
+        </a:ln>
+      </a:lnStyleLst>
+      <a:effectStyleLst>
+        <a:effectStyle>
+          <a:effectLst>
+            <a:outerShdw blurRad="40000" dist="20000" dir="5400000" rotWithShape="0">
+              <a:srgbClr val="000000">
+                <a:alpha val="38000"/>
+              </a:srgbClr>
+            </a:outerShdw>
+          </a:effectLst>
+        </a:effectStyle>
+        <a:effectStyle>
+          <a:effectLst>
+            <a:outerShdw blurRad="40000" dist="23000" dir="5400000" rotWithShape="0">
+              <a:srgbClr val="000000">
+                <a:alpha val="35000"/>
+              </a:srgbClr>
+            </a:outerShdw>
+          </a:effectLst>
+        </a:effectStyle>
+        <a:effectStyle>
+          <a:effectLst>
+            <a:outerShdw blurRad="40000" dist="23000" dir="5400000" rotWithShape="0">
+              <a:srgbClr val="000000">
+                <a:alpha val="35000"/>
+              </a:srgbClr>
+            </a:outerShdw>
+          </a:effectLst>
+          <a:scene3d>
+            <a:camera prst="orthographicFront">
+              <a:rot lat="0" lon="0" rev="0"/>
+            </a:camera>
+            <a:lightRig rig="threePt" dir="t">
+              <a:rot lat="0" lon="0" rev="1200000"/>
+            </a:lightRig>
+          </a:scene3d>
+          <a:sp3d>
+            <a:bevelT w="63500" h="25400"/>
+          </a:sp3d>
+        </a:effectStyle>
+      </a:effectStyleLst>
+      <a:bgFillStyleLst>
+        <a:solidFill>
+          <a:schemeClr val="phClr"/>
+        </a:solidFill>
+        <a:gradFill rotWithShape="1">
+          <a:gsLst>
+            <a:gs pos="0">
+              <a:schemeClr val="phClr">
+                <a:tint val="40000"/>
+                <a:satMod val="350000"/>
+              </a:schemeClr>
+            </a:gs>
+            <a:gs pos="40000">
+              <a:schemeClr val="phClr">
+                <a:tint val="45000"/>
+                <a:shade val="99000"/>
+                <a:satMod val="350000"/>
+              </a:schemeClr>
+            </a:gs>
+            <a:gs pos="100000">
+              <a:schemeClr val="phClr">
+                <a:shade val="20000"/>
+                <a:satMod val="255000"/>
+              </a:schemeClr>
+            </a:gs>
+          </a:gsLst>
+          <a:path path="circle">
+            <a:fillToRect l="50000" t="-80000" r="50000" b="180000"/>
+          </a:path>
+        </a:gradFill>
+        <a:gradFill rotWithShape="1">
+          <a:gsLst>
+            <a:gs pos="0">
+              <a:schemeClr val="phClr">
+                <a:tint val="80000"/>
+                <a:satMod val="300000"/>
+              </a:schemeClr>
+            </a:gs>
+            <a:gs pos="100000">
+              <a:schemeClr val="phClr">
+                <a:shade val="30000"/>
+                <a:satMod val="200000"/>
+              </a:schemeClr>
+            </a:gs>
+          </a:gsLst>
+          <a:path path="circle">
+            <a:fillToRect l="50000" t="50000" r="50000" b="50000"/>
+          </a:path>
+        </a:gradFill>
+      </a:bgFillStyleLst>
+    </a:fmtScheme>
+  </a:themeElements>
+  <a:objectDefaults/>
+  <a:extraClrSchemeLst/>
+</a:theme>
+</file>
+
+<file path=ppt/theme/theme2.xml><?xml version="1.0" encoding="utf-8"?>
+<a:theme xmlns:a="http://schemas.openxmlformats.org/drawingml/2006/main">
   <a:themeElements>
     <a:clrScheme name="Default">
       <a:dk1>
@@ -9334,284 +9877,7 @@
       </a:bgFillStyleLst>
     </a:fmtScheme>
   </a:themeElements>
-</a:theme>
-</file>
-
-<file path=ppt/theme/theme2.xml><?xml version="1.0" encoding="utf-8"?>
-<a:theme xmlns:a="http://schemas.openxmlformats.org/drawingml/2006/main" xmlns:r="http://schemas.openxmlformats.org/officeDocument/2006/relationships" name="Simple Light">
-  <a:themeElements>
-    <a:clrScheme name="Simple Light">
-      <a:dk1>
-        <a:srgbClr val="000000"/>
-      </a:dk1>
-      <a:lt1>
-        <a:srgbClr val="FFFFFF"/>
-      </a:lt1>
-      <a:dk2>
-        <a:srgbClr val="595959"/>
-      </a:dk2>
-      <a:lt2>
-        <a:srgbClr val="EEEEEE"/>
-      </a:lt2>
-      <a:accent1>
-        <a:srgbClr val="4285F4"/>
-      </a:accent1>
-      <a:accent2>
-        <a:srgbClr val="212121"/>
-      </a:accent2>
-      <a:accent3>
-        <a:srgbClr val="78909C"/>
-      </a:accent3>
-      <a:accent4>
-        <a:srgbClr val="FFAB40"/>
-      </a:accent4>
-      <a:accent5>
-        <a:srgbClr val="0097A7"/>
-      </a:accent5>
-      <a:accent6>
-        <a:srgbClr val="EEFF41"/>
-      </a:accent6>
-      <a:hlink>
-        <a:srgbClr val="0097A7"/>
-      </a:hlink>
-      <a:folHlink>
-        <a:srgbClr val="0097A7"/>
-      </a:folHlink>
-    </a:clrScheme>
-    <a:fontScheme name="Office">
-      <a:majorFont>
-        <a:latin typeface="Arial"/>
-        <a:ea typeface=""/>
-        <a:cs typeface=""/>
-        <a:font script="Jpan" typeface="ＭＳ Ｐゴシック"/>
-        <a:font script="Hang" typeface="맑은 고딕"/>
-        <a:font script="Hans" typeface="宋体"/>
-        <a:font script="Hant" typeface="新細明體"/>
-        <a:font script="Arab" typeface="Times New Roman"/>
-        <a:font script="Hebr" typeface="Times New Roman"/>
-        <a:font script="Thai" typeface="Angsana New"/>
-        <a:font script="Ethi" typeface="Nyala"/>
-        <a:font script="Beng" typeface="Vrinda"/>
-        <a:font script="Gujr" typeface="Shruti"/>
-        <a:font script="Khmr" typeface="MoolBoran"/>
-        <a:font script="Knda" typeface="Tunga"/>
-        <a:font script="Guru" typeface="Raavi"/>
-        <a:font script="Cans" typeface="Euphemia"/>
-        <a:font script="Cher" typeface="Plantagenet Cherokee"/>
-        <a:font script="Yiii" typeface="Microsoft Yi Baiti"/>
-        <a:font script="Tibt" typeface="Microsoft Himalaya"/>
-        <a:font script="Thaa" typeface="MV Boli"/>
-        <a:font script="Deva" typeface="Mangal"/>
-        <a:font script="Telu" typeface="Gautami"/>
-        <a:font script="Taml" typeface="Latha"/>
-        <a:font script="Syrc" typeface="Estrangelo Edessa"/>
-        <a:font script="Orya" typeface="Kalinga"/>
-        <a:font script="Mlym" typeface="Kartika"/>
-        <a:font script="Laoo" typeface="DokChampa"/>
-        <a:font script="Sinh" typeface="Iskoola Pota"/>
-        <a:font script="Mong" typeface="Mongolian Baiti"/>
-        <a:font script="Viet" typeface="Times New Roman"/>
-        <a:font script="Uigh" typeface="Microsoft Uighur"/>
-        <a:font script="Geor" typeface="Sylfaen"/>
-      </a:majorFont>
-      <a:minorFont>
-        <a:latin typeface="Arial"/>
-        <a:ea typeface=""/>
-        <a:cs typeface=""/>
-        <a:font script="Jpan" typeface="ＭＳ Ｐゴシック"/>
-        <a:font script="Hang" typeface="맑은 고딕"/>
-        <a:font script="Hans" typeface="宋体"/>
-        <a:font script="Hant" typeface="新細明體"/>
-        <a:font script="Arab" typeface="Arial"/>
-        <a:font script="Hebr" typeface="Arial"/>
-        <a:font script="Thai" typeface="Cordia New"/>
-        <a:font script="Ethi" typeface="Nyala"/>
-        <a:font script="Beng" typeface="Vrinda"/>
-        <a:font script="Gujr" typeface="Shruti"/>
-        <a:font script="Khmr" typeface="DaunPenh"/>
-        <a:font script="Knda" typeface="Tunga"/>
-        <a:font script="Guru" typeface="Raavi"/>
-        <a:font script="Cans" typeface="Euphemia"/>
-        <a:font script="Cher" typeface="Plantagenet Cherokee"/>
-        <a:font script="Yiii" typeface="Microsoft Yi Baiti"/>
-        <a:font script="Tibt" typeface="Microsoft Himalaya"/>
-        <a:font script="Thaa" typeface="MV Boli"/>
-        <a:font script="Deva" typeface="Mangal"/>
-        <a:font script="Telu" typeface="Gautami"/>
-        <a:font script="Taml" typeface="Latha"/>
-        <a:font script="Syrc" typeface="Estrangelo Edessa"/>
-        <a:font script="Orya" typeface="Kalinga"/>
-        <a:font script="Mlym" typeface="Kartika"/>
-        <a:font script="Laoo" typeface="DokChampa"/>
-        <a:font script="Sinh" typeface="Iskoola Pota"/>
-        <a:font script="Mong" typeface="Mongolian Baiti"/>
-        <a:font script="Viet" typeface="Arial"/>
-        <a:font script="Uigh" typeface="Microsoft Uighur"/>
-        <a:font script="Geor" typeface="Sylfaen"/>
-      </a:minorFont>
-    </a:fontScheme>
-    <a:fmtScheme name="Office">
-      <a:fillStyleLst>
-        <a:solidFill>
-          <a:schemeClr val="phClr"/>
-        </a:solidFill>
-        <a:gradFill rotWithShape="1">
-          <a:gsLst>
-            <a:gs pos="0">
-              <a:schemeClr val="phClr">
-                <a:tint val="50000"/>
-                <a:satMod val="300000"/>
-              </a:schemeClr>
-            </a:gs>
-            <a:gs pos="35000">
-              <a:schemeClr val="phClr">
-                <a:tint val="37000"/>
-                <a:satMod val="300000"/>
-              </a:schemeClr>
-            </a:gs>
-            <a:gs pos="100000">
-              <a:schemeClr val="phClr">
-                <a:tint val="15000"/>
-                <a:satMod val="350000"/>
-              </a:schemeClr>
-            </a:gs>
-          </a:gsLst>
-          <a:lin ang="16200000" scaled="1"/>
-        </a:gradFill>
-        <a:gradFill rotWithShape="1">
-          <a:gsLst>
-            <a:gs pos="0">
-              <a:schemeClr val="phClr">
-                <a:tint val="100000"/>
-                <a:shade val="100000"/>
-                <a:satMod val="130000"/>
-              </a:schemeClr>
-            </a:gs>
-            <a:gs pos="100000">
-              <a:schemeClr val="phClr">
-                <a:tint val="50000"/>
-                <a:shade val="100000"/>
-                <a:satMod val="350000"/>
-              </a:schemeClr>
-            </a:gs>
-          </a:gsLst>
-          <a:lin ang="16200000" scaled="0"/>
-        </a:gradFill>
-      </a:fillStyleLst>
-      <a:lnStyleLst>
-        <a:ln w="9525" cap="flat" cmpd="sng" algn="ctr">
-          <a:solidFill>
-            <a:schemeClr val="phClr">
-              <a:shade val="95000"/>
-              <a:satMod val="105000"/>
-            </a:schemeClr>
-          </a:solidFill>
-          <a:prstDash val="solid"/>
-        </a:ln>
-        <a:ln w="25400" cap="flat" cmpd="sng" algn="ctr">
-          <a:solidFill>
-            <a:schemeClr val="phClr"/>
-          </a:solidFill>
-          <a:prstDash val="solid"/>
-        </a:ln>
-        <a:ln w="38100" cap="flat" cmpd="sng" algn="ctr">
-          <a:solidFill>
-            <a:schemeClr val="phClr"/>
-          </a:solidFill>
-          <a:prstDash val="solid"/>
-        </a:ln>
-      </a:lnStyleLst>
-      <a:effectStyleLst>
-        <a:effectStyle>
-          <a:effectLst>
-            <a:outerShdw blurRad="40000" dist="20000" dir="5400000" rotWithShape="0">
-              <a:srgbClr val="000000">
-                <a:alpha val="38000"/>
-              </a:srgbClr>
-            </a:outerShdw>
-          </a:effectLst>
-        </a:effectStyle>
-        <a:effectStyle>
-          <a:effectLst>
-            <a:outerShdw blurRad="40000" dist="23000" dir="5400000" rotWithShape="0">
-              <a:srgbClr val="000000">
-                <a:alpha val="35000"/>
-              </a:srgbClr>
-            </a:outerShdw>
-          </a:effectLst>
-        </a:effectStyle>
-        <a:effectStyle>
-          <a:effectLst>
-            <a:outerShdw blurRad="40000" dist="23000" dir="5400000" rotWithShape="0">
-              <a:srgbClr val="000000">
-                <a:alpha val="35000"/>
-              </a:srgbClr>
-            </a:outerShdw>
-          </a:effectLst>
-          <a:scene3d>
-            <a:camera prst="orthographicFront">
-              <a:rot lat="0" lon="0" rev="0"/>
-            </a:camera>
-            <a:lightRig rig="threePt" dir="t">
-              <a:rot lat="0" lon="0" rev="1200000"/>
-            </a:lightRig>
-          </a:scene3d>
-          <a:sp3d>
-            <a:bevelT w="63500" h="25400"/>
-          </a:sp3d>
-        </a:effectStyle>
-      </a:effectStyleLst>
-      <a:bgFillStyleLst>
-        <a:solidFill>
-          <a:schemeClr val="phClr"/>
-        </a:solidFill>
-        <a:gradFill rotWithShape="1">
-          <a:gsLst>
-            <a:gs pos="0">
-              <a:schemeClr val="phClr">
-                <a:tint val="40000"/>
-                <a:satMod val="350000"/>
-              </a:schemeClr>
-            </a:gs>
-            <a:gs pos="40000">
-              <a:schemeClr val="phClr">
-                <a:tint val="45000"/>
-                <a:shade val="99000"/>
-                <a:satMod val="350000"/>
-              </a:schemeClr>
-            </a:gs>
-            <a:gs pos="100000">
-              <a:schemeClr val="phClr">
-                <a:shade val="20000"/>
-                <a:satMod val="255000"/>
-              </a:schemeClr>
-            </a:gs>
-          </a:gsLst>
-          <a:path path="circle">
-            <a:fillToRect l="50000" t="-80000" r="50000" b="180000"/>
-          </a:path>
-        </a:gradFill>
-        <a:gradFill rotWithShape="1">
-          <a:gsLst>
-            <a:gs pos="0">
-              <a:schemeClr val="phClr">
-                <a:tint val="80000"/>
-                <a:satMod val="300000"/>
-              </a:schemeClr>
-            </a:gs>
-            <a:gs pos="100000">
-              <a:schemeClr val="phClr">
-                <a:shade val="30000"/>
-                <a:satMod val="200000"/>
-              </a:schemeClr>
-            </a:gs>
-          </a:gsLst>
-          <a:path path="circle">
-            <a:fillToRect l="50000" t="50000" r="50000" b="50000"/>
-          </a:path>
-        </a:gradFill>
-      </a:bgFillStyleLst>
-    </a:fmtScheme>
-  </a:themeElements>
+  <a:objectDefaults/>
+  <a:extraClrSchemeLst/>
 </a:theme>
 </file>